--- a/Presentacion.pptx
+++ b/Presentacion.pptx
@@ -1,34 +1,30 @@
 
 <file path=ppt/presentation.xml><?xml version="1.0" encoding="utf-8"?>
-<p:presentation xmlns:a="http://schemas.openxmlformats.org/drawingml/2006/main" xmlns:r="http://schemas.openxmlformats.org/officeDocument/2006/relationships" xmlns:p="http://schemas.openxmlformats.org/presentationml/2006/main" saveSubsetFonts="1" embedTrueTypeFonts="true">
+<p:presentation xmlns:a="http://schemas.openxmlformats.org/drawingml/2006/main" xmlns:r="http://schemas.openxmlformats.org/officeDocument/2006/relationships" xmlns:p="http://schemas.openxmlformats.org/presentationml/2006/main" embedTrueTypeFonts="1" saveSubsetFonts="1">
   <p:sldMasterIdLst>
     <p:sldMasterId id="2147483648" r:id="rId1"/>
   </p:sldMasterIdLst>
   <p:sldIdLst>
-    <p:sldId id="256" r:id="rId6"/>
-    <p:sldId id="257" r:id="rId7"/>
-    <p:sldId id="258" r:id="rId8"/>
-    <p:sldId id="259" r:id="rId9"/>
-    <p:sldId id="260" r:id="rId10"/>
+    <p:sldId id="256" r:id="rId2"/>
+    <p:sldId id="257" r:id="rId3"/>
+    <p:sldId id="258" r:id="rId4"/>
+    <p:sldId id="259" r:id="rId5"/>
+    <p:sldId id="260" r:id="rId6"/>
   </p:sldIdLst>
   <p:sldSz cx="18288000" cy="10287000"/>
   <p:notesSz cx="6858000" cy="9144000"/>
   <p:embeddedFontLst>
     <p:embeddedFont>
-      <p:font typeface="Montserrat Ultra-Bold" charset="1" panose="00000900000000000000"/>
-      <p:regular r:id="rId11"/>
+      <p:font typeface="Montserrat" panose="00000500000000000000" pitchFamily="2" charset="0"/>
+      <p:regular r:id="rId7"/>
     </p:embeddedFont>
     <p:embeddedFont>
-      <p:font typeface="Montserrat Bold" charset="1" panose="00000800000000000000"/>
-      <p:regular r:id="rId12"/>
+      <p:font typeface="Montserrat Medium Italics" panose="020B0604020202020204" charset="0"/>
+      <p:regular r:id="rId8"/>
     </p:embeddedFont>
     <p:embeddedFont>
-      <p:font typeface="Montserrat" charset="1" panose="00000500000000000000"/>
-      <p:regular r:id="rId13"/>
-    </p:embeddedFont>
-    <p:embeddedFont>
-      <p:font typeface="Montserrat Medium Italics" charset="1" panose="00000600000000000000"/>
-      <p:regular r:id="rId14"/>
+      <p:font typeface="Montserrat Ultra-Bold" panose="020B0604020202020204" charset="0"/>
+      <p:regular r:id="rId9"/>
     </p:embeddedFont>
   </p:embeddedFontLst>
   <p:defaultTextStyle>
@@ -126,6 +122,22 @@
       </a:defRPr>
     </a:lvl9pPr>
   </p:defaultTextStyle>
+  <p:extLst>
+    <p:ext uri="{EFAFB233-063F-42B5-8137-9DF3F51BA10A}">
+      <p15:sldGuideLst xmlns:p15="http://schemas.microsoft.com/office/powerpoint/2012/main">
+        <p15:guide id="1" orient="horz" pos="2160">
+          <p15:clr>
+            <a:srgbClr val="A4A3A4"/>
+          </p15:clr>
+        </p15:guide>
+        <p15:guide id="2" pos="2880">
+          <p15:clr>
+            <a:srgbClr val="A4A3A4"/>
+          </p15:clr>
+        </p15:guide>
+      </p15:sldGuideLst>
+    </p:ext>
+  </p:extLst>
 </p:presentation>
 </file>
 
@@ -167,10 +179,9 @@
           <a:lstStyle/>
           <a:p>
             <a:r>
-              <a:rPr lang="en-US" smtClean="0"/>
+              <a:rPr lang="en-US"/>
               <a:t>Click to edit Master title style</a:t>
             </a:r>
-            <a:endParaRPr lang="en-US"/>
           </a:p>
         </p:txBody>
       </p:sp>
@@ -286,10 +297,9 @@
           </a:lstStyle>
           <a:p>
             <a:r>
-              <a:rPr lang="en-US" smtClean="0"/>
+              <a:rPr lang="en-US"/>
               <a:t>Click to edit Master subtitle style</a:t>
             </a:r>
-            <a:endParaRPr lang="en-US"/>
           </a:p>
         </p:txBody>
       </p:sp>
@@ -311,7 +321,7 @@
             <a:fld id="{1D8BD707-D9CF-40AE-B4C6-C98DA3205C09}" type="datetimeFigureOut">
               <a:rPr lang="en-US" smtClean="0"/>
               <a:pPr/>
-              <a:t>8/1/2011</a:t>
+              <a:t>7/7/2026</a:t>
             </a:fld>
             <a:endParaRPr lang="en-US"/>
           </a:p>
@@ -354,7 +364,7 @@
             <a:fld id="{B6F15528-21DE-4FAA-801E-634DDDAF4B2B}" type="slidenum">
               <a:rPr lang="en-US" smtClean="0"/>
               <a:pPr/>
-              <a:t>‹#›</a:t>
+              <a:t>‹Nº›</a:t>
             </a:fld>
             <a:endParaRPr lang="en-US"/>
           </a:p>
@@ -401,10 +411,9 @@
           <a:lstStyle/>
           <a:p>
             <a:r>
-              <a:rPr lang="en-US" smtClean="0"/>
+              <a:rPr lang="en-US"/>
               <a:t>Click to edit Master title style</a:t>
             </a:r>
-            <a:endParaRPr lang="en-US"/>
           </a:p>
         </p:txBody>
       </p:sp>
@@ -425,38 +434,37 @@
           <a:p>
             <a:pPr lvl="0"/>
             <a:r>
-              <a:rPr lang="en-US" smtClean="0"/>
+              <a:rPr lang="en-US"/>
               <a:t>Click to edit Master text styles</a:t>
             </a:r>
           </a:p>
           <a:p>
             <a:pPr lvl="1"/>
             <a:r>
-              <a:rPr lang="en-US" smtClean="0"/>
+              <a:rPr lang="en-US"/>
               <a:t>Second level</a:t>
             </a:r>
           </a:p>
           <a:p>
             <a:pPr lvl="2"/>
             <a:r>
-              <a:rPr lang="en-US" smtClean="0"/>
+              <a:rPr lang="en-US"/>
               <a:t>Third level</a:t>
             </a:r>
           </a:p>
           <a:p>
             <a:pPr lvl="3"/>
             <a:r>
-              <a:rPr lang="en-US" smtClean="0"/>
+              <a:rPr lang="en-US"/>
               <a:t>Fourth level</a:t>
             </a:r>
           </a:p>
           <a:p>
             <a:pPr lvl="4"/>
             <a:r>
-              <a:rPr lang="en-US" smtClean="0"/>
+              <a:rPr lang="en-US"/>
               <a:t>Fifth level</a:t>
             </a:r>
-            <a:endParaRPr lang="en-US"/>
           </a:p>
         </p:txBody>
       </p:sp>
@@ -478,7 +486,7 @@
             <a:fld id="{1D8BD707-D9CF-40AE-B4C6-C98DA3205C09}" type="datetimeFigureOut">
               <a:rPr lang="en-US" smtClean="0"/>
               <a:pPr/>
-              <a:t>8/1/2011</a:t>
+              <a:t>7/7/2026</a:t>
             </a:fld>
             <a:endParaRPr lang="en-US"/>
           </a:p>
@@ -521,7 +529,7 @@
             <a:fld id="{B6F15528-21DE-4FAA-801E-634DDDAF4B2B}" type="slidenum">
               <a:rPr lang="en-US" smtClean="0"/>
               <a:pPr/>
-              <a:t>‹#›</a:t>
+              <a:t>‹Nº›</a:t>
             </a:fld>
             <a:endParaRPr lang="en-US"/>
           </a:p>
@@ -573,10 +581,9 @@
           <a:lstStyle/>
           <a:p>
             <a:r>
-              <a:rPr lang="en-US" smtClean="0"/>
+              <a:rPr lang="en-US"/>
               <a:t>Click to edit Master title style</a:t>
             </a:r>
-            <a:endParaRPr lang="en-US"/>
           </a:p>
         </p:txBody>
       </p:sp>
@@ -602,38 +609,37 @@
           <a:p>
             <a:pPr lvl="0"/>
             <a:r>
-              <a:rPr lang="en-US" smtClean="0"/>
+              <a:rPr lang="en-US"/>
               <a:t>Click to edit Master text styles</a:t>
             </a:r>
           </a:p>
           <a:p>
             <a:pPr lvl="1"/>
             <a:r>
-              <a:rPr lang="en-US" smtClean="0"/>
+              <a:rPr lang="en-US"/>
               <a:t>Second level</a:t>
             </a:r>
           </a:p>
           <a:p>
             <a:pPr lvl="2"/>
             <a:r>
-              <a:rPr lang="en-US" smtClean="0"/>
+              <a:rPr lang="en-US"/>
               <a:t>Third level</a:t>
             </a:r>
           </a:p>
           <a:p>
             <a:pPr lvl="3"/>
             <a:r>
-              <a:rPr lang="en-US" smtClean="0"/>
+              <a:rPr lang="en-US"/>
               <a:t>Fourth level</a:t>
             </a:r>
           </a:p>
           <a:p>
             <a:pPr lvl="4"/>
             <a:r>
-              <a:rPr lang="en-US" smtClean="0"/>
+              <a:rPr lang="en-US"/>
               <a:t>Fifth level</a:t>
             </a:r>
-            <a:endParaRPr lang="en-US"/>
           </a:p>
         </p:txBody>
       </p:sp>
@@ -655,7 +661,7 @@
             <a:fld id="{1D8BD707-D9CF-40AE-B4C6-C98DA3205C09}" type="datetimeFigureOut">
               <a:rPr lang="en-US" smtClean="0"/>
               <a:pPr/>
-              <a:t>8/1/2011</a:t>
+              <a:t>7/7/2026</a:t>
             </a:fld>
             <a:endParaRPr lang="en-US"/>
           </a:p>
@@ -698,7 +704,7 @@
             <a:fld id="{B6F15528-21DE-4FAA-801E-634DDDAF4B2B}" type="slidenum">
               <a:rPr lang="en-US" smtClean="0"/>
               <a:pPr/>
-              <a:t>‹#›</a:t>
+              <a:t>‹Nº›</a:t>
             </a:fld>
             <a:endParaRPr lang="en-US"/>
           </a:p>
@@ -745,10 +751,9 @@
           <a:lstStyle/>
           <a:p>
             <a:r>
-              <a:rPr lang="en-US" smtClean="0"/>
+              <a:rPr lang="en-US"/>
               <a:t>Click to edit Master title style</a:t>
             </a:r>
-            <a:endParaRPr lang="en-US"/>
           </a:p>
         </p:txBody>
       </p:sp>
@@ -769,38 +774,37 @@
           <a:p>
             <a:pPr lvl="0"/>
             <a:r>
-              <a:rPr lang="en-US" smtClean="0"/>
+              <a:rPr lang="en-US"/>
               <a:t>Click to edit Master text styles</a:t>
             </a:r>
           </a:p>
           <a:p>
             <a:pPr lvl="1"/>
             <a:r>
-              <a:rPr lang="en-US" smtClean="0"/>
+              <a:rPr lang="en-US"/>
               <a:t>Second level</a:t>
             </a:r>
           </a:p>
           <a:p>
             <a:pPr lvl="2"/>
             <a:r>
-              <a:rPr lang="en-US" smtClean="0"/>
+              <a:rPr lang="en-US"/>
               <a:t>Third level</a:t>
             </a:r>
           </a:p>
           <a:p>
             <a:pPr lvl="3"/>
             <a:r>
-              <a:rPr lang="en-US" smtClean="0"/>
+              <a:rPr lang="en-US"/>
               <a:t>Fourth level</a:t>
             </a:r>
           </a:p>
           <a:p>
             <a:pPr lvl="4"/>
             <a:r>
-              <a:rPr lang="en-US" smtClean="0"/>
+              <a:rPr lang="en-US"/>
               <a:t>Fifth level</a:t>
             </a:r>
-            <a:endParaRPr lang="en-US"/>
           </a:p>
         </p:txBody>
       </p:sp>
@@ -822,7 +826,7 @@
             <a:fld id="{1D8BD707-D9CF-40AE-B4C6-C98DA3205C09}" type="datetimeFigureOut">
               <a:rPr lang="en-US" smtClean="0"/>
               <a:pPr/>
-              <a:t>8/1/2011</a:t>
+              <a:t>7/7/2026</a:t>
             </a:fld>
             <a:endParaRPr lang="en-US"/>
           </a:p>
@@ -865,7 +869,7 @@
             <a:fld id="{B6F15528-21DE-4FAA-801E-634DDDAF4B2B}" type="slidenum">
               <a:rPr lang="en-US" smtClean="0"/>
               <a:pPr/>
-              <a:t>‹#›</a:t>
+              <a:t>‹Nº›</a:t>
             </a:fld>
             <a:endParaRPr lang="en-US"/>
           </a:p>
@@ -921,10 +925,9 @@
           </a:lstStyle>
           <a:p>
             <a:r>
-              <a:rPr lang="en-US" smtClean="0"/>
+              <a:rPr lang="en-US"/>
               <a:t>Click to edit Master title style</a:t>
             </a:r>
-            <a:endParaRPr lang="en-US"/>
           </a:p>
         </p:txBody>
       </p:sp>
@@ -1041,7 +1044,7 @@
           <a:p>
             <a:pPr lvl="0"/>
             <a:r>
-              <a:rPr lang="en-US" smtClean="0"/>
+              <a:rPr lang="en-US"/>
               <a:t>Click to edit Master text styles</a:t>
             </a:r>
           </a:p>
@@ -1065,7 +1068,7 @@
             <a:fld id="{1D8BD707-D9CF-40AE-B4C6-C98DA3205C09}" type="datetimeFigureOut">
               <a:rPr lang="en-US" smtClean="0"/>
               <a:pPr/>
-              <a:t>8/1/2011</a:t>
+              <a:t>7/7/2026</a:t>
             </a:fld>
             <a:endParaRPr lang="en-US"/>
           </a:p>
@@ -1108,7 +1111,7 @@
             <a:fld id="{B6F15528-21DE-4FAA-801E-634DDDAF4B2B}" type="slidenum">
               <a:rPr lang="en-US" smtClean="0"/>
               <a:pPr/>
-              <a:t>‹#›</a:t>
+              <a:t>‹Nº›</a:t>
             </a:fld>
             <a:endParaRPr lang="en-US"/>
           </a:p>
@@ -1155,10 +1158,9 @@
           <a:lstStyle/>
           <a:p>
             <a:r>
-              <a:rPr lang="en-US" smtClean="0"/>
+              <a:rPr lang="en-US"/>
               <a:t>Click to edit Master title style</a:t>
             </a:r>
-            <a:endParaRPr lang="en-US"/>
           </a:p>
         </p:txBody>
       </p:sp>
@@ -1212,38 +1214,37 @@
           <a:p>
             <a:pPr lvl="0"/>
             <a:r>
-              <a:rPr lang="en-US" smtClean="0"/>
+              <a:rPr lang="en-US"/>
               <a:t>Click to edit Master text styles</a:t>
             </a:r>
           </a:p>
           <a:p>
             <a:pPr lvl="1"/>
             <a:r>
-              <a:rPr lang="en-US" smtClean="0"/>
+              <a:rPr lang="en-US"/>
               <a:t>Second level</a:t>
             </a:r>
           </a:p>
           <a:p>
             <a:pPr lvl="2"/>
             <a:r>
-              <a:rPr lang="en-US" smtClean="0"/>
+              <a:rPr lang="en-US"/>
               <a:t>Third level</a:t>
             </a:r>
           </a:p>
           <a:p>
             <a:pPr lvl="3"/>
             <a:r>
-              <a:rPr lang="en-US" smtClean="0"/>
+              <a:rPr lang="en-US"/>
               <a:t>Fourth level</a:t>
             </a:r>
           </a:p>
           <a:p>
             <a:pPr lvl="4"/>
             <a:r>
-              <a:rPr lang="en-US" smtClean="0"/>
+              <a:rPr lang="en-US"/>
               <a:t>Fifth level</a:t>
             </a:r>
-            <a:endParaRPr lang="en-US"/>
           </a:p>
         </p:txBody>
       </p:sp>
@@ -1297,38 +1298,37 @@
           <a:p>
             <a:pPr lvl="0"/>
             <a:r>
-              <a:rPr lang="en-US" smtClean="0"/>
+              <a:rPr lang="en-US"/>
               <a:t>Click to edit Master text styles</a:t>
             </a:r>
           </a:p>
           <a:p>
             <a:pPr lvl="1"/>
             <a:r>
-              <a:rPr lang="en-US" smtClean="0"/>
+              <a:rPr lang="en-US"/>
               <a:t>Second level</a:t>
             </a:r>
           </a:p>
           <a:p>
             <a:pPr lvl="2"/>
             <a:r>
-              <a:rPr lang="en-US" smtClean="0"/>
+              <a:rPr lang="en-US"/>
               <a:t>Third level</a:t>
             </a:r>
           </a:p>
           <a:p>
             <a:pPr lvl="3"/>
             <a:r>
-              <a:rPr lang="en-US" smtClean="0"/>
+              <a:rPr lang="en-US"/>
               <a:t>Fourth level</a:t>
             </a:r>
           </a:p>
           <a:p>
             <a:pPr lvl="4"/>
             <a:r>
-              <a:rPr lang="en-US" smtClean="0"/>
+              <a:rPr lang="en-US"/>
               <a:t>Fifth level</a:t>
             </a:r>
-            <a:endParaRPr lang="en-US"/>
           </a:p>
         </p:txBody>
       </p:sp>
@@ -1350,7 +1350,7 @@
             <a:fld id="{1D8BD707-D9CF-40AE-B4C6-C98DA3205C09}" type="datetimeFigureOut">
               <a:rPr lang="en-US" smtClean="0"/>
               <a:pPr/>
-              <a:t>8/1/2011</a:t>
+              <a:t>7/7/2026</a:t>
             </a:fld>
             <a:endParaRPr lang="en-US"/>
           </a:p>
@@ -1393,7 +1393,7 @@
             <a:fld id="{B6F15528-21DE-4FAA-801E-634DDDAF4B2B}" type="slidenum">
               <a:rPr lang="en-US" smtClean="0"/>
               <a:pPr/>
-              <a:t>‹#›</a:t>
+              <a:t>‹Nº›</a:t>
             </a:fld>
             <a:endParaRPr lang="en-US"/>
           </a:p>
@@ -1444,10 +1444,9 @@
           </a:lstStyle>
           <a:p>
             <a:r>
-              <a:rPr lang="en-US" smtClean="0"/>
+              <a:rPr lang="en-US"/>
               <a:t>Click to edit Master title style</a:t>
             </a:r>
-            <a:endParaRPr lang="en-US"/>
           </a:p>
         </p:txBody>
       </p:sp>
@@ -1510,7 +1509,7 @@
           <a:p>
             <a:pPr lvl="0"/>
             <a:r>
-              <a:rPr lang="en-US" smtClean="0"/>
+              <a:rPr lang="en-US"/>
               <a:t>Click to edit Master text styles</a:t>
             </a:r>
           </a:p>
@@ -1566,38 +1565,37 @@
           <a:p>
             <a:pPr lvl="0"/>
             <a:r>
-              <a:rPr lang="en-US" smtClean="0"/>
+              <a:rPr lang="en-US"/>
               <a:t>Click to edit Master text styles</a:t>
             </a:r>
           </a:p>
           <a:p>
             <a:pPr lvl="1"/>
             <a:r>
-              <a:rPr lang="en-US" smtClean="0"/>
+              <a:rPr lang="en-US"/>
               <a:t>Second level</a:t>
             </a:r>
           </a:p>
           <a:p>
             <a:pPr lvl="2"/>
             <a:r>
-              <a:rPr lang="en-US" smtClean="0"/>
+              <a:rPr lang="en-US"/>
               <a:t>Third level</a:t>
             </a:r>
           </a:p>
           <a:p>
             <a:pPr lvl="3"/>
             <a:r>
-              <a:rPr lang="en-US" smtClean="0"/>
+              <a:rPr lang="en-US"/>
               <a:t>Fourth level</a:t>
             </a:r>
           </a:p>
           <a:p>
             <a:pPr lvl="4"/>
             <a:r>
-              <a:rPr lang="en-US" smtClean="0"/>
+              <a:rPr lang="en-US"/>
               <a:t>Fifth level</a:t>
             </a:r>
-            <a:endParaRPr lang="en-US"/>
           </a:p>
         </p:txBody>
       </p:sp>
@@ -1660,7 +1658,7 @@
           <a:p>
             <a:pPr lvl="0"/>
             <a:r>
-              <a:rPr lang="en-US" smtClean="0"/>
+              <a:rPr lang="en-US"/>
               <a:t>Click to edit Master text styles</a:t>
             </a:r>
           </a:p>
@@ -1716,38 +1714,37 @@
           <a:p>
             <a:pPr lvl="0"/>
             <a:r>
-              <a:rPr lang="en-US" smtClean="0"/>
+              <a:rPr lang="en-US"/>
               <a:t>Click to edit Master text styles</a:t>
             </a:r>
           </a:p>
           <a:p>
             <a:pPr lvl="1"/>
             <a:r>
-              <a:rPr lang="en-US" smtClean="0"/>
+              <a:rPr lang="en-US"/>
               <a:t>Second level</a:t>
             </a:r>
           </a:p>
           <a:p>
             <a:pPr lvl="2"/>
             <a:r>
-              <a:rPr lang="en-US" smtClean="0"/>
+              <a:rPr lang="en-US"/>
               <a:t>Third level</a:t>
             </a:r>
           </a:p>
           <a:p>
             <a:pPr lvl="3"/>
             <a:r>
-              <a:rPr lang="en-US" smtClean="0"/>
+              <a:rPr lang="en-US"/>
               <a:t>Fourth level</a:t>
             </a:r>
           </a:p>
           <a:p>
             <a:pPr lvl="4"/>
             <a:r>
-              <a:rPr lang="en-US" smtClean="0"/>
+              <a:rPr lang="en-US"/>
               <a:t>Fifth level</a:t>
             </a:r>
-            <a:endParaRPr lang="en-US"/>
           </a:p>
         </p:txBody>
       </p:sp>
@@ -1769,7 +1766,7 @@
             <a:fld id="{1D8BD707-D9CF-40AE-B4C6-C98DA3205C09}" type="datetimeFigureOut">
               <a:rPr lang="en-US" smtClean="0"/>
               <a:pPr/>
-              <a:t>8/1/2011</a:t>
+              <a:t>7/7/2026</a:t>
             </a:fld>
             <a:endParaRPr lang="en-US"/>
           </a:p>
@@ -1812,7 +1809,7 @@
             <a:fld id="{B6F15528-21DE-4FAA-801E-634DDDAF4B2B}" type="slidenum">
               <a:rPr lang="en-US" smtClean="0"/>
               <a:pPr/>
-              <a:t>‹#›</a:t>
+              <a:t>‹Nº›</a:t>
             </a:fld>
             <a:endParaRPr lang="en-US"/>
           </a:p>
@@ -1859,10 +1856,9 @@
           <a:lstStyle/>
           <a:p>
             <a:r>
-              <a:rPr lang="en-US" smtClean="0"/>
+              <a:rPr lang="en-US"/>
               <a:t>Click to edit Master title style</a:t>
             </a:r>
-            <a:endParaRPr lang="en-US"/>
           </a:p>
         </p:txBody>
       </p:sp>
@@ -1884,7 +1880,7 @@
             <a:fld id="{1D8BD707-D9CF-40AE-B4C6-C98DA3205C09}" type="datetimeFigureOut">
               <a:rPr lang="en-US" smtClean="0"/>
               <a:pPr/>
-              <a:t>8/1/2011</a:t>
+              <a:t>7/7/2026</a:t>
             </a:fld>
             <a:endParaRPr lang="en-US"/>
           </a:p>
@@ -1927,7 +1923,7 @@
             <a:fld id="{B6F15528-21DE-4FAA-801E-634DDDAF4B2B}" type="slidenum">
               <a:rPr lang="en-US" smtClean="0"/>
               <a:pPr/>
-              <a:t>‹#›</a:t>
+              <a:t>‹Nº›</a:t>
             </a:fld>
             <a:endParaRPr lang="en-US"/>
           </a:p>
@@ -1976,7 +1972,7 @@
             <a:fld id="{1D8BD707-D9CF-40AE-B4C6-C98DA3205C09}" type="datetimeFigureOut">
               <a:rPr lang="en-US" smtClean="0"/>
               <a:pPr/>
-              <a:t>8/1/2011</a:t>
+              <a:t>7/7/2026</a:t>
             </a:fld>
             <a:endParaRPr lang="en-US"/>
           </a:p>
@@ -2019,7 +2015,7 @@
             <a:fld id="{B6F15528-21DE-4FAA-801E-634DDDAF4B2B}" type="slidenum">
               <a:rPr lang="en-US" smtClean="0"/>
               <a:pPr/>
-              <a:t>‹#›</a:t>
+              <a:t>‹Nº›</a:t>
             </a:fld>
             <a:endParaRPr lang="en-US"/>
           </a:p>
@@ -2075,10 +2071,9 @@
           </a:lstStyle>
           <a:p>
             <a:r>
-              <a:rPr lang="en-US" smtClean="0"/>
+              <a:rPr lang="en-US"/>
               <a:t>Click to edit Master title style</a:t>
             </a:r>
-            <a:endParaRPr lang="en-US"/>
           </a:p>
         </p:txBody>
       </p:sp>
@@ -2132,38 +2127,37 @@
           <a:p>
             <a:pPr lvl="0"/>
             <a:r>
-              <a:rPr lang="en-US" smtClean="0"/>
+              <a:rPr lang="en-US"/>
               <a:t>Click to edit Master text styles</a:t>
             </a:r>
           </a:p>
           <a:p>
             <a:pPr lvl="1"/>
             <a:r>
-              <a:rPr lang="en-US" smtClean="0"/>
+              <a:rPr lang="en-US"/>
               <a:t>Second level</a:t>
             </a:r>
           </a:p>
           <a:p>
             <a:pPr lvl="2"/>
             <a:r>
-              <a:rPr lang="en-US" smtClean="0"/>
+              <a:rPr lang="en-US"/>
               <a:t>Third level</a:t>
             </a:r>
           </a:p>
           <a:p>
             <a:pPr lvl="3"/>
             <a:r>
-              <a:rPr lang="en-US" smtClean="0"/>
+              <a:rPr lang="en-US"/>
               <a:t>Fourth level</a:t>
             </a:r>
           </a:p>
           <a:p>
             <a:pPr lvl="4"/>
             <a:r>
-              <a:rPr lang="en-US" smtClean="0"/>
+              <a:rPr lang="en-US"/>
               <a:t>Fifth level</a:t>
             </a:r>
-            <a:endParaRPr lang="en-US"/>
           </a:p>
         </p:txBody>
       </p:sp>
@@ -2226,7 +2220,7 @@
           <a:p>
             <a:pPr lvl="0"/>
             <a:r>
-              <a:rPr lang="en-US" smtClean="0"/>
+              <a:rPr lang="en-US"/>
               <a:t>Click to edit Master text styles</a:t>
             </a:r>
           </a:p>
@@ -2250,7 +2244,7 @@
             <a:fld id="{1D8BD707-D9CF-40AE-B4C6-C98DA3205C09}" type="datetimeFigureOut">
               <a:rPr lang="en-US" smtClean="0"/>
               <a:pPr/>
-              <a:t>8/1/2011</a:t>
+              <a:t>7/7/2026</a:t>
             </a:fld>
             <a:endParaRPr lang="en-US"/>
           </a:p>
@@ -2293,7 +2287,7 @@
             <a:fld id="{B6F15528-21DE-4FAA-801E-634DDDAF4B2B}" type="slidenum">
               <a:rPr lang="en-US" smtClean="0"/>
               <a:pPr/>
-              <a:t>‹#›</a:t>
+              <a:t>‹Nº›</a:t>
             </a:fld>
             <a:endParaRPr lang="en-US"/>
           </a:p>
@@ -2349,10 +2343,9 @@
           </a:lstStyle>
           <a:p>
             <a:r>
-              <a:rPr lang="en-US" smtClean="0"/>
+              <a:rPr lang="en-US"/>
               <a:t>Click to edit Master title style</a:t>
             </a:r>
-            <a:endParaRPr lang="en-US"/>
           </a:p>
         </p:txBody>
       </p:sp>
@@ -2476,7 +2469,7 @@
           <a:p>
             <a:pPr lvl="0"/>
             <a:r>
-              <a:rPr lang="en-US" smtClean="0"/>
+              <a:rPr lang="en-US"/>
               <a:t>Click to edit Master text styles</a:t>
             </a:r>
           </a:p>
@@ -2500,7 +2493,7 @@
             <a:fld id="{1D8BD707-D9CF-40AE-B4C6-C98DA3205C09}" type="datetimeFigureOut">
               <a:rPr lang="en-US" smtClean="0"/>
               <a:pPr/>
-              <a:t>8/1/2011</a:t>
+              <a:t>7/7/2026</a:t>
             </a:fld>
             <a:endParaRPr lang="en-US"/>
           </a:p>
@@ -2543,7 +2536,7 @@
             <a:fld id="{B6F15528-21DE-4FAA-801E-634DDDAF4B2B}" type="slidenum">
               <a:rPr lang="en-US" smtClean="0"/>
               <a:pPr/>
-              <a:t>‹#›</a:t>
+              <a:t>‹Nº›</a:t>
             </a:fld>
             <a:endParaRPr lang="en-US"/>
           </a:p>
@@ -2605,10 +2598,9 @@
           <a:lstStyle/>
           <a:p>
             <a:r>
-              <a:rPr lang="en-US" smtClean="0"/>
+              <a:rPr lang="en-US"/>
               <a:t>Click to edit Master title style</a:t>
             </a:r>
-            <a:endParaRPr lang="en-US"/>
           </a:p>
         </p:txBody>
       </p:sp>
@@ -2639,38 +2631,37 @@
           <a:p>
             <a:pPr lvl="0"/>
             <a:r>
-              <a:rPr lang="en-US" smtClean="0"/>
+              <a:rPr lang="en-US"/>
               <a:t>Click to edit Master text styles</a:t>
             </a:r>
           </a:p>
           <a:p>
             <a:pPr lvl="1"/>
             <a:r>
-              <a:rPr lang="en-US" smtClean="0"/>
+              <a:rPr lang="en-US"/>
               <a:t>Second level</a:t>
             </a:r>
           </a:p>
           <a:p>
             <a:pPr lvl="2"/>
             <a:r>
-              <a:rPr lang="en-US" smtClean="0"/>
+              <a:rPr lang="en-US"/>
               <a:t>Third level</a:t>
             </a:r>
           </a:p>
           <a:p>
             <a:pPr lvl="3"/>
             <a:r>
-              <a:rPr lang="en-US" smtClean="0"/>
+              <a:rPr lang="en-US"/>
               <a:t>Fourth level</a:t>
             </a:r>
           </a:p>
           <a:p>
             <a:pPr lvl="4"/>
             <a:r>
-              <a:rPr lang="en-US" smtClean="0"/>
+              <a:rPr lang="en-US"/>
               <a:t>Fifth level</a:t>
             </a:r>
-            <a:endParaRPr lang="en-US"/>
           </a:p>
         </p:txBody>
       </p:sp>
@@ -2710,7 +2701,7 @@
             <a:fld id="{1D8BD707-D9CF-40AE-B4C6-C98DA3205C09}" type="datetimeFigureOut">
               <a:rPr lang="en-US" smtClean="0"/>
               <a:pPr/>
-              <a:t>8/1/2011</a:t>
+              <a:t>7/7/2026</a:t>
             </a:fld>
             <a:endParaRPr lang="en-US"/>
           </a:p>
@@ -2789,7 +2780,7 @@
             <a:fld id="{B6F15528-21DE-4FAA-801E-634DDDAF4B2B}" type="slidenum">
               <a:rPr lang="en-US" smtClean="0"/>
               <a:pPr/>
-              <a:t>‹#›</a:t>
+              <a:t>‹Nº›</a:t>
             </a:fld>
             <a:endParaRPr lang="en-US"/>
           </a:p>
@@ -3065,13 +3056,14 @@
 </file>
 
 <file path=ppt/slides/slide1.xml><?xml version="1.0" encoding="utf-8"?>
-<p:sld xmlns:p="http://schemas.openxmlformats.org/presentationml/2006/main" xmlns:a="http://schemas.openxmlformats.org/drawingml/2006/main" xmlns:r="http://schemas.openxmlformats.org/officeDocument/2006/relationships">
+<p:sld xmlns:a="http://schemas.openxmlformats.org/drawingml/2006/main" xmlns:r="http://schemas.openxmlformats.org/officeDocument/2006/relationships" xmlns:p="http://schemas.openxmlformats.org/presentationml/2006/main">
   <p:cSld>
     <p:bg>
       <p:bgPr>
         <a:solidFill>
           <a:srgbClr val="FAFAFA"/>
         </a:solidFill>
+        <a:effectLst/>
       </p:bgPr>
     </p:bg>
     <p:spTree>
@@ -3090,359 +3082,23 @@
       </p:grpSpPr>
       <p:sp>
         <p:nvSpPr>
-          <p:cNvPr name="TextBox 2" id="2"/>
-          <p:cNvSpPr txBox="true"/>
-          <p:nvPr/>
-        </p:nvSpPr>
-        <p:spPr>
-          <a:xfrm rot="0">
-            <a:off x="1624247" y="4149096"/>
-            <a:ext cx="13758809" cy="2173603"/>
-          </a:xfrm>
-          <a:prstGeom prst="rect">
-            <a:avLst/>
-          </a:prstGeom>
-        </p:spPr>
-        <p:txBody>
-          <a:bodyPr anchor="t" rtlCol="false" tIns="0" lIns="0" bIns="0" rIns="0">
-            <a:spAutoFit/>
-          </a:bodyPr>
-          <a:lstStyle/>
-          <a:p>
-            <a:pPr algn="l">
-              <a:lnSpc>
-                <a:spcPts val="5699"/>
-              </a:lnSpc>
-            </a:pPr>
-            <a:r>
-              <a:rPr lang="en-US" sz="5699" b="true">
-                <a:solidFill>
-                  <a:srgbClr val="000000"/>
-                </a:solidFill>
-                <a:latin typeface="Montserrat Ultra-Bold"/>
-                <a:ea typeface="Montserrat Ultra-Bold"/>
-                <a:cs typeface="Montserrat Ultra-Bold"/>
-                <a:sym typeface="Montserrat Ultra-Bold"/>
-              </a:rPr>
-              <a:t>Digitalización y O</a:t>
-            </a:r>
-            <a:r>
-              <a:rPr lang="en-US" sz="5699" b="true">
-                <a:solidFill>
-                  <a:srgbClr val="000000"/>
-                </a:solidFill>
-                <a:latin typeface="Montserrat Ultra-Bold"/>
-                <a:ea typeface="Montserrat Ultra-Bold"/>
-                <a:cs typeface="Montserrat Ultra-Bold"/>
-                <a:sym typeface="Montserrat Ultra-Bold"/>
-              </a:rPr>
-              <a:t>rganización Inteligente de Repartos</a:t>
-            </a:r>
-          </a:p>
-          <a:p>
-            <a:pPr algn="l">
-              <a:lnSpc>
-                <a:spcPts val="5699"/>
-              </a:lnSpc>
-            </a:pPr>
-          </a:p>
-        </p:txBody>
-      </p:sp>
-      <p:sp>
-        <p:nvSpPr>
-          <p:cNvPr name="TextBox 3" id="3"/>
-          <p:cNvSpPr txBox="true"/>
-          <p:nvPr/>
-        </p:nvSpPr>
-        <p:spPr>
-          <a:xfrm rot="0">
-            <a:off x="1624247" y="1643297"/>
-            <a:ext cx="2262456" cy="209582"/>
-          </a:xfrm>
-          <a:prstGeom prst="rect">
-            <a:avLst/>
-          </a:prstGeom>
-        </p:spPr>
-        <p:txBody>
-          <a:bodyPr anchor="t" rtlCol="false" tIns="0" lIns="0" bIns="0" rIns="0">
-            <a:spAutoFit/>
-          </a:bodyPr>
-          <a:lstStyle/>
-          <a:p>
-            <a:pPr algn="just">
-              <a:lnSpc>
-                <a:spcPts val="1501"/>
-              </a:lnSpc>
-            </a:pPr>
-            <a:r>
-              <a:rPr lang="en-US" b="true" sz="1501">
-                <a:solidFill>
-                  <a:srgbClr val="000000"/>
-                </a:solidFill>
-                <a:latin typeface="Montserrat Ultra-Bold"/>
-                <a:ea typeface="Montserrat Ultra-Bold"/>
-                <a:cs typeface="Montserrat Ultra-Bold"/>
-                <a:sym typeface="Montserrat Ultra-Bold"/>
-              </a:rPr>
-              <a:t>PROTOTYPE ESTUDIO</a:t>
-            </a:r>
-          </a:p>
-        </p:txBody>
-      </p:sp>
-      <p:sp>
-        <p:nvSpPr>
-          <p:cNvPr name="TextBox 4" id="4"/>
-          <p:cNvSpPr txBox="true"/>
-          <p:nvPr/>
-        </p:nvSpPr>
-        <p:spPr>
-          <a:xfrm rot="0">
-            <a:off x="12911264" y="1689135"/>
-            <a:ext cx="3752489" cy="209582"/>
-          </a:xfrm>
-          <a:prstGeom prst="rect">
-            <a:avLst/>
-          </a:prstGeom>
-        </p:spPr>
-        <p:txBody>
-          <a:bodyPr anchor="t" rtlCol="false" tIns="0" lIns="0" bIns="0" rIns="0">
-            <a:spAutoFit/>
-          </a:bodyPr>
-          <a:lstStyle/>
-          <a:p>
-            <a:pPr algn="r">
-              <a:lnSpc>
-                <a:spcPts val="1501"/>
-              </a:lnSpc>
-            </a:pPr>
-            <a:r>
-              <a:rPr lang="en-US" b="true" sz="1501">
-                <a:solidFill>
-                  <a:srgbClr val="000000"/>
-                </a:solidFill>
-                <a:latin typeface="Montserrat Bold"/>
-                <a:ea typeface="Montserrat Bold"/>
-                <a:cs typeface="Montserrat Bold"/>
-                <a:sym typeface="Montserrat Bold"/>
-              </a:rPr>
-              <a:t>CONTACTO</a:t>
-            </a:r>
-          </a:p>
-        </p:txBody>
-      </p:sp>
-      <p:sp>
-        <p:nvSpPr>
-          <p:cNvPr name="TextBox 5" id="5"/>
-          <p:cNvSpPr txBox="true"/>
-          <p:nvPr/>
-        </p:nvSpPr>
-        <p:spPr>
-          <a:xfrm rot="0">
-            <a:off x="14125713" y="2083317"/>
-            <a:ext cx="2538040" cy="178032"/>
-          </a:xfrm>
-          <a:prstGeom prst="rect">
-            <a:avLst/>
-          </a:prstGeom>
-        </p:spPr>
-        <p:txBody>
-          <a:bodyPr anchor="t" rtlCol="false" tIns="0" lIns="0" bIns="0" rIns="0">
-            <a:spAutoFit/>
-          </a:bodyPr>
-          <a:lstStyle/>
-          <a:p>
-            <a:pPr algn="r">
-              <a:lnSpc>
-                <a:spcPts val="1384"/>
-              </a:lnSpc>
-            </a:pPr>
-            <a:r>
-              <a:rPr lang="en-US" sz="1384">
-                <a:solidFill>
-                  <a:srgbClr val="000000"/>
-                </a:solidFill>
-                <a:latin typeface="Montserrat"/>
-                <a:ea typeface="Montserrat"/>
-                <a:cs typeface="Montserrat"/>
-                <a:sym typeface="Montserrat"/>
-              </a:rPr>
-              <a:t>(291) 476 7623</a:t>
-            </a:r>
-          </a:p>
-        </p:txBody>
-      </p:sp>
-      <p:sp>
-        <p:nvSpPr>
-          <p:cNvPr name="TextBox 6" id="6"/>
-          <p:cNvSpPr txBox="true"/>
-          <p:nvPr/>
-        </p:nvSpPr>
-        <p:spPr>
-          <a:xfrm rot="0">
-            <a:off x="1635925" y="5606796"/>
-            <a:ext cx="13758809" cy="433337"/>
-          </a:xfrm>
-          <a:prstGeom prst="rect">
-            <a:avLst/>
-          </a:prstGeom>
-        </p:spPr>
-        <p:txBody>
-          <a:bodyPr anchor="t" rtlCol="false" tIns="0" lIns="0" bIns="0" rIns="0">
-            <a:spAutoFit/>
-          </a:bodyPr>
-          <a:lstStyle/>
-          <a:p>
-            <a:pPr algn="ctr">
-              <a:lnSpc>
-                <a:spcPts val="3799"/>
-              </a:lnSpc>
-            </a:pPr>
-            <a:r>
-              <a:rPr lang="en-US" b="true" sz="2134" i="true" spc="529">
-                <a:solidFill>
-                  <a:srgbClr val="000000"/>
-                </a:solidFill>
-                <a:latin typeface="Montserrat Medium Italics"/>
-                <a:ea typeface="Montserrat Medium Italics"/>
-                <a:cs typeface="Montserrat Medium Italics"/>
-                <a:sym typeface="Montserrat Medium Italics"/>
-              </a:rPr>
-              <a:t>DE LA HOJA FÍSICA AL ARCHIVO DIGITAL INDEXADO EN SEGUNDOS.</a:t>
-            </a:r>
-          </a:p>
-        </p:txBody>
-      </p:sp>
-      <p:sp>
-        <p:nvSpPr>
-          <p:cNvPr name="AutoShape 7" id="7"/>
+          <p:cNvPr id="10" name="Freeform 10"/>
           <p:cNvSpPr/>
           <p:nvPr/>
         </p:nvSpPr>
         <p:spPr>
-          <a:xfrm flipV="true">
-            <a:off x="1624247" y="4007164"/>
-            <a:ext cx="1555561" cy="0"/>
-          </a:xfrm>
-          <a:prstGeom prst="line">
-            <a:avLst/>
-          </a:prstGeom>
-          <a:ln cap="flat" w="85725">
-            <a:solidFill>
-              <a:srgbClr val="000000"/>
-            </a:solidFill>
-            <a:prstDash val="solid"/>
-            <a:headEnd type="none" len="sm" w="sm"/>
-            <a:tailEnd type="none" len="sm" w="sm"/>
-          </a:ln>
-        </p:spPr>
-      </p:sp>
-      <p:sp>
-        <p:nvSpPr>
-          <p:cNvPr name="TextBox 8" id="8"/>
-          <p:cNvSpPr txBox="true"/>
-          <p:nvPr/>
-        </p:nvSpPr>
-        <p:spPr>
-          <a:xfrm rot="0">
-            <a:off x="4587716" y="8254014"/>
-            <a:ext cx="9744167" cy="1170659"/>
-          </a:xfrm>
-          <a:prstGeom prst="rect">
-            <a:avLst/>
-          </a:prstGeom>
-        </p:spPr>
-        <p:txBody>
-          <a:bodyPr anchor="t" rtlCol="false" tIns="0" lIns="0" bIns="0" rIns="0">
-            <a:spAutoFit/>
-          </a:bodyPr>
-          <a:lstStyle/>
-          <a:p>
-            <a:pPr algn="l">
-              <a:lnSpc>
-                <a:spcPts val="3030"/>
-              </a:lnSpc>
-              <a:spcBef>
-                <a:spcPct val="0"/>
-              </a:spcBef>
-            </a:pPr>
-            <a:r>
-              <a:rPr lang="en-US" sz="3030">
-                <a:solidFill>
-                  <a:srgbClr val="000000"/>
-                </a:solidFill>
-                <a:latin typeface="Montserrat"/>
-                <a:ea typeface="Montserrat"/>
-                <a:cs typeface="Montserrat"/>
-                <a:sym typeface="Montserrat"/>
-              </a:rPr>
-              <a:t>Reducir a cero el tiempo de búsqueda de documentos y automatizar el control de repartos de la empresa.</a:t>
-            </a:r>
-          </a:p>
-        </p:txBody>
-      </p:sp>
-      <p:sp>
-        <p:nvSpPr>
-          <p:cNvPr name="TextBox 9" id="9"/>
-          <p:cNvSpPr txBox="true"/>
-          <p:nvPr/>
-        </p:nvSpPr>
-        <p:spPr>
-          <a:xfrm rot="0">
-            <a:off x="2051967" y="8263539"/>
-            <a:ext cx="2184428" cy="471580"/>
-          </a:xfrm>
-          <a:prstGeom prst="rect">
-            <a:avLst/>
-          </a:prstGeom>
-        </p:spPr>
-        <p:txBody>
-          <a:bodyPr anchor="t" rtlCol="false" tIns="0" lIns="0" bIns="0" rIns="0">
-            <a:spAutoFit/>
-          </a:bodyPr>
-          <a:lstStyle/>
-          <a:p>
-            <a:pPr algn="ctr">
-              <a:lnSpc>
-                <a:spcPts val="3570"/>
-              </a:lnSpc>
-              <a:spcBef>
-                <a:spcPct val="0"/>
-              </a:spcBef>
-            </a:pPr>
-            <a:r>
-              <a:rPr lang="en-US" b="true" sz="3570" u="sng">
-                <a:solidFill>
-                  <a:srgbClr val="000000"/>
-                </a:solidFill>
-                <a:latin typeface="Montserrat Ultra-Bold"/>
-                <a:ea typeface="Montserrat Ultra-Bold"/>
-                <a:cs typeface="Montserrat Ultra-Bold"/>
-                <a:sym typeface="Montserrat Ultra-Bold"/>
-              </a:rPr>
-              <a:t>Objetivo:</a:t>
-            </a:r>
-          </a:p>
-        </p:txBody>
-      </p:sp>
-      <p:sp>
-        <p:nvSpPr>
-          <p:cNvPr name="Freeform 10" id="10"/>
-          <p:cNvSpPr/>
-          <p:nvPr/>
-        </p:nvSpPr>
-        <p:spPr>
-          <a:xfrm flipH="false" flipV="false" rot="0">
-            <a:off x="14787509" y="7178495"/>
-            <a:ext cx="2574992" cy="2574992"/>
+          <a:xfrm>
+            <a:off x="11430000" y="6040133"/>
+            <a:ext cx="5932501" cy="3713354"/>
           </a:xfrm>
           <a:custGeom>
             <a:avLst/>
             <a:gdLst/>
             <a:ahLst/>
             <a:cxnLst/>
-            <a:rect r="r" b="b" t="t" l="l"/>
+            <a:rect l="l" t="t" r="r" b="b"/>
             <a:pathLst>
-              <a:path h="2574992" w="2574992">
+              <a:path w="2574992" h="2574992">
                 <a:moveTo>
                   <a:pt x="0" y="0"/>
                 </a:moveTo>
@@ -3467,11 +3123,327 @@
               <a:alphaModFix amt="64000"/>
             </a:blip>
             <a:stretch>
-              <a:fillRect l="0" t="0" r="0" b="0"/>
+              <a:fillRect/>
             </a:stretch>
           </a:blipFill>
+          <a:effectLst>
+            <a:softEdge rad="177800"/>
+          </a:effectLst>
         </p:spPr>
-      </p:sp>
+        <p:txBody>
+          <a:bodyPr/>
+          <a:lstStyle/>
+          <a:p>
+            <a:endParaRPr lang="es-AR"/>
+          </a:p>
+        </p:txBody>
+      </p:sp>
+      <p:sp>
+        <p:nvSpPr>
+          <p:cNvPr id="2" name="TextBox 2"/>
+          <p:cNvSpPr txBox="1"/>
+          <p:nvPr/>
+        </p:nvSpPr>
+        <p:spPr>
+          <a:xfrm>
+            <a:off x="1624247" y="4149096"/>
+            <a:ext cx="13758809" cy="2173603"/>
+          </a:xfrm>
+          <a:prstGeom prst="rect">
+            <a:avLst/>
+          </a:prstGeom>
+        </p:spPr>
+        <p:txBody>
+          <a:bodyPr lIns="0" tIns="0" rIns="0" bIns="0" rtlCol="0" anchor="t">
+            <a:spAutoFit/>
+          </a:bodyPr>
+          <a:lstStyle/>
+          <a:p>
+            <a:pPr algn="l">
+              <a:lnSpc>
+                <a:spcPts val="5699"/>
+              </a:lnSpc>
+            </a:pPr>
+            <a:r>
+              <a:rPr lang="en-US" sz="5699" b="1">
+                <a:solidFill>
+                  <a:srgbClr val="000000"/>
+                </a:solidFill>
+                <a:latin typeface="Montserrat Ultra-Bold"/>
+                <a:ea typeface="Montserrat Ultra-Bold"/>
+                <a:cs typeface="Montserrat Ultra-Bold"/>
+                <a:sym typeface="Montserrat Ultra-Bold"/>
+              </a:rPr>
+              <a:t>Digitalización y Organización Inteligente de Repartos</a:t>
+            </a:r>
+          </a:p>
+          <a:p>
+            <a:pPr algn="l">
+              <a:lnSpc>
+                <a:spcPts val="5699"/>
+              </a:lnSpc>
+            </a:pPr>
+            <a:endParaRPr lang="en-US" sz="5699" b="1">
+              <a:solidFill>
+                <a:srgbClr val="000000"/>
+              </a:solidFill>
+              <a:latin typeface="Montserrat Ultra-Bold"/>
+              <a:ea typeface="Montserrat Ultra-Bold"/>
+              <a:cs typeface="Montserrat Ultra-Bold"/>
+              <a:sym typeface="Montserrat Ultra-Bold"/>
+            </a:endParaRPr>
+          </a:p>
+        </p:txBody>
+      </p:sp>
+      <p:sp>
+        <p:nvSpPr>
+          <p:cNvPr id="5" name="TextBox 5"/>
+          <p:cNvSpPr txBox="1"/>
+          <p:nvPr/>
+        </p:nvSpPr>
+        <p:spPr>
+          <a:xfrm>
+            <a:off x="962451" y="1866900"/>
+            <a:ext cx="2538040" cy="178032"/>
+          </a:xfrm>
+          <a:prstGeom prst="rect">
+            <a:avLst/>
+          </a:prstGeom>
+        </p:spPr>
+        <p:txBody>
+          <a:bodyPr lIns="0" tIns="0" rIns="0" bIns="0" rtlCol="0" anchor="t">
+            <a:spAutoFit/>
+          </a:bodyPr>
+          <a:lstStyle/>
+          <a:p>
+            <a:pPr algn="r">
+              <a:lnSpc>
+                <a:spcPts val="1384"/>
+              </a:lnSpc>
+            </a:pPr>
+            <a:r>
+              <a:rPr lang="en-US" sz="1384" dirty="0">
+                <a:solidFill>
+                  <a:srgbClr val="000000"/>
+                </a:solidFill>
+                <a:latin typeface="Montserrat"/>
+                <a:ea typeface="Montserrat"/>
+                <a:cs typeface="Montserrat"/>
+                <a:sym typeface="Montserrat"/>
+              </a:rPr>
+              <a:t>Sergio Ismael Córdoba</a:t>
+            </a:r>
+          </a:p>
+        </p:txBody>
+      </p:sp>
+      <p:sp>
+        <p:nvSpPr>
+          <p:cNvPr id="6" name="TextBox 6"/>
+          <p:cNvSpPr txBox="1"/>
+          <p:nvPr/>
+        </p:nvSpPr>
+        <p:spPr>
+          <a:xfrm>
+            <a:off x="1635925" y="5606796"/>
+            <a:ext cx="13758809" cy="433337"/>
+          </a:xfrm>
+          <a:prstGeom prst="rect">
+            <a:avLst/>
+          </a:prstGeom>
+        </p:spPr>
+        <p:txBody>
+          <a:bodyPr lIns="0" tIns="0" rIns="0" bIns="0" rtlCol="0" anchor="t">
+            <a:spAutoFit/>
+          </a:bodyPr>
+          <a:lstStyle/>
+          <a:p>
+            <a:pPr algn="ctr">
+              <a:lnSpc>
+                <a:spcPts val="3799"/>
+              </a:lnSpc>
+            </a:pPr>
+            <a:r>
+              <a:rPr lang="en-US" sz="2134" b="1" i="1" spc="529">
+                <a:solidFill>
+                  <a:srgbClr val="000000"/>
+                </a:solidFill>
+                <a:latin typeface="Montserrat Medium Italics"/>
+                <a:ea typeface="Montserrat Medium Italics"/>
+                <a:cs typeface="Montserrat Medium Italics"/>
+                <a:sym typeface="Montserrat Medium Italics"/>
+              </a:rPr>
+              <a:t>DE LA HOJA FÍSICA AL ARCHIVO DIGITAL INDEXADO EN SEGUNDOS.</a:t>
+            </a:r>
+          </a:p>
+        </p:txBody>
+      </p:sp>
+      <p:sp>
+        <p:nvSpPr>
+          <p:cNvPr id="7" name="AutoShape 7"/>
+          <p:cNvSpPr/>
+          <p:nvPr/>
+        </p:nvSpPr>
+        <p:spPr>
+          <a:xfrm flipV="1">
+            <a:off x="1624247" y="4007164"/>
+            <a:ext cx="1555561" cy="0"/>
+          </a:xfrm>
+          <a:prstGeom prst="line">
+            <a:avLst/>
+          </a:prstGeom>
+          <a:ln w="85725" cap="flat">
+            <a:solidFill>
+              <a:srgbClr val="000000"/>
+            </a:solidFill>
+            <a:prstDash val="solid"/>
+            <a:headEnd type="none" w="sm" len="sm"/>
+            <a:tailEnd type="none" w="sm" len="sm"/>
+          </a:ln>
+        </p:spPr>
+        <p:txBody>
+          <a:bodyPr/>
+          <a:lstStyle/>
+          <a:p>
+            <a:endParaRPr lang="es-AR"/>
+          </a:p>
+        </p:txBody>
+      </p:sp>
+      <p:sp>
+        <p:nvSpPr>
+          <p:cNvPr id="8" name="TextBox 8"/>
+          <p:cNvSpPr txBox="1"/>
+          <p:nvPr/>
+        </p:nvSpPr>
+        <p:spPr>
+          <a:xfrm>
+            <a:off x="4587716" y="8254014"/>
+            <a:ext cx="9744167" cy="1170659"/>
+          </a:xfrm>
+          <a:prstGeom prst="rect">
+            <a:avLst/>
+          </a:prstGeom>
+        </p:spPr>
+        <p:txBody>
+          <a:bodyPr lIns="0" tIns="0" rIns="0" bIns="0" rtlCol="0" anchor="t">
+            <a:spAutoFit/>
+          </a:bodyPr>
+          <a:lstStyle/>
+          <a:p>
+            <a:pPr algn="l">
+              <a:lnSpc>
+                <a:spcPts val="3030"/>
+              </a:lnSpc>
+              <a:spcBef>
+                <a:spcPct val="0"/>
+              </a:spcBef>
+            </a:pPr>
+            <a:r>
+              <a:rPr lang="en-US" sz="3030">
+                <a:solidFill>
+                  <a:srgbClr val="000000"/>
+                </a:solidFill>
+                <a:latin typeface="Montserrat"/>
+                <a:ea typeface="Montserrat"/>
+                <a:cs typeface="Montserrat"/>
+                <a:sym typeface="Montserrat"/>
+              </a:rPr>
+              <a:t>Reducir a cero el tiempo de búsqueda de documentos y automatizar el control de repartos de la empresa.</a:t>
+            </a:r>
+          </a:p>
+        </p:txBody>
+      </p:sp>
+      <p:sp>
+        <p:nvSpPr>
+          <p:cNvPr id="9" name="TextBox 9"/>
+          <p:cNvSpPr txBox="1"/>
+          <p:nvPr/>
+        </p:nvSpPr>
+        <p:spPr>
+          <a:xfrm>
+            <a:off x="1624247" y="8263539"/>
+            <a:ext cx="2612148" cy="471580"/>
+          </a:xfrm>
+          <a:prstGeom prst="rect">
+            <a:avLst/>
+          </a:prstGeom>
+        </p:spPr>
+        <p:txBody>
+          <a:bodyPr wrap="square" lIns="0" tIns="0" rIns="0" bIns="0" rtlCol="0" anchor="t">
+            <a:spAutoFit/>
+          </a:bodyPr>
+          <a:lstStyle/>
+          <a:p>
+            <a:pPr algn="ctr">
+              <a:lnSpc>
+                <a:spcPts val="3570"/>
+              </a:lnSpc>
+              <a:spcBef>
+                <a:spcPct val="0"/>
+              </a:spcBef>
+            </a:pPr>
+            <a:r>
+              <a:rPr lang="en-US" sz="3570" b="1" u="sng" dirty="0" err="1">
+                <a:solidFill>
+                  <a:srgbClr val="000000"/>
+                </a:solidFill>
+                <a:latin typeface="Montserrat Ultra-Bold"/>
+                <a:ea typeface="Montserrat Ultra-Bold"/>
+                <a:cs typeface="Montserrat Ultra-Bold"/>
+                <a:sym typeface="Montserrat Ultra-Bold"/>
+              </a:rPr>
+              <a:t>Objetivo</a:t>
+            </a:r>
+            <a:r>
+              <a:rPr lang="en-US" sz="3570" b="1" u="sng" dirty="0">
+                <a:solidFill>
+                  <a:srgbClr val="000000"/>
+                </a:solidFill>
+                <a:latin typeface="Montserrat Ultra-Bold"/>
+                <a:ea typeface="Montserrat Ultra-Bold"/>
+                <a:cs typeface="Montserrat Ultra-Bold"/>
+                <a:sym typeface="Montserrat Ultra-Bold"/>
+              </a:rPr>
+              <a:t>:</a:t>
+            </a:r>
+          </a:p>
+        </p:txBody>
+      </p:sp>
+      <p:pic>
+        <p:nvPicPr>
+          <p:cNvPr id="14" name="Imagen 13">
+            <a:extLst>
+              <a:ext uri="{FF2B5EF4-FFF2-40B4-BE49-F238E27FC236}">
+                <a16:creationId xmlns:a16="http://schemas.microsoft.com/office/drawing/2014/main" id="{F33CB3AF-F3B6-1859-0FCE-3D81FAD3B14F}"/>
+              </a:ext>
+            </a:extLst>
+          </p:cNvPr>
+          <p:cNvPicPr>
+            <a:picLocks noChangeAspect="1"/>
+          </p:cNvPicPr>
+          <p:nvPr/>
+        </p:nvPicPr>
+        <p:blipFill>
+          <a:blip r:embed="rId3" cstate="print">
+            <a:extLst>
+              <a:ext uri="{28A0092B-C50C-407E-A947-70E740481C1C}">
+                <a14:useLocalDpi xmlns:a14="http://schemas.microsoft.com/office/drawing/2010/main" val="0"/>
+              </a:ext>
+            </a:extLst>
+          </a:blip>
+          <a:stretch>
+            <a:fillRect/>
+          </a:stretch>
+        </p:blipFill>
+        <p:spPr>
+          <a:xfrm>
+            <a:off x="1066800" y="423874"/>
+            <a:ext cx="2885283" cy="1923522"/>
+          </a:xfrm>
+          <a:prstGeom prst="rect">
+            <a:avLst/>
+          </a:prstGeom>
+        </p:spPr>
+      </p:pic>
     </p:spTree>
   </p:cSld>
   <p:clrMapOvr>
@@ -3481,13 +3453,14 @@
 </file>
 
 <file path=ppt/slides/slide2.xml><?xml version="1.0" encoding="utf-8"?>
-<p:sld xmlns:p="http://schemas.openxmlformats.org/presentationml/2006/main" xmlns:a="http://schemas.openxmlformats.org/drawingml/2006/main">
+<p:sld xmlns:a="http://schemas.openxmlformats.org/drawingml/2006/main" xmlns:r="http://schemas.openxmlformats.org/officeDocument/2006/relationships" xmlns:p="http://schemas.openxmlformats.org/presentationml/2006/main">
   <p:cSld>
     <p:bg>
       <p:bgPr>
         <a:solidFill>
           <a:srgbClr val="FAFAFA"/>
         </a:solidFill>
+        <a:effectLst/>
       </p:bgPr>
     </p:bg>
     <p:spTree>
@@ -3506,12 +3479,12 @@
       </p:grpSpPr>
       <p:sp>
         <p:nvSpPr>
-          <p:cNvPr name="TextBox 2" id="2"/>
-          <p:cNvSpPr txBox="true"/>
+          <p:cNvPr id="2" name="TextBox 2"/>
+          <p:cNvSpPr txBox="1"/>
           <p:nvPr/>
         </p:nvSpPr>
         <p:spPr>
-          <a:xfrm rot="0">
+          <a:xfrm>
             <a:off x="2736751" y="376370"/>
             <a:ext cx="12485669" cy="652330"/>
           </a:xfrm>
@@ -3520,7 +3493,7 @@
           </a:prstGeom>
         </p:spPr>
         <p:txBody>
-          <a:bodyPr anchor="t" rtlCol="false" tIns="0" lIns="0" bIns="0" rIns="0">
+          <a:bodyPr lIns="0" tIns="0" rIns="0" bIns="0" rtlCol="0" anchor="t">
             <a:spAutoFit/>
           </a:bodyPr>
           <a:lstStyle/>
@@ -3534,7 +3507,7 @@
               </a:spcBef>
             </a:pPr>
             <a:r>
-              <a:rPr lang="en-US" b="true" sz="4914" u="sng">
+              <a:rPr lang="en-US" sz="4914" b="1" u="sng">
                 <a:solidFill>
                   <a:srgbClr val="DECFAF"/>
                 </a:solidFill>
@@ -3550,12 +3523,12 @@
       </p:sp>
       <p:sp>
         <p:nvSpPr>
-          <p:cNvPr name="TextBox 3" id="3"/>
-          <p:cNvSpPr txBox="true"/>
+          <p:cNvPr id="3" name="TextBox 3"/>
+          <p:cNvSpPr txBox="1"/>
           <p:nvPr/>
         </p:nvSpPr>
         <p:spPr>
-          <a:xfrm rot="0">
+          <a:xfrm>
             <a:off x="810823" y="1737039"/>
             <a:ext cx="4443561" cy="389980"/>
           </a:xfrm>
@@ -3564,7 +3537,7 @@
           </a:prstGeom>
         </p:spPr>
         <p:txBody>
-          <a:bodyPr anchor="t" rtlCol="false" tIns="0" lIns="0" bIns="0" rIns="0">
+          <a:bodyPr lIns="0" tIns="0" rIns="0" bIns="0" rtlCol="0" anchor="t">
             <a:spAutoFit/>
           </a:bodyPr>
           <a:lstStyle/>
@@ -3578,7 +3551,7 @@
               </a:spcBef>
             </a:pPr>
             <a:r>
-              <a:rPr lang="en-US" b="true" sz="2978">
+              <a:rPr lang="en-US" sz="2978" b="1">
                 <a:solidFill>
                   <a:srgbClr val="000000"/>
                 </a:solidFill>
@@ -3594,12 +3567,12 @@
       </p:sp>
       <p:sp>
         <p:nvSpPr>
-          <p:cNvPr name="TextBox 4" id="4"/>
-          <p:cNvSpPr txBox="true"/>
+          <p:cNvPr id="4" name="TextBox 4"/>
+          <p:cNvSpPr txBox="1"/>
           <p:nvPr/>
         </p:nvSpPr>
         <p:spPr>
-          <a:xfrm rot="0">
+          <a:xfrm>
             <a:off x="5917571" y="1737039"/>
             <a:ext cx="11868476" cy="1132930"/>
           </a:xfrm>
@@ -3608,7 +3581,7 @@
           </a:prstGeom>
         </p:spPr>
         <p:txBody>
-          <a:bodyPr anchor="t" rtlCol="false" tIns="0" lIns="0" bIns="0" rIns="0">
+          <a:bodyPr lIns="0" tIns="0" rIns="0" bIns="0" rtlCol="0" anchor="t">
             <a:spAutoFit/>
           </a:bodyPr>
           <a:lstStyle/>
@@ -3622,7 +3595,7 @@
               </a:spcBef>
             </a:pPr>
             <a:r>
-              <a:rPr lang="en-US" sz="2978">
+              <a:rPr lang="en-US" sz="2978" dirty="0">
                 <a:solidFill>
                   <a:srgbClr val="000000"/>
                 </a:solidFill>
@@ -3631,33 +3604,321 @@
                 <a:cs typeface="Montserrat"/>
                 <a:sym typeface="Montserrat"/>
               </a:rPr>
-              <a:t>Encontrar una hoja de reparto de hace meses implica revisar cajas o archivos digitales mal organizados, perdiendo minutos u horas valiosas.</a:t>
+              <a:t>Encontrar </a:t>
+            </a:r>
+            <a:r>
+              <a:rPr lang="en-US" sz="2978" dirty="0" err="1">
+                <a:solidFill>
+                  <a:srgbClr val="000000"/>
+                </a:solidFill>
+                <a:latin typeface="Montserrat"/>
+                <a:ea typeface="Montserrat"/>
+                <a:cs typeface="Montserrat"/>
+                <a:sym typeface="Montserrat"/>
+              </a:rPr>
+              <a:t>una</a:t>
+            </a:r>
+            <a:r>
+              <a:rPr lang="en-US" sz="2978" dirty="0">
+                <a:solidFill>
+                  <a:srgbClr val="000000"/>
+                </a:solidFill>
+                <a:latin typeface="Montserrat"/>
+                <a:ea typeface="Montserrat"/>
+                <a:cs typeface="Montserrat"/>
+                <a:sym typeface="Montserrat"/>
+              </a:rPr>
+              <a:t> hoja de </a:t>
+            </a:r>
+            <a:r>
+              <a:rPr lang="en-US" sz="2978" dirty="0" err="1">
+                <a:solidFill>
+                  <a:srgbClr val="000000"/>
+                </a:solidFill>
+                <a:latin typeface="Montserrat"/>
+                <a:ea typeface="Montserrat"/>
+                <a:cs typeface="Montserrat"/>
+                <a:sym typeface="Montserrat"/>
+              </a:rPr>
+              <a:t>reparto</a:t>
+            </a:r>
+            <a:r>
+              <a:rPr lang="en-US" sz="2978" dirty="0">
+                <a:solidFill>
+                  <a:srgbClr val="000000"/>
+                </a:solidFill>
+                <a:latin typeface="Montserrat"/>
+                <a:ea typeface="Montserrat"/>
+                <a:cs typeface="Montserrat"/>
+                <a:sym typeface="Montserrat"/>
+              </a:rPr>
+              <a:t> de </a:t>
+            </a:r>
+            <a:r>
+              <a:rPr lang="en-US" sz="2978" dirty="0" err="1">
+                <a:solidFill>
+                  <a:srgbClr val="000000"/>
+                </a:solidFill>
+                <a:latin typeface="Montserrat"/>
+                <a:ea typeface="Montserrat"/>
+                <a:cs typeface="Montserrat"/>
+                <a:sym typeface="Montserrat"/>
+              </a:rPr>
+              <a:t>hace</a:t>
+            </a:r>
+            <a:r>
+              <a:rPr lang="en-US" sz="2978" dirty="0">
+                <a:solidFill>
+                  <a:srgbClr val="000000"/>
+                </a:solidFill>
+                <a:latin typeface="Montserrat"/>
+                <a:ea typeface="Montserrat"/>
+                <a:cs typeface="Montserrat"/>
+                <a:sym typeface="Montserrat"/>
+              </a:rPr>
+              <a:t> meses </a:t>
+            </a:r>
+            <a:r>
+              <a:rPr lang="en-US" sz="2978" dirty="0" err="1">
+                <a:solidFill>
+                  <a:srgbClr val="000000"/>
+                </a:solidFill>
+                <a:latin typeface="Montserrat"/>
+                <a:ea typeface="Montserrat"/>
+                <a:cs typeface="Montserrat"/>
+                <a:sym typeface="Montserrat"/>
+              </a:rPr>
+              <a:t>implica</a:t>
+            </a:r>
+            <a:r>
+              <a:rPr lang="en-US" sz="2978" dirty="0">
+                <a:solidFill>
+                  <a:srgbClr val="000000"/>
+                </a:solidFill>
+                <a:latin typeface="Montserrat"/>
+                <a:ea typeface="Montserrat"/>
+                <a:cs typeface="Montserrat"/>
+                <a:sym typeface="Montserrat"/>
+              </a:rPr>
+              <a:t> </a:t>
+            </a:r>
+            <a:r>
+              <a:rPr lang="en-US" sz="2978" dirty="0" err="1">
+                <a:solidFill>
+                  <a:srgbClr val="000000"/>
+                </a:solidFill>
+                <a:latin typeface="Montserrat"/>
+                <a:ea typeface="Montserrat"/>
+                <a:cs typeface="Montserrat"/>
+                <a:sym typeface="Montserrat"/>
+              </a:rPr>
+              <a:t>revisar</a:t>
+            </a:r>
+            <a:r>
+              <a:rPr lang="en-US" sz="2978" dirty="0">
+                <a:solidFill>
+                  <a:srgbClr val="000000"/>
+                </a:solidFill>
+                <a:latin typeface="Montserrat"/>
+                <a:ea typeface="Montserrat"/>
+                <a:cs typeface="Montserrat"/>
+                <a:sym typeface="Montserrat"/>
+              </a:rPr>
+              <a:t> </a:t>
+            </a:r>
+            <a:r>
+              <a:rPr lang="en-US" sz="2978" dirty="0" err="1">
+                <a:solidFill>
+                  <a:srgbClr val="000000"/>
+                </a:solidFill>
+                <a:latin typeface="Montserrat"/>
+                <a:ea typeface="Montserrat"/>
+                <a:cs typeface="Montserrat"/>
+                <a:sym typeface="Montserrat"/>
+              </a:rPr>
+              <a:t>cajas</a:t>
+            </a:r>
+            <a:r>
+              <a:rPr lang="en-US" sz="2978" dirty="0">
+                <a:solidFill>
+                  <a:srgbClr val="000000"/>
+                </a:solidFill>
+                <a:latin typeface="Montserrat"/>
+                <a:ea typeface="Montserrat"/>
+                <a:cs typeface="Montserrat"/>
+                <a:sym typeface="Montserrat"/>
+              </a:rPr>
+              <a:t> o </a:t>
+            </a:r>
+            <a:r>
+              <a:rPr lang="en-US" sz="2978" dirty="0" err="1">
+                <a:solidFill>
+                  <a:srgbClr val="000000"/>
+                </a:solidFill>
+                <a:latin typeface="Montserrat"/>
+                <a:ea typeface="Montserrat"/>
+                <a:cs typeface="Montserrat"/>
+                <a:sym typeface="Montserrat"/>
+              </a:rPr>
+              <a:t>archivos</a:t>
+            </a:r>
+            <a:r>
+              <a:rPr lang="en-US" sz="2978" dirty="0">
+                <a:solidFill>
+                  <a:srgbClr val="000000"/>
+                </a:solidFill>
+                <a:latin typeface="Montserrat"/>
+                <a:ea typeface="Montserrat"/>
+                <a:cs typeface="Montserrat"/>
+                <a:sym typeface="Montserrat"/>
+              </a:rPr>
+              <a:t> </a:t>
+            </a:r>
+            <a:r>
+              <a:rPr lang="en-US" sz="2978" dirty="0" err="1">
+                <a:solidFill>
+                  <a:srgbClr val="000000"/>
+                </a:solidFill>
+                <a:latin typeface="Montserrat"/>
+                <a:ea typeface="Montserrat"/>
+                <a:cs typeface="Montserrat"/>
+                <a:sym typeface="Montserrat"/>
+              </a:rPr>
+              <a:t>digitales</a:t>
+            </a:r>
+            <a:r>
+              <a:rPr lang="en-US" sz="2978" dirty="0">
+                <a:solidFill>
+                  <a:srgbClr val="000000"/>
+                </a:solidFill>
+                <a:latin typeface="Montserrat"/>
+                <a:ea typeface="Montserrat"/>
+                <a:cs typeface="Montserrat"/>
+                <a:sym typeface="Montserrat"/>
+              </a:rPr>
+              <a:t> mal </a:t>
+            </a:r>
+            <a:r>
+              <a:rPr lang="en-US" sz="2978" dirty="0" err="1">
+                <a:solidFill>
+                  <a:srgbClr val="000000"/>
+                </a:solidFill>
+                <a:latin typeface="Montserrat"/>
+                <a:ea typeface="Montserrat"/>
+                <a:cs typeface="Montserrat"/>
+                <a:sym typeface="Montserrat"/>
+              </a:rPr>
+              <a:t>organizados</a:t>
+            </a:r>
+            <a:r>
+              <a:rPr lang="en-US" sz="2978" dirty="0">
+                <a:solidFill>
+                  <a:srgbClr val="000000"/>
+                </a:solidFill>
+                <a:latin typeface="Montserrat"/>
+                <a:ea typeface="Montserrat"/>
+                <a:cs typeface="Montserrat"/>
+                <a:sym typeface="Montserrat"/>
+              </a:rPr>
+              <a:t>, </a:t>
+            </a:r>
+            <a:r>
+              <a:rPr lang="en-US" sz="2978" dirty="0" err="1">
+                <a:solidFill>
+                  <a:srgbClr val="000000"/>
+                </a:solidFill>
+                <a:latin typeface="Montserrat"/>
+                <a:ea typeface="Montserrat"/>
+                <a:cs typeface="Montserrat"/>
+                <a:sym typeface="Montserrat"/>
+              </a:rPr>
+              <a:t>perdiendo</a:t>
+            </a:r>
+            <a:r>
+              <a:rPr lang="en-US" sz="2978" dirty="0">
+                <a:solidFill>
+                  <a:srgbClr val="000000"/>
+                </a:solidFill>
+                <a:latin typeface="Montserrat"/>
+                <a:ea typeface="Montserrat"/>
+                <a:cs typeface="Montserrat"/>
+                <a:sym typeface="Montserrat"/>
+              </a:rPr>
+              <a:t> </a:t>
+            </a:r>
+            <a:r>
+              <a:rPr lang="en-US" sz="2978" dirty="0" err="1">
+                <a:solidFill>
+                  <a:srgbClr val="000000"/>
+                </a:solidFill>
+                <a:latin typeface="Montserrat"/>
+                <a:ea typeface="Montserrat"/>
+                <a:cs typeface="Montserrat"/>
+                <a:sym typeface="Montserrat"/>
+              </a:rPr>
+              <a:t>minutos</a:t>
+            </a:r>
+            <a:r>
+              <a:rPr lang="en-US" sz="2978" dirty="0">
+                <a:solidFill>
+                  <a:srgbClr val="000000"/>
+                </a:solidFill>
+                <a:latin typeface="Montserrat"/>
+                <a:ea typeface="Montserrat"/>
+                <a:cs typeface="Montserrat"/>
+                <a:sym typeface="Montserrat"/>
+              </a:rPr>
+              <a:t> u horas </a:t>
+            </a:r>
+            <a:r>
+              <a:rPr lang="en-US" sz="2978" dirty="0" err="1">
+                <a:solidFill>
+                  <a:srgbClr val="000000"/>
+                </a:solidFill>
+                <a:latin typeface="Montserrat"/>
+                <a:ea typeface="Montserrat"/>
+                <a:cs typeface="Montserrat"/>
+                <a:sym typeface="Montserrat"/>
+              </a:rPr>
+              <a:t>valiosas</a:t>
+            </a:r>
+            <a:r>
+              <a:rPr lang="en-US" sz="2978" dirty="0">
+                <a:solidFill>
+                  <a:srgbClr val="000000"/>
+                </a:solidFill>
+                <a:latin typeface="Montserrat"/>
+                <a:ea typeface="Montserrat"/>
+                <a:cs typeface="Montserrat"/>
+                <a:sym typeface="Montserrat"/>
+              </a:rPr>
+              <a:t>.</a:t>
             </a:r>
           </a:p>
         </p:txBody>
       </p:sp>
       <p:grpSp>
         <p:nvGrpSpPr>
-          <p:cNvPr name="Group 5" id="5"/>
+          <p:cNvPr id="5" name="Group 5"/>
           <p:cNvGrpSpPr/>
           <p:nvPr/>
         </p:nvGrpSpPr>
         <p:grpSpPr>
-          <a:xfrm rot="0">
-            <a:off x="810823" y="4441826"/>
-            <a:ext cx="16975224" cy="844954"/>
-            <a:chOff x="0" y="0"/>
-            <a:chExt cx="22633632" cy="1126605"/>
+          <a:xfrm>
+            <a:off x="810823" y="4484689"/>
+            <a:ext cx="16975224" cy="1180512"/>
+            <a:chOff x="0" y="57150"/>
+            <a:chExt cx="22633632" cy="1574015"/>
           </a:xfrm>
         </p:grpSpPr>
         <p:sp>
           <p:nvSpPr>
-            <p:cNvPr name="TextBox 6" id="6"/>
-            <p:cNvSpPr txBox="true"/>
+            <p:cNvPr id="6" name="TextBox 6"/>
+            <p:cNvSpPr txBox="1"/>
             <p:nvPr/>
           </p:nvSpPr>
           <p:spPr>
-            <a:xfrm rot="0">
+            <a:xfrm>
               <a:off x="0" y="57150"/>
               <a:ext cx="6505773" cy="539023"/>
             </a:xfrm>
@@ -3666,7 +3927,7 @@
             </a:prstGeom>
           </p:spPr>
           <p:txBody>
-            <a:bodyPr anchor="t" rtlCol="false" tIns="0" lIns="0" bIns="0" rIns="0">
+            <a:bodyPr lIns="0" tIns="0" rIns="0" bIns="0" rtlCol="0" anchor="t">
               <a:spAutoFit/>
             </a:bodyPr>
             <a:lstStyle/>
@@ -3680,7 +3941,7 @@
                 </a:spcBef>
               </a:pPr>
               <a:r>
-                <a:rPr lang="en-US" b="true" sz="2978">
+                <a:rPr lang="en-US" sz="2978" b="1">
                   <a:solidFill>
                     <a:srgbClr val="000000"/>
                   </a:solidFill>
@@ -3689,40 +3950,28 @@
                   <a:cs typeface="Montserrat Ultra-Bold"/>
                   <a:sym typeface="Montserrat Ultra-Bold"/>
                 </a:rPr>
-                <a:t>Error</a:t>
-              </a:r>
-              <a:r>
-                <a:rPr lang="en-US" b="true" sz="2978">
-                  <a:solidFill>
-                    <a:srgbClr val="000000"/>
-                  </a:solidFill>
-                  <a:latin typeface="Montserrat Ultra-Bold"/>
-                  <a:ea typeface="Montserrat Ultra-Bold"/>
-                  <a:cs typeface="Montserrat Ultra-Bold"/>
-                  <a:sym typeface="Montserrat Ultra-Bold"/>
-                </a:rPr>
-                <a:t>es de Clasificación:</a:t>
+                <a:t>Errores de Clasificación:</a:t>
               </a:r>
             </a:p>
           </p:txBody>
         </p:sp>
         <p:sp>
           <p:nvSpPr>
-            <p:cNvPr name="TextBox 7" id="7"/>
-            <p:cNvSpPr txBox="true"/>
+            <p:cNvPr id="7" name="TextBox 7"/>
+            <p:cNvSpPr txBox="1"/>
             <p:nvPr/>
           </p:nvSpPr>
           <p:spPr>
-            <a:xfrm rot="0">
-              <a:off x="6808997" y="92282"/>
-              <a:ext cx="15824634" cy="1034323"/>
+            <a:xfrm>
+              <a:off x="6808997" y="92283"/>
+              <a:ext cx="15824635" cy="1538882"/>
             </a:xfrm>
             <a:prstGeom prst="rect">
               <a:avLst/>
             </a:prstGeom>
           </p:spPr>
           <p:txBody>
-            <a:bodyPr anchor="t" rtlCol="false" tIns="0" lIns="0" bIns="0" rIns="0">
+            <a:bodyPr lIns="0" tIns="0" rIns="0" bIns="0" rtlCol="0" anchor="t">
               <a:spAutoFit/>
             </a:bodyPr>
             <a:lstStyle/>
@@ -3736,7 +3985,7 @@
                 </a:spcBef>
               </a:pPr>
               <a:r>
-                <a:rPr lang="en-US" sz="2978">
+                <a:rPr lang="en-US" sz="2978" dirty="0" err="1">
                   <a:solidFill>
                     <a:srgbClr val="000000"/>
                   </a:solidFill>
@@ -3745,10 +3994,10 @@
                   <a:cs typeface="Montserrat"/>
                   <a:sym typeface="Montserrat"/>
                 </a:rPr>
-                <a:t>C</a:t>
+                <a:t>Carpetas</a:t>
               </a:r>
               <a:r>
-                <a:rPr lang="en-US" sz="2978">
+                <a:rPr lang="en-US" sz="2978" dirty="0">
                   <a:solidFill>
                     <a:srgbClr val="000000"/>
                   </a:solidFill>
@@ -3757,7 +4006,319 @@
                   <a:cs typeface="Montserrat"/>
                   <a:sym typeface="Montserrat"/>
                 </a:rPr>
-                <a:t>arpetas guardadas con nombres incorrectos, fechas cruzadas o archivos perdidos por error humano.</a:t>
+                <a:t> </a:t>
+              </a:r>
+              <a:r>
+                <a:rPr lang="en-US" sz="2978" dirty="0" err="1">
+                  <a:solidFill>
+                    <a:srgbClr val="000000"/>
+                  </a:solidFill>
+                  <a:latin typeface="Montserrat"/>
+                  <a:ea typeface="Montserrat"/>
+                  <a:cs typeface="Montserrat"/>
+                  <a:sym typeface="Montserrat"/>
+                </a:rPr>
+                <a:t>guardadas</a:t>
+              </a:r>
+              <a:r>
+                <a:rPr lang="en-US" sz="2978" dirty="0">
+                  <a:solidFill>
+                    <a:srgbClr val="000000"/>
+                  </a:solidFill>
+                  <a:latin typeface="Montserrat"/>
+                  <a:ea typeface="Montserrat"/>
+                  <a:cs typeface="Montserrat"/>
+                  <a:sym typeface="Montserrat"/>
+                </a:rPr>
+                <a:t> con </a:t>
+              </a:r>
+              <a:r>
+                <a:rPr lang="en-US" sz="2978" dirty="0" err="1">
+                  <a:solidFill>
+                    <a:srgbClr val="000000"/>
+                  </a:solidFill>
+                  <a:latin typeface="Montserrat"/>
+                  <a:ea typeface="Montserrat"/>
+                  <a:cs typeface="Montserrat"/>
+                  <a:sym typeface="Montserrat"/>
+                </a:rPr>
+                <a:t>nombres</a:t>
+              </a:r>
+              <a:r>
+                <a:rPr lang="en-US" sz="2978" dirty="0">
+                  <a:solidFill>
+                    <a:srgbClr val="000000"/>
+                  </a:solidFill>
+                  <a:latin typeface="Montserrat"/>
+                  <a:ea typeface="Montserrat"/>
+                  <a:cs typeface="Montserrat"/>
+                  <a:sym typeface="Montserrat"/>
+                </a:rPr>
+                <a:t> </a:t>
+              </a:r>
+              <a:r>
+                <a:rPr lang="en-US" sz="2978" dirty="0" err="1">
+                  <a:solidFill>
+                    <a:srgbClr val="000000"/>
+                  </a:solidFill>
+                  <a:latin typeface="Montserrat"/>
+                  <a:ea typeface="Montserrat"/>
+                  <a:cs typeface="Montserrat"/>
+                  <a:sym typeface="Montserrat"/>
+                </a:rPr>
+                <a:t>incorrectos</a:t>
+              </a:r>
+              <a:r>
+                <a:rPr lang="en-US" sz="2978" dirty="0">
+                  <a:solidFill>
+                    <a:srgbClr val="000000"/>
+                  </a:solidFill>
+                  <a:latin typeface="Montserrat"/>
+                  <a:ea typeface="Montserrat"/>
+                  <a:cs typeface="Montserrat"/>
+                  <a:sym typeface="Montserrat"/>
+                </a:rPr>
+                <a:t>, </a:t>
+              </a:r>
+              <a:r>
+                <a:rPr lang="en-US" sz="2978" dirty="0" err="1">
+                  <a:solidFill>
+                    <a:srgbClr val="000000"/>
+                  </a:solidFill>
+                  <a:latin typeface="Montserrat"/>
+                  <a:ea typeface="Montserrat"/>
+                  <a:cs typeface="Montserrat"/>
+                  <a:sym typeface="Montserrat"/>
+                </a:rPr>
+                <a:t>fechas</a:t>
+              </a:r>
+              <a:r>
+                <a:rPr lang="en-US" sz="2978" dirty="0">
+                  <a:solidFill>
+                    <a:srgbClr val="000000"/>
+                  </a:solidFill>
+                  <a:latin typeface="Montserrat"/>
+                  <a:ea typeface="Montserrat"/>
+                  <a:cs typeface="Montserrat"/>
+                  <a:sym typeface="Montserrat"/>
+                </a:rPr>
+                <a:t> </a:t>
+              </a:r>
+              <a:r>
+                <a:rPr lang="en-US" sz="2978" dirty="0" err="1">
+                  <a:solidFill>
+                    <a:srgbClr val="000000"/>
+                  </a:solidFill>
+                  <a:latin typeface="Montserrat"/>
+                  <a:ea typeface="Montserrat"/>
+                  <a:cs typeface="Montserrat"/>
+                  <a:sym typeface="Montserrat"/>
+                </a:rPr>
+                <a:t>cruzadas</a:t>
+              </a:r>
+              <a:r>
+                <a:rPr lang="en-US" sz="2978" dirty="0">
+                  <a:solidFill>
+                    <a:srgbClr val="000000"/>
+                  </a:solidFill>
+                  <a:latin typeface="Montserrat"/>
+                  <a:ea typeface="Montserrat"/>
+                  <a:cs typeface="Montserrat"/>
+                  <a:sym typeface="Montserrat"/>
+                </a:rPr>
+                <a:t> o </a:t>
+              </a:r>
+              <a:r>
+                <a:rPr lang="en-US" sz="2978" dirty="0" err="1">
+                  <a:solidFill>
+                    <a:srgbClr val="000000"/>
+                  </a:solidFill>
+                  <a:latin typeface="Montserrat"/>
+                  <a:ea typeface="Montserrat"/>
+                  <a:cs typeface="Montserrat"/>
+                  <a:sym typeface="Montserrat"/>
+                </a:rPr>
+                <a:t>archivos</a:t>
+              </a:r>
+              <a:r>
+                <a:rPr lang="en-US" sz="2978" dirty="0">
+                  <a:solidFill>
+                    <a:srgbClr val="000000"/>
+                  </a:solidFill>
+                  <a:latin typeface="Montserrat"/>
+                  <a:ea typeface="Montserrat"/>
+                  <a:cs typeface="Montserrat"/>
+                  <a:sym typeface="Montserrat"/>
+                </a:rPr>
+                <a:t> </a:t>
+              </a:r>
+              <a:r>
+                <a:rPr lang="en-US" sz="2978" dirty="0" err="1">
+                  <a:solidFill>
+                    <a:srgbClr val="000000"/>
+                  </a:solidFill>
+                  <a:latin typeface="Montserrat"/>
+                  <a:ea typeface="Montserrat"/>
+                  <a:cs typeface="Montserrat"/>
+                  <a:sym typeface="Montserrat"/>
+                </a:rPr>
+                <a:t>perdidos</a:t>
+              </a:r>
+              <a:r>
+                <a:rPr lang="en-US" sz="2978" dirty="0">
+                  <a:solidFill>
+                    <a:srgbClr val="000000"/>
+                  </a:solidFill>
+                  <a:latin typeface="Montserrat"/>
+                  <a:ea typeface="Montserrat"/>
+                  <a:cs typeface="Montserrat"/>
+                  <a:sym typeface="Montserrat"/>
+                </a:rPr>
+                <a:t> </a:t>
+              </a:r>
+              <a:r>
+                <a:rPr lang="en-US" sz="2978" dirty="0" err="1">
+                  <a:solidFill>
+                    <a:srgbClr val="000000"/>
+                  </a:solidFill>
+                  <a:latin typeface="Montserrat"/>
+                  <a:ea typeface="Montserrat"/>
+                  <a:cs typeface="Montserrat"/>
+                  <a:sym typeface="Montserrat"/>
+                </a:rPr>
+                <a:t>por</a:t>
+              </a:r>
+              <a:r>
+                <a:rPr lang="en-US" sz="2978" dirty="0">
+                  <a:solidFill>
+                    <a:srgbClr val="000000"/>
+                  </a:solidFill>
+                  <a:latin typeface="Montserrat"/>
+                  <a:ea typeface="Montserrat"/>
+                  <a:cs typeface="Montserrat"/>
+                  <a:sym typeface="Montserrat"/>
+                </a:rPr>
+                <a:t> error </a:t>
+              </a:r>
+              <a:r>
+                <a:rPr lang="en-US" sz="2978" dirty="0" err="1">
+                  <a:solidFill>
+                    <a:srgbClr val="000000"/>
+                  </a:solidFill>
+                  <a:latin typeface="Montserrat"/>
+                  <a:ea typeface="Montserrat"/>
+                  <a:cs typeface="Montserrat"/>
+                  <a:sym typeface="Montserrat"/>
+                </a:rPr>
+                <a:t>humano</a:t>
+              </a:r>
+              <a:r>
+                <a:rPr lang="en-US" sz="2978" dirty="0">
+                  <a:solidFill>
+                    <a:srgbClr val="000000"/>
+                  </a:solidFill>
+                  <a:latin typeface="Montserrat"/>
+                  <a:ea typeface="Montserrat"/>
+                  <a:cs typeface="Montserrat"/>
+                  <a:sym typeface="Montserrat"/>
+                </a:rPr>
+                <a:t> ( </a:t>
+              </a:r>
+              <a:r>
+                <a:rPr lang="en-US" sz="2978" dirty="0" err="1">
+                  <a:solidFill>
+                    <a:srgbClr val="000000"/>
+                  </a:solidFill>
+                  <a:latin typeface="Montserrat"/>
+                  <a:ea typeface="Montserrat"/>
+                  <a:cs typeface="Montserrat"/>
+                  <a:sym typeface="Montserrat"/>
+                </a:rPr>
+                <a:t>fechas</a:t>
+              </a:r>
+              <a:r>
+                <a:rPr lang="en-US" sz="2978" dirty="0">
+                  <a:solidFill>
+                    <a:srgbClr val="000000"/>
+                  </a:solidFill>
+                  <a:latin typeface="Montserrat"/>
+                  <a:ea typeface="Montserrat"/>
+                  <a:cs typeface="Montserrat"/>
+                  <a:sym typeface="Montserrat"/>
+                </a:rPr>
+                <a:t> </a:t>
+              </a:r>
+              <a:r>
+                <a:rPr lang="en-US" sz="2978" dirty="0" err="1">
+                  <a:solidFill>
+                    <a:srgbClr val="000000"/>
+                  </a:solidFill>
+                  <a:latin typeface="Montserrat"/>
+                  <a:ea typeface="Montserrat"/>
+                  <a:cs typeface="Montserrat"/>
+                  <a:sym typeface="Montserrat"/>
+                </a:rPr>
+                <a:t>cruzadas</a:t>
+              </a:r>
+              <a:r>
+                <a:rPr lang="en-US" sz="2978" dirty="0">
+                  <a:solidFill>
+                    <a:srgbClr val="000000"/>
+                  </a:solidFill>
+                  <a:latin typeface="Montserrat"/>
+                  <a:ea typeface="Montserrat"/>
+                  <a:cs typeface="Montserrat"/>
+                  <a:sym typeface="Montserrat"/>
+                </a:rPr>
+                <a:t> y </a:t>
+              </a:r>
+              <a:r>
+                <a:rPr lang="en-US" sz="2978" dirty="0" err="1">
+                  <a:solidFill>
+                    <a:srgbClr val="000000"/>
+                  </a:solidFill>
+                  <a:latin typeface="Montserrat"/>
+                  <a:ea typeface="Montserrat"/>
+                  <a:cs typeface="Montserrat"/>
+                  <a:sym typeface="Montserrat"/>
+                </a:rPr>
+                <a:t>errores</a:t>
+              </a:r>
+              <a:r>
+                <a:rPr lang="en-US" sz="2978" dirty="0">
+                  <a:solidFill>
+                    <a:srgbClr val="000000"/>
+                  </a:solidFill>
+                  <a:latin typeface="Montserrat"/>
+                  <a:ea typeface="Montserrat"/>
+                  <a:cs typeface="Montserrat"/>
+                  <a:sym typeface="Montserrat"/>
+                </a:rPr>
+                <a:t> </a:t>
+              </a:r>
+              <a:r>
+                <a:rPr lang="en-US" sz="2978" dirty="0" err="1">
+                  <a:solidFill>
+                    <a:srgbClr val="000000"/>
+                  </a:solidFill>
+                  <a:latin typeface="Montserrat"/>
+                  <a:ea typeface="Montserrat"/>
+                  <a:cs typeface="Montserrat"/>
+                  <a:sym typeface="Montserrat"/>
+                </a:rPr>
+                <a:t>tipograficos</a:t>
+              </a:r>
+              <a:r>
+                <a:rPr lang="en-US" sz="2978" dirty="0">
+                  <a:solidFill>
+                    <a:srgbClr val="000000"/>
+                  </a:solidFill>
+                  <a:latin typeface="Montserrat"/>
+                  <a:ea typeface="Montserrat"/>
+                  <a:cs typeface="Montserrat"/>
+                  <a:sym typeface="Montserrat"/>
+                </a:rPr>
+                <a:t>).</a:t>
               </a:r>
             </a:p>
           </p:txBody>
@@ -3765,12 +4326,12 @@
       </p:grpSp>
       <p:grpSp>
         <p:nvGrpSpPr>
-          <p:cNvPr name="Group 8" id="8"/>
+          <p:cNvPr id="8" name="Group 8"/>
           <p:cNvGrpSpPr/>
           <p:nvPr/>
         </p:nvGrpSpPr>
         <p:grpSpPr>
-          <a:xfrm rot="0">
+          <a:xfrm>
             <a:off x="810823" y="6858405"/>
             <a:ext cx="16975224" cy="818605"/>
             <a:chOff x="0" y="0"/>
@@ -3779,12 +4340,12 @@
         </p:grpSpPr>
         <p:sp>
           <p:nvSpPr>
-            <p:cNvPr name="TextBox 9" id="9"/>
-            <p:cNvSpPr txBox="true"/>
+            <p:cNvPr id="9" name="TextBox 9"/>
+            <p:cNvSpPr txBox="1"/>
             <p:nvPr/>
           </p:nvSpPr>
           <p:spPr>
-            <a:xfrm rot="0">
+            <a:xfrm>
               <a:off x="0" y="57150"/>
               <a:ext cx="5771555" cy="539023"/>
             </a:xfrm>
@@ -3793,7 +4354,7 @@
             </a:prstGeom>
           </p:spPr>
           <p:txBody>
-            <a:bodyPr anchor="t" rtlCol="false" tIns="0" lIns="0" bIns="0" rIns="0">
+            <a:bodyPr lIns="0" tIns="0" rIns="0" bIns="0" rtlCol="0" anchor="t">
               <a:spAutoFit/>
             </a:bodyPr>
             <a:lstStyle/>
@@ -3807,7 +4368,7 @@
                 </a:spcBef>
               </a:pPr>
               <a:r>
-                <a:rPr lang="en-US" b="true" sz="2978">
+                <a:rPr lang="en-US" sz="2978" b="1">
                   <a:solidFill>
                     <a:srgbClr val="000000"/>
                   </a:solidFill>
@@ -3816,31 +4377,19 @@
                   <a:cs typeface="Montserrat Ultra-Bold"/>
                   <a:sym typeface="Montserrat Ultra-Bold"/>
                 </a:rPr>
-                <a:t>Falt</a:t>
-              </a:r>
-              <a:r>
-                <a:rPr lang="en-US" b="true" sz="2978">
-                  <a:solidFill>
-                    <a:srgbClr val="000000"/>
-                  </a:solidFill>
-                  <a:latin typeface="Montserrat Ultra-Bold"/>
-                  <a:ea typeface="Montserrat Ultra-Bold"/>
-                  <a:cs typeface="Montserrat Ultra-Bold"/>
-                  <a:sym typeface="Montserrat Ultra-Bold"/>
-                </a:rPr>
-                <a:t>a de Trazabilidad:</a:t>
+                <a:t>Falta de Trazabilidad:</a:t>
               </a:r>
             </a:p>
           </p:txBody>
         </p:sp>
         <p:sp>
           <p:nvSpPr>
-            <p:cNvPr name="TextBox 10" id="10"/>
-            <p:cNvSpPr txBox="true"/>
+            <p:cNvPr id="10" name="TextBox 10"/>
+            <p:cNvSpPr txBox="1"/>
             <p:nvPr/>
           </p:nvSpPr>
           <p:spPr>
-            <a:xfrm rot="0">
+            <a:xfrm>
               <a:off x="6808997" y="57150"/>
               <a:ext cx="15824634" cy="1034323"/>
             </a:xfrm>
@@ -3849,7 +4398,7 @@
             </a:prstGeom>
           </p:spPr>
           <p:txBody>
-            <a:bodyPr anchor="t" rtlCol="false" tIns="0" lIns="0" bIns="0" rIns="0">
+            <a:bodyPr lIns="0" tIns="0" rIns="0" bIns="0" rtlCol="0" anchor="t">
               <a:spAutoFit/>
             </a:bodyPr>
             <a:lstStyle/>
@@ -3863,7 +4412,7 @@
                 </a:spcBef>
               </a:pPr>
               <a:r>
-                <a:rPr lang="en-US" sz="2978">
+                <a:rPr lang="en-US" sz="2978" dirty="0" err="1">
                   <a:solidFill>
                     <a:srgbClr val="000000"/>
                   </a:solidFill>
@@ -3872,10 +4421,10 @@
                   <a:cs typeface="Montserrat"/>
                   <a:sym typeface="Montserrat"/>
                 </a:rPr>
-                <a:t> Imp</a:t>
+                <a:t>Imposibilidad</a:t>
               </a:r>
               <a:r>
-                <a:rPr lang="en-US" sz="2978">
+                <a:rPr lang="en-US" sz="2978" dirty="0">
                   <a:solidFill>
                     <a:srgbClr val="000000"/>
                   </a:solidFill>
@@ -3884,7 +4433,223 @@
                   <a:cs typeface="Montserrat"/>
                   <a:sym typeface="Montserrat"/>
                 </a:rPr>
-                <a:t>osibilidad de saber rápidamente qué repartos fueron archivados con éxito y cuáles tienen inconsistencias.</a:t>
+                <a:t> de saber </a:t>
+              </a:r>
+              <a:r>
+                <a:rPr lang="en-US" sz="2978" dirty="0" err="1">
+                  <a:solidFill>
+                    <a:srgbClr val="000000"/>
+                  </a:solidFill>
+                  <a:latin typeface="Montserrat"/>
+                  <a:ea typeface="Montserrat"/>
+                  <a:cs typeface="Montserrat"/>
+                  <a:sym typeface="Montserrat"/>
+                </a:rPr>
+                <a:t>rápidamente</a:t>
+              </a:r>
+              <a:r>
+                <a:rPr lang="en-US" sz="2978" dirty="0">
+                  <a:solidFill>
+                    <a:srgbClr val="000000"/>
+                  </a:solidFill>
+                  <a:latin typeface="Montserrat"/>
+                  <a:ea typeface="Montserrat"/>
+                  <a:cs typeface="Montserrat"/>
+                  <a:sym typeface="Montserrat"/>
+                </a:rPr>
+                <a:t> </a:t>
+              </a:r>
+              <a:r>
+                <a:rPr lang="en-US" sz="2978" dirty="0" err="1">
+                  <a:solidFill>
+                    <a:srgbClr val="000000"/>
+                  </a:solidFill>
+                  <a:latin typeface="Montserrat"/>
+                  <a:ea typeface="Montserrat"/>
+                  <a:cs typeface="Montserrat"/>
+                  <a:sym typeface="Montserrat"/>
+                </a:rPr>
+                <a:t>qué</a:t>
+              </a:r>
+              <a:r>
+                <a:rPr lang="en-US" sz="2978" dirty="0">
+                  <a:solidFill>
+                    <a:srgbClr val="000000"/>
+                  </a:solidFill>
+                  <a:latin typeface="Montserrat"/>
+                  <a:ea typeface="Montserrat"/>
+                  <a:cs typeface="Montserrat"/>
+                  <a:sym typeface="Montserrat"/>
+                </a:rPr>
+                <a:t> </a:t>
+              </a:r>
+              <a:r>
+                <a:rPr lang="en-US" sz="2978" dirty="0" err="1">
+                  <a:solidFill>
+                    <a:srgbClr val="000000"/>
+                  </a:solidFill>
+                  <a:latin typeface="Montserrat"/>
+                  <a:ea typeface="Montserrat"/>
+                  <a:cs typeface="Montserrat"/>
+                  <a:sym typeface="Montserrat"/>
+                </a:rPr>
+                <a:t>repartos</a:t>
+              </a:r>
+              <a:r>
+                <a:rPr lang="en-US" sz="2978" dirty="0">
+                  <a:solidFill>
+                    <a:srgbClr val="000000"/>
+                  </a:solidFill>
+                  <a:latin typeface="Montserrat"/>
+                  <a:ea typeface="Montserrat"/>
+                  <a:cs typeface="Montserrat"/>
+                  <a:sym typeface="Montserrat"/>
+                </a:rPr>
+                <a:t> </a:t>
+              </a:r>
+              <a:r>
+                <a:rPr lang="en-US" sz="2978" dirty="0" err="1">
+                  <a:solidFill>
+                    <a:srgbClr val="000000"/>
+                  </a:solidFill>
+                  <a:latin typeface="Montserrat"/>
+                  <a:ea typeface="Montserrat"/>
+                  <a:cs typeface="Montserrat"/>
+                  <a:sym typeface="Montserrat"/>
+                </a:rPr>
+                <a:t>fueron</a:t>
+              </a:r>
+              <a:r>
+                <a:rPr lang="en-US" sz="2978" dirty="0">
+                  <a:solidFill>
+                    <a:srgbClr val="000000"/>
+                  </a:solidFill>
+                  <a:latin typeface="Montserrat"/>
+                  <a:ea typeface="Montserrat"/>
+                  <a:cs typeface="Montserrat"/>
+                  <a:sym typeface="Montserrat"/>
+                </a:rPr>
+                <a:t> </a:t>
+              </a:r>
+              <a:r>
+                <a:rPr lang="en-US" sz="2978" dirty="0" err="1">
+                  <a:solidFill>
+                    <a:srgbClr val="000000"/>
+                  </a:solidFill>
+                  <a:latin typeface="Montserrat"/>
+                  <a:ea typeface="Montserrat"/>
+                  <a:cs typeface="Montserrat"/>
+                  <a:sym typeface="Montserrat"/>
+                </a:rPr>
+                <a:t>archivados</a:t>
+              </a:r>
+              <a:r>
+                <a:rPr lang="en-US" sz="2978" dirty="0">
+                  <a:solidFill>
+                    <a:srgbClr val="000000"/>
+                  </a:solidFill>
+                  <a:latin typeface="Montserrat"/>
+                  <a:ea typeface="Montserrat"/>
+                  <a:cs typeface="Montserrat"/>
+                  <a:sym typeface="Montserrat"/>
+                </a:rPr>
+                <a:t> con </a:t>
+              </a:r>
+              <a:r>
+                <a:rPr lang="en-US" sz="2978" dirty="0" err="1">
+                  <a:solidFill>
+                    <a:srgbClr val="000000"/>
+                  </a:solidFill>
+                  <a:latin typeface="Montserrat"/>
+                  <a:ea typeface="Montserrat"/>
+                  <a:cs typeface="Montserrat"/>
+                  <a:sym typeface="Montserrat"/>
+                </a:rPr>
+                <a:t>éxito</a:t>
+              </a:r>
+              <a:r>
+                <a:rPr lang="en-US" sz="2978" dirty="0">
+                  <a:solidFill>
+                    <a:srgbClr val="000000"/>
+                  </a:solidFill>
+                  <a:latin typeface="Montserrat"/>
+                  <a:ea typeface="Montserrat"/>
+                  <a:cs typeface="Montserrat"/>
+                  <a:sym typeface="Montserrat"/>
+                </a:rPr>
+                <a:t> y </a:t>
+              </a:r>
+              <a:r>
+                <a:rPr lang="en-US" sz="2978" dirty="0" err="1">
+                  <a:solidFill>
+                    <a:srgbClr val="000000"/>
+                  </a:solidFill>
+                  <a:latin typeface="Montserrat"/>
+                  <a:ea typeface="Montserrat"/>
+                  <a:cs typeface="Montserrat"/>
+                  <a:sym typeface="Montserrat"/>
+                </a:rPr>
+                <a:t>cuáles</a:t>
+              </a:r>
+              <a:r>
+                <a:rPr lang="en-US" sz="2978" dirty="0">
+                  <a:solidFill>
+                    <a:srgbClr val="000000"/>
+                  </a:solidFill>
+                  <a:latin typeface="Montserrat"/>
+                  <a:ea typeface="Montserrat"/>
+                  <a:cs typeface="Montserrat"/>
+                  <a:sym typeface="Montserrat"/>
+                </a:rPr>
+                <a:t> </a:t>
+              </a:r>
+              <a:r>
+                <a:rPr lang="en-US" sz="2978" dirty="0" err="1">
+                  <a:solidFill>
+                    <a:srgbClr val="000000"/>
+                  </a:solidFill>
+                  <a:latin typeface="Montserrat"/>
+                  <a:ea typeface="Montserrat"/>
+                  <a:cs typeface="Montserrat"/>
+                  <a:sym typeface="Montserrat"/>
+                </a:rPr>
+                <a:t>tienen</a:t>
+              </a:r>
+              <a:r>
+                <a:rPr lang="en-US" sz="2978" dirty="0">
+                  <a:solidFill>
+                    <a:srgbClr val="000000"/>
+                  </a:solidFill>
+                  <a:latin typeface="Montserrat"/>
+                  <a:ea typeface="Montserrat"/>
+                  <a:cs typeface="Montserrat"/>
+                  <a:sym typeface="Montserrat"/>
+                </a:rPr>
+                <a:t> </a:t>
+              </a:r>
+              <a:r>
+                <a:rPr lang="en-US" sz="2978" dirty="0" err="1">
+                  <a:solidFill>
+                    <a:srgbClr val="000000"/>
+                  </a:solidFill>
+                  <a:latin typeface="Montserrat"/>
+                  <a:ea typeface="Montserrat"/>
+                  <a:cs typeface="Montserrat"/>
+                  <a:sym typeface="Montserrat"/>
+                </a:rPr>
+                <a:t>inconsistencias</a:t>
+              </a:r>
+              <a:r>
+                <a:rPr lang="en-US" sz="2978" dirty="0">
+                  <a:solidFill>
+                    <a:srgbClr val="000000"/>
+                  </a:solidFill>
+                  <a:latin typeface="Montserrat"/>
+                  <a:ea typeface="Montserrat"/>
+                  <a:cs typeface="Montserrat"/>
+                  <a:sym typeface="Montserrat"/>
+                </a:rPr>
+                <a:t>.</a:t>
               </a:r>
             </a:p>
           </p:txBody>
@@ -3899,13 +4664,14 @@
 </file>
 
 <file path=ppt/slides/slide3.xml><?xml version="1.0" encoding="utf-8"?>
-<p:sld xmlns:p="http://schemas.openxmlformats.org/presentationml/2006/main" xmlns:a="http://schemas.openxmlformats.org/drawingml/2006/main">
+<p:sld xmlns:a="http://schemas.openxmlformats.org/drawingml/2006/main" xmlns:r="http://schemas.openxmlformats.org/officeDocument/2006/relationships" xmlns:p="http://schemas.openxmlformats.org/presentationml/2006/main">
   <p:cSld>
     <p:bg>
       <p:bgPr>
         <a:solidFill>
           <a:srgbClr val="FAFAFA"/>
         </a:solidFill>
+        <a:effectLst/>
       </p:bgPr>
     </p:bg>
     <p:spTree>
@@ -3924,12 +4690,12 @@
       </p:grpSpPr>
       <p:sp>
         <p:nvSpPr>
-          <p:cNvPr name="TextBox 2" id="2"/>
-          <p:cNvSpPr txBox="true"/>
+          <p:cNvPr id="2" name="TextBox 2"/>
+          <p:cNvSpPr txBox="1"/>
           <p:nvPr/>
         </p:nvSpPr>
         <p:spPr>
-          <a:xfrm rot="0">
+          <a:xfrm>
             <a:off x="2800989" y="376370"/>
             <a:ext cx="12357193" cy="1275073"/>
           </a:xfrm>
@@ -3938,7 +4704,7 @@
           </a:prstGeom>
         </p:spPr>
         <p:txBody>
-          <a:bodyPr anchor="t" rtlCol="false" tIns="0" lIns="0" bIns="0" rIns="0">
+          <a:bodyPr lIns="0" tIns="0" rIns="0" bIns="0" rtlCol="0" anchor="t">
             <a:spAutoFit/>
           </a:bodyPr>
           <a:lstStyle/>
@@ -3952,7 +4718,7 @@
               </a:spcBef>
             </a:pPr>
             <a:r>
-              <a:rPr lang="en-US" b="true" sz="4914" u="sng">
+              <a:rPr lang="en-US" sz="4914" b="1" u="sng" dirty="0">
                 <a:solidFill>
                   <a:srgbClr val="DECFAF"/>
                 </a:solidFill>
@@ -3961,10 +4727,10 @@
                 <a:cs typeface="Montserrat Ultra-Bold"/>
                 <a:sym typeface="Montserrat Ultra-Bold"/>
               </a:rPr>
-              <a:t>La</a:t>
-            </a:r>
-            <a:r>
-              <a:rPr lang="en-US" b="true" sz="4914" u="sng">
+              <a:t>La </a:t>
+            </a:r>
+            <a:r>
+              <a:rPr lang="en-US" sz="4914" b="1" u="sng" dirty="0" err="1">
                 <a:solidFill>
                   <a:srgbClr val="DECFAF"/>
                 </a:solidFill>
@@ -3973,8 +4739,41 @@
                 <a:cs typeface="Montserrat Ultra-Bold"/>
                 <a:sym typeface="Montserrat Ultra-Bold"/>
               </a:rPr>
-              <a:t> Solución es un Gestor de Repartos</a:t>
-            </a:r>
+              <a:t>Solución</a:t>
+            </a:r>
+            <a:r>
+              <a:rPr lang="en-US" sz="4914" b="1" u="sng" dirty="0">
+                <a:solidFill>
+                  <a:srgbClr val="DECFAF"/>
+                </a:solidFill>
+                <a:latin typeface="Montserrat Ultra-Bold"/>
+                <a:ea typeface="Montserrat Ultra-Bold"/>
+                <a:cs typeface="Montserrat Ultra-Bold"/>
+                <a:sym typeface="Montserrat Ultra-Bold"/>
+              </a:rPr>
+              <a:t> es un Gestor de </a:t>
+            </a:r>
+            <a:r>
+              <a:rPr lang="en-US" sz="4914" b="1" u="sng" dirty="0" err="1">
+                <a:solidFill>
+                  <a:srgbClr val="DECFAF"/>
+                </a:solidFill>
+                <a:latin typeface="Montserrat Ultra-Bold"/>
+                <a:ea typeface="Montserrat Ultra-Bold"/>
+                <a:cs typeface="Montserrat Ultra-Bold"/>
+                <a:sym typeface="Montserrat Ultra-Bold"/>
+              </a:rPr>
+              <a:t>Repartos</a:t>
+            </a:r>
+            <a:endParaRPr lang="en-US" sz="4914" b="1" u="sng" dirty="0">
+              <a:solidFill>
+                <a:srgbClr val="DECFAF"/>
+              </a:solidFill>
+              <a:latin typeface="Montserrat Ultra-Bold"/>
+              <a:ea typeface="Montserrat Ultra-Bold"/>
+              <a:cs typeface="Montserrat Ultra-Bold"/>
+              <a:sym typeface="Montserrat Ultra-Bold"/>
+            </a:endParaRPr>
           </a:p>
           <a:p>
             <a:pPr algn="ctr">
@@ -3985,17 +4784,26 @@
                 <a:spcPct val="0"/>
               </a:spcBef>
             </a:pPr>
-          </a:p>
-        </p:txBody>
-      </p:sp>
-      <p:sp>
-        <p:nvSpPr>
-          <p:cNvPr name="TextBox 3" id="3"/>
-          <p:cNvSpPr txBox="true"/>
+            <a:endParaRPr lang="en-US" sz="4914" b="1" u="sng" dirty="0">
+              <a:solidFill>
+                <a:srgbClr val="DECFAF"/>
+              </a:solidFill>
+              <a:latin typeface="Montserrat Ultra-Bold"/>
+              <a:ea typeface="Montserrat Ultra-Bold"/>
+              <a:cs typeface="Montserrat Ultra-Bold"/>
+              <a:sym typeface="Montserrat Ultra-Bold"/>
+            </a:endParaRPr>
+          </a:p>
+        </p:txBody>
+      </p:sp>
+      <p:sp>
+        <p:nvSpPr>
+          <p:cNvPr id="3" name="TextBox 3"/>
+          <p:cNvSpPr txBox="1"/>
           <p:nvPr/>
         </p:nvSpPr>
         <p:spPr>
-          <a:xfrm rot="0">
+          <a:xfrm>
             <a:off x="810823" y="1737039"/>
             <a:ext cx="4443561" cy="761455"/>
           </a:xfrm>
@@ -4004,7 +4812,7 @@
           </a:prstGeom>
         </p:spPr>
         <p:txBody>
-          <a:bodyPr anchor="t" rtlCol="false" tIns="0" lIns="0" bIns="0" rIns="0">
+          <a:bodyPr lIns="0" tIns="0" rIns="0" bIns="0" rtlCol="0" anchor="t">
             <a:spAutoFit/>
           </a:bodyPr>
           <a:lstStyle/>
@@ -4018,7 +4826,7 @@
               </a:spcBef>
             </a:pPr>
             <a:r>
-              <a:rPr lang="en-US" b="true" sz="2978">
+              <a:rPr lang="en-US" sz="2978" b="1">
                 <a:solidFill>
                   <a:srgbClr val="000000"/>
                 </a:solidFill>
@@ -4027,31 +4835,19 @@
                 <a:cs typeface="Montserrat Ultra-Bold"/>
                 <a:sym typeface="Montserrat Ultra-Bold"/>
               </a:rPr>
-              <a:t> L</a:t>
-            </a:r>
-            <a:r>
-              <a:rPr lang="en-US" b="true" sz="2978">
-                <a:solidFill>
-                  <a:srgbClr val="000000"/>
-                </a:solidFill>
-                <a:latin typeface="Montserrat Ultra-Bold"/>
-                <a:ea typeface="Montserrat Ultra-Bold"/>
-                <a:cs typeface="Montserrat Ultra-Bold"/>
-                <a:sym typeface="Montserrat Ultra-Bold"/>
-              </a:rPr>
-              <a:t>ectura Inteligente (OCR):</a:t>
-            </a:r>
-          </a:p>
-        </p:txBody>
-      </p:sp>
-      <p:sp>
-        <p:nvSpPr>
-          <p:cNvPr name="TextBox 4" id="4"/>
-          <p:cNvSpPr txBox="true"/>
+              <a:t> Lectura Inteligente (OCR):</a:t>
+            </a:r>
+          </a:p>
+        </p:txBody>
+      </p:sp>
+      <p:sp>
+        <p:nvSpPr>
+          <p:cNvPr id="4" name="TextBox 4"/>
+          <p:cNvSpPr txBox="1"/>
           <p:nvPr/>
         </p:nvSpPr>
         <p:spPr>
-          <a:xfrm rot="0">
+          <a:xfrm>
             <a:off x="5917571" y="1737039"/>
             <a:ext cx="11868476" cy="1504405"/>
           </a:xfrm>
@@ -4060,7 +4856,7 @@
           </a:prstGeom>
         </p:spPr>
         <p:txBody>
-          <a:bodyPr anchor="t" rtlCol="false" tIns="0" lIns="0" bIns="0" rIns="0">
+          <a:bodyPr lIns="0" tIns="0" rIns="0" bIns="0" rtlCol="0" anchor="t">
             <a:spAutoFit/>
           </a:bodyPr>
           <a:lstStyle/>
@@ -4083,31 +4879,19 @@
                 <a:cs typeface="Montserrat"/>
                 <a:sym typeface="Montserrat"/>
               </a:rPr>
-              <a:t>Lee aut</a:t>
-            </a:r>
-            <a:r>
-              <a:rPr lang="en-US" sz="2978">
-                <a:solidFill>
-                  <a:srgbClr val="000000"/>
-                </a:solidFill>
-                <a:latin typeface="Montserrat"/>
-                <a:ea typeface="Montserrat"/>
-                <a:cs typeface="Montserrat"/>
-                <a:sym typeface="Montserrat"/>
-              </a:rPr>
-              <a:t>omáticamente los PDF escaneados, identificando la empresa, fecha, sucursal y número de reparto de forma instantánea. (Una tecnologia con la que ya contamos y no le estamos sacando el mayor provecho</a:t>
-            </a:r>
-          </a:p>
-        </p:txBody>
-      </p:sp>
-      <p:sp>
-        <p:nvSpPr>
-          <p:cNvPr name="TextBox 5" id="5"/>
-          <p:cNvSpPr txBox="true"/>
+              <a:t>Lee automáticamente los PDF escaneados, identificando la empresa, fecha, sucursal y número de reparto de forma instantánea. (Una tecnologia con la que ya contamos y no le estamos sacando el mayor provecho</a:t>
+            </a:r>
+          </a:p>
+        </p:txBody>
+      </p:sp>
+      <p:sp>
+        <p:nvSpPr>
+          <p:cNvPr id="5" name="TextBox 5"/>
+          <p:cNvSpPr txBox="1"/>
           <p:nvPr/>
         </p:nvSpPr>
         <p:spPr>
-          <a:xfrm rot="0">
+          <a:xfrm>
             <a:off x="810823" y="3683671"/>
             <a:ext cx="4443561" cy="761455"/>
           </a:xfrm>
@@ -4116,7 +4900,7 @@
           </a:prstGeom>
         </p:spPr>
         <p:txBody>
-          <a:bodyPr anchor="t" rtlCol="false" tIns="0" lIns="0" bIns="0" rIns="0">
+          <a:bodyPr lIns="0" tIns="0" rIns="0" bIns="0" rtlCol="0" anchor="t">
             <a:spAutoFit/>
           </a:bodyPr>
           <a:lstStyle/>
@@ -4130,7 +4914,7 @@
               </a:spcBef>
             </a:pPr>
             <a:r>
-              <a:rPr lang="en-US" b="true" sz="2978">
+              <a:rPr lang="en-US" sz="2978" b="1">
                 <a:solidFill>
                   <a:srgbClr val="000000"/>
                 </a:solidFill>
@@ -4139,31 +4923,19 @@
                 <a:cs typeface="Montserrat Ultra-Bold"/>
                 <a:sym typeface="Montserrat Ultra-Bold"/>
               </a:rPr>
-              <a:t>Cla</a:t>
-            </a:r>
-            <a:r>
-              <a:rPr lang="en-US" b="true" sz="2978">
-                <a:solidFill>
-                  <a:srgbClr val="000000"/>
-                </a:solidFill>
-                <a:latin typeface="Montserrat Ultra-Bold"/>
-                <a:ea typeface="Montserrat Ultra-Bold"/>
-                <a:cs typeface="Montserrat Ultra-Bold"/>
-                <a:sym typeface="Montserrat Ultra-Bold"/>
-              </a:rPr>
-              <a:t>sificación en Cascada:</a:t>
-            </a:r>
-          </a:p>
-        </p:txBody>
-      </p:sp>
-      <p:sp>
-        <p:nvSpPr>
-          <p:cNvPr name="TextBox 6" id="6"/>
-          <p:cNvSpPr txBox="true"/>
+              <a:t>Clasificación en Cascada:</a:t>
+            </a:r>
+          </a:p>
+        </p:txBody>
+      </p:sp>
+      <p:sp>
+        <p:nvSpPr>
+          <p:cNvPr id="6" name="TextBox 6"/>
+          <p:cNvSpPr txBox="1"/>
           <p:nvPr/>
         </p:nvSpPr>
         <p:spPr>
-          <a:xfrm rot="0">
+          <a:xfrm>
             <a:off x="5917571" y="3683671"/>
             <a:ext cx="11868476" cy="761455"/>
           </a:xfrm>
@@ -4172,7 +4944,7 @@
           </a:prstGeom>
         </p:spPr>
         <p:txBody>
-          <a:bodyPr anchor="t" rtlCol="false" tIns="0" lIns="0" bIns="0" rIns="0">
+          <a:bodyPr lIns="0" tIns="0" rIns="0" bIns="0" rtlCol="0" anchor="t">
             <a:spAutoFit/>
           </a:bodyPr>
           <a:lstStyle/>
@@ -4195,31 +4967,19 @@
                 <a:cs typeface="Montserrat"/>
                 <a:sym typeface="Montserrat"/>
               </a:rPr>
-              <a:t>Mueve y estru</a:t>
-            </a:r>
-            <a:r>
-              <a:rPr lang="en-US" sz="2978">
-                <a:solidFill>
-                  <a:srgbClr val="000000"/>
-                </a:solidFill>
-                <a:latin typeface="Montserrat"/>
-                <a:ea typeface="Montserrat"/>
-                <a:cs typeface="Montserrat"/>
-                <a:sym typeface="Montserrat"/>
-              </a:rPr>
-              <a:t>ctura las carpetas en el servidor de forma jerárquica y limpia (Año &gt; Empresa &gt; Sucursal &gt; Mes &gt; Día).</a:t>
-            </a:r>
-          </a:p>
-        </p:txBody>
-      </p:sp>
-      <p:sp>
-        <p:nvSpPr>
-          <p:cNvPr name="TextBox 7" id="7"/>
-          <p:cNvSpPr txBox="true"/>
+              <a:t>Mueve y estructura las carpetas en el servidor de forma jerárquica y limpia (Año &gt; Empresa &gt; Sucursal &gt; Mes &gt; Día).</a:t>
+            </a:r>
+          </a:p>
+        </p:txBody>
+      </p:sp>
+      <p:sp>
+        <p:nvSpPr>
+          <p:cNvPr id="7" name="TextBox 7"/>
+          <p:cNvSpPr txBox="1"/>
           <p:nvPr/>
         </p:nvSpPr>
         <p:spPr>
-          <a:xfrm rot="0">
+          <a:xfrm>
             <a:off x="810823" y="5288088"/>
             <a:ext cx="4443561" cy="761455"/>
           </a:xfrm>
@@ -4228,7 +4988,7 @@
           </a:prstGeom>
         </p:spPr>
         <p:txBody>
-          <a:bodyPr anchor="t" rtlCol="false" tIns="0" lIns="0" bIns="0" rIns="0">
+          <a:bodyPr lIns="0" tIns="0" rIns="0" bIns="0" rtlCol="0" anchor="t">
             <a:spAutoFit/>
           </a:bodyPr>
           <a:lstStyle/>
@@ -4242,7 +5002,7 @@
               </a:spcBef>
             </a:pPr>
             <a:r>
-              <a:rPr lang="en-US" b="true" sz="2978">
+              <a:rPr lang="en-US" sz="2978" b="1">
                 <a:solidFill>
                   <a:srgbClr val="000000"/>
                 </a:solidFill>
@@ -4258,12 +5018,12 @@
       </p:sp>
       <p:sp>
         <p:nvSpPr>
-          <p:cNvPr name="TextBox 8" id="8"/>
-          <p:cNvSpPr txBox="true"/>
+          <p:cNvPr id="8" name="TextBox 8"/>
+          <p:cNvSpPr txBox="1"/>
           <p:nvPr/>
         </p:nvSpPr>
         <p:spPr>
-          <a:xfrm rot="0">
+          <a:xfrm>
             <a:off x="5917571" y="5288088"/>
             <a:ext cx="11868476" cy="1132930"/>
           </a:xfrm>
@@ -4272,7 +5032,7 @@
           </a:prstGeom>
         </p:spPr>
         <p:txBody>
-          <a:bodyPr anchor="t" rtlCol="false" tIns="0" lIns="0" bIns="0" rIns="0">
+          <a:bodyPr lIns="0" tIns="0" rIns="0" bIns="0" rtlCol="0" anchor="t">
             <a:spAutoFit/>
           </a:bodyPr>
           <a:lstStyle/>
@@ -4295,40 +5055,28 @@
                 <a:cs typeface="Montserrat"/>
                 <a:sym typeface="Montserrat"/>
               </a:rPr>
-              <a:t>U</a:t>
-            </a:r>
-            <a:r>
-              <a:rPr lang="en-US" sz="2978">
-                <a:solidFill>
-                  <a:srgbClr val="000000"/>
-                </a:solidFill>
-                <a:latin typeface="Montserrat"/>
-                <a:ea typeface="Montserrat"/>
-                <a:cs typeface="Montserrat"/>
-                <a:sym typeface="Montserrat"/>
-              </a:rPr>
-              <a:t>n panel web premium para supervisar los documentos organizados, buscar repartos al instante y resolver excepciones.</a:t>
-            </a:r>
-          </a:p>
-        </p:txBody>
-      </p:sp>
-      <p:sp>
-        <p:nvSpPr>
-          <p:cNvPr name="TextBox 9" id="9"/>
-          <p:cNvSpPr txBox="true"/>
+              <a:t>Un panel web premium para supervisar los documentos organizados, buscar repartos al instante y resolver excepciones.</a:t>
+            </a:r>
+          </a:p>
+        </p:txBody>
+      </p:sp>
+      <p:sp>
+        <p:nvSpPr>
+          <p:cNvPr id="9" name="TextBox 9"/>
+          <p:cNvSpPr txBox="1"/>
           <p:nvPr/>
         </p:nvSpPr>
         <p:spPr>
-          <a:xfrm rot="0">
+          <a:xfrm>
             <a:off x="810823" y="7635456"/>
-            <a:ext cx="4443561" cy="761455"/>
+            <a:ext cx="4443561" cy="769441"/>
           </a:xfrm>
           <a:prstGeom prst="rect">
             <a:avLst/>
           </a:prstGeom>
         </p:spPr>
         <p:txBody>
-          <a:bodyPr anchor="t" rtlCol="false" tIns="0" lIns="0" bIns="0" rIns="0">
+          <a:bodyPr lIns="0" tIns="0" rIns="0" bIns="0" rtlCol="0" anchor="t">
             <a:spAutoFit/>
           </a:bodyPr>
           <a:lstStyle/>
@@ -4342,7 +5090,7 @@
               </a:spcBef>
             </a:pPr>
             <a:r>
-              <a:rPr lang="en-US" b="true" sz="2978">
+              <a:rPr lang="en-US" sz="2978" b="1" dirty="0" err="1">
                 <a:solidFill>
                   <a:srgbClr val="000000"/>
                 </a:solidFill>
@@ -4351,28 +5099,61 @@
                 <a:cs typeface="Montserrat Ultra-Bold"/>
                 <a:sym typeface="Montserrat Ultra-Bold"/>
               </a:rPr>
-              <a:t>Base de Datos Indexada</a:t>
-            </a:r>
-          </a:p>
-        </p:txBody>
-      </p:sp>
-      <p:sp>
-        <p:nvSpPr>
-          <p:cNvPr name="TextBox 10" id="10"/>
-          <p:cNvSpPr txBox="true"/>
+              <a:t>Asociación</a:t>
+            </a:r>
+            <a:r>
+              <a:rPr lang="en-US" sz="2978" b="1" dirty="0">
+                <a:solidFill>
+                  <a:srgbClr val="000000"/>
+                </a:solidFill>
+                <a:latin typeface="Montserrat Ultra-Bold"/>
+                <a:ea typeface="Montserrat Ultra-Bold"/>
+                <a:cs typeface="Montserrat Ultra-Bold"/>
+                <a:sym typeface="Montserrat Ultra-Bold"/>
+              </a:rPr>
+              <a:t> de Cajas </a:t>
+            </a:r>
+            <a:r>
+              <a:rPr lang="en-US" sz="2978" b="1" dirty="0" err="1">
+                <a:solidFill>
+                  <a:srgbClr val="000000"/>
+                </a:solidFill>
+                <a:latin typeface="Montserrat Ultra-Bold"/>
+                <a:ea typeface="Montserrat Ultra-Bold"/>
+                <a:cs typeface="Montserrat Ultra-Bold"/>
+                <a:sym typeface="Montserrat Ultra-Bold"/>
+              </a:rPr>
+              <a:t>Físicas</a:t>
+            </a:r>
+            <a:endParaRPr lang="en-US" sz="2978" b="1" dirty="0">
+              <a:solidFill>
+                <a:srgbClr val="000000"/>
+              </a:solidFill>
+              <a:latin typeface="Montserrat Ultra-Bold"/>
+              <a:ea typeface="Montserrat Ultra-Bold"/>
+              <a:cs typeface="Montserrat Ultra-Bold"/>
+              <a:sym typeface="Montserrat Ultra-Bold"/>
+            </a:endParaRPr>
+          </a:p>
+        </p:txBody>
+      </p:sp>
+      <p:sp>
+        <p:nvSpPr>
+          <p:cNvPr id="10" name="TextBox 10"/>
+          <p:cNvSpPr txBox="1"/>
           <p:nvPr/>
         </p:nvSpPr>
         <p:spPr>
-          <a:xfrm rot="0">
+          <a:xfrm>
             <a:off x="5917571" y="7635456"/>
-            <a:ext cx="11868476" cy="761455"/>
+            <a:ext cx="11868476" cy="769441"/>
           </a:xfrm>
           <a:prstGeom prst="rect">
             <a:avLst/>
           </a:prstGeom>
         </p:spPr>
         <p:txBody>
-          <a:bodyPr anchor="t" rtlCol="false" tIns="0" lIns="0" bIns="0" rIns="0">
+          <a:bodyPr lIns="0" tIns="0" rIns="0" bIns="0" rtlCol="0" anchor="t">
             <a:spAutoFit/>
           </a:bodyPr>
           <a:lstStyle/>
@@ -4386,7 +5167,7 @@
               </a:spcBef>
             </a:pPr>
             <a:r>
-              <a:rPr lang="en-US" sz="2978">
+              <a:rPr lang="en-US" sz="2978" dirty="0">
                 <a:solidFill>
                   <a:srgbClr val="000000"/>
                 </a:solidFill>
@@ -4395,10 +5176,10 @@
                 <a:cs typeface="Montserrat"/>
                 <a:sym typeface="Montserrat"/>
               </a:rPr>
-              <a:t>Registro perma</a:t>
-            </a:r>
-            <a:r>
-              <a:rPr lang="en-US" sz="2978">
+              <a:t>Cada </a:t>
+            </a:r>
+            <a:r>
+              <a:rPr lang="en-US" sz="2978" dirty="0" err="1">
                 <a:solidFill>
                   <a:srgbClr val="000000"/>
                 </a:solidFill>
@@ -4407,7 +5188,187 @@
                 <a:cs typeface="Montserrat"/>
                 <a:sym typeface="Montserrat"/>
               </a:rPr>
-              <a:t>nente de cada hoja de reparto para auditorías inmediatas.</a:t>
+              <a:t>reparto</a:t>
+            </a:r>
+            <a:r>
+              <a:rPr lang="en-US" sz="2978" dirty="0">
+                <a:solidFill>
+                  <a:srgbClr val="000000"/>
+                </a:solidFill>
+                <a:latin typeface="Montserrat"/>
+                <a:ea typeface="Montserrat"/>
+                <a:cs typeface="Montserrat"/>
+                <a:sym typeface="Montserrat"/>
+              </a:rPr>
+              <a:t> </a:t>
+            </a:r>
+            <a:r>
+              <a:rPr lang="en-US" sz="2978" dirty="0" err="1">
+                <a:solidFill>
+                  <a:srgbClr val="000000"/>
+                </a:solidFill>
+                <a:latin typeface="Montserrat"/>
+                <a:ea typeface="Montserrat"/>
+                <a:cs typeface="Montserrat"/>
+                <a:sym typeface="Montserrat"/>
+              </a:rPr>
+              <a:t>digitalizado</a:t>
+            </a:r>
+            <a:r>
+              <a:rPr lang="en-US" sz="2978" dirty="0">
+                <a:solidFill>
+                  <a:srgbClr val="000000"/>
+                </a:solidFill>
+                <a:latin typeface="Montserrat"/>
+                <a:ea typeface="Montserrat"/>
+                <a:cs typeface="Montserrat"/>
+                <a:sym typeface="Montserrat"/>
+              </a:rPr>
+              <a:t> se asocial a </a:t>
+            </a:r>
+            <a:r>
+              <a:rPr lang="en-US" sz="2978" dirty="0" err="1">
+                <a:solidFill>
+                  <a:srgbClr val="000000"/>
+                </a:solidFill>
+                <a:latin typeface="Montserrat"/>
+                <a:ea typeface="Montserrat"/>
+                <a:cs typeface="Montserrat"/>
+                <a:sym typeface="Montserrat"/>
+              </a:rPr>
+              <a:t>una</a:t>
+            </a:r>
+            <a:r>
+              <a:rPr lang="en-US" sz="2978" dirty="0">
+                <a:solidFill>
+                  <a:srgbClr val="000000"/>
+                </a:solidFill>
+                <a:latin typeface="Montserrat"/>
+                <a:ea typeface="Montserrat"/>
+                <a:cs typeface="Montserrat"/>
+                <a:sym typeface="Montserrat"/>
+              </a:rPr>
+              <a:t> </a:t>
+            </a:r>
+            <a:r>
+              <a:rPr lang="en-US" sz="2978" dirty="0" err="1">
+                <a:solidFill>
+                  <a:srgbClr val="000000"/>
+                </a:solidFill>
+                <a:latin typeface="Montserrat"/>
+                <a:ea typeface="Montserrat"/>
+                <a:cs typeface="Montserrat"/>
+                <a:sym typeface="Montserrat"/>
+              </a:rPr>
+              <a:t>caja</a:t>
+            </a:r>
+            <a:r>
+              <a:rPr lang="en-US" sz="2978" dirty="0">
+                <a:solidFill>
+                  <a:srgbClr val="000000"/>
+                </a:solidFill>
+                <a:latin typeface="Montserrat"/>
+                <a:ea typeface="Montserrat"/>
+                <a:cs typeface="Montserrat"/>
+                <a:sym typeface="Montserrat"/>
+              </a:rPr>
+              <a:t> </a:t>
+            </a:r>
+            <a:r>
+              <a:rPr lang="en-US" sz="2978" dirty="0" err="1">
+                <a:solidFill>
+                  <a:srgbClr val="000000"/>
+                </a:solidFill>
+                <a:latin typeface="Montserrat"/>
+                <a:ea typeface="Montserrat"/>
+                <a:cs typeface="Montserrat"/>
+                <a:sym typeface="Montserrat"/>
+              </a:rPr>
+              <a:t>física</a:t>
+            </a:r>
+            <a:r>
+              <a:rPr lang="en-US" sz="2978" dirty="0">
+                <a:solidFill>
+                  <a:srgbClr val="000000"/>
+                </a:solidFill>
+                <a:latin typeface="Montserrat"/>
+                <a:ea typeface="Montserrat"/>
+                <a:cs typeface="Montserrat"/>
+                <a:sym typeface="Montserrat"/>
+              </a:rPr>
+              <a:t> </a:t>
+            </a:r>
+            <a:r>
+              <a:rPr lang="en-US" sz="2978" dirty="0" err="1">
+                <a:solidFill>
+                  <a:srgbClr val="000000"/>
+                </a:solidFill>
+                <a:latin typeface="Montserrat"/>
+                <a:ea typeface="Montserrat"/>
+                <a:cs typeface="Montserrat"/>
+                <a:sym typeface="Montserrat"/>
+              </a:rPr>
+              <a:t>numerada</a:t>
+            </a:r>
+            <a:r>
+              <a:rPr lang="en-US" sz="2978" dirty="0">
+                <a:solidFill>
+                  <a:srgbClr val="000000"/>
+                </a:solidFill>
+                <a:latin typeface="Montserrat"/>
+                <a:ea typeface="Montserrat"/>
+                <a:cs typeface="Montserrat"/>
+                <a:sym typeface="Montserrat"/>
+              </a:rPr>
+              <a:t> </a:t>
+            </a:r>
+            <a:r>
+              <a:rPr lang="en-US" sz="2978" dirty="0" err="1">
+                <a:solidFill>
+                  <a:srgbClr val="000000"/>
+                </a:solidFill>
+                <a:latin typeface="Montserrat"/>
+                <a:ea typeface="Montserrat"/>
+                <a:cs typeface="Montserrat"/>
+                <a:sym typeface="Montserrat"/>
+              </a:rPr>
+              <a:t>en</a:t>
+            </a:r>
+            <a:r>
+              <a:rPr lang="en-US" sz="2978" dirty="0">
+                <a:solidFill>
+                  <a:srgbClr val="000000"/>
+                </a:solidFill>
+                <a:latin typeface="Montserrat"/>
+                <a:ea typeface="Montserrat"/>
+                <a:cs typeface="Montserrat"/>
+                <a:sym typeface="Montserrat"/>
+              </a:rPr>
+              <a:t> la base de </a:t>
+            </a:r>
+            <a:r>
+              <a:rPr lang="en-US" sz="2978" dirty="0" err="1">
+                <a:solidFill>
+                  <a:srgbClr val="000000"/>
+                </a:solidFill>
+                <a:latin typeface="Montserrat"/>
+                <a:ea typeface="Montserrat"/>
+                <a:cs typeface="Montserrat"/>
+                <a:sym typeface="Montserrat"/>
+              </a:rPr>
+              <a:t>datos</a:t>
+            </a:r>
+            <a:r>
+              <a:rPr lang="en-US" sz="2978" dirty="0">
+                <a:solidFill>
+                  <a:srgbClr val="000000"/>
+                </a:solidFill>
+                <a:latin typeface="Montserrat"/>
+                <a:ea typeface="Montserrat"/>
+                <a:cs typeface="Montserrat"/>
+                <a:sym typeface="Montserrat"/>
+              </a:rPr>
+              <a:t>.</a:t>
             </a:r>
           </a:p>
         </p:txBody>
@@ -4421,13 +5382,14 @@
 </file>
 
 <file path=ppt/slides/slide4.xml><?xml version="1.0" encoding="utf-8"?>
-<p:sld xmlns:p="http://schemas.openxmlformats.org/presentationml/2006/main" xmlns:a="http://schemas.openxmlformats.org/drawingml/2006/main">
+<p:sld xmlns:a="http://schemas.openxmlformats.org/drawingml/2006/main" xmlns:r="http://schemas.openxmlformats.org/officeDocument/2006/relationships" xmlns:p="http://schemas.openxmlformats.org/presentationml/2006/main">
   <p:cSld>
     <p:bg>
       <p:bgPr>
         <a:solidFill>
           <a:srgbClr val="FAFAFA"/>
         </a:solidFill>
+        <a:effectLst/>
       </p:bgPr>
     </p:bg>
     <p:spTree>
@@ -4446,12 +5408,12 @@
       </p:grpSpPr>
       <p:grpSp>
         <p:nvGrpSpPr>
-          <p:cNvPr name="Group 2" id="2"/>
+          <p:cNvPr id="2" name="Group 2"/>
           <p:cNvGrpSpPr/>
           <p:nvPr/>
         </p:nvGrpSpPr>
         <p:grpSpPr>
-          <a:xfrm rot="0">
+          <a:xfrm>
             <a:off x="2241578" y="309945"/>
             <a:ext cx="3625024" cy="715816"/>
             <a:chOff x="0" y="0"/>
@@ -4460,12 +5422,12 @@
         </p:grpSpPr>
         <p:sp>
           <p:nvSpPr>
-            <p:cNvPr name="Freeform 3" id="3"/>
+            <p:cNvPr id="3" name="Freeform 3"/>
             <p:cNvSpPr/>
             <p:nvPr/>
           </p:nvSpPr>
           <p:spPr>
-            <a:xfrm flipH="false" flipV="false" rot="0">
+            <a:xfrm>
               <a:off x="0" y="0"/>
               <a:ext cx="954739" cy="188528"/>
             </a:xfrm>
@@ -4474,9 +5436,9 @@
               <a:gdLst/>
               <a:ahLst/>
               <a:cxnLst/>
-              <a:rect r="r" b="b" t="t" l="l"/>
+              <a:rect l="l" t="t" r="r" b="b"/>
               <a:pathLst>
-                <a:path h="188528" w="954739">
+                <a:path w="954739" h="188528">
                   <a:moveTo>
                     <a:pt x="0" y="0"/>
                   </a:moveTo>
@@ -4504,11 +5466,18 @@
               <a:miter/>
             </a:ln>
           </p:spPr>
+          <p:txBody>
+            <a:bodyPr/>
+            <a:lstStyle/>
+            <a:p>
+              <a:endParaRPr lang="es-AR"/>
+            </a:p>
+          </p:txBody>
         </p:sp>
         <p:sp>
           <p:nvSpPr>
-            <p:cNvPr name="TextBox 4" id="4"/>
-            <p:cNvSpPr txBox="true"/>
+            <p:cNvPr id="4" name="TextBox 4"/>
+            <p:cNvSpPr txBox="1"/>
             <p:nvPr/>
           </p:nvSpPr>
           <p:spPr>
@@ -4521,7 +5490,7 @@
             </a:prstGeom>
           </p:spPr>
           <p:txBody>
-            <a:bodyPr anchor="ctr" rtlCol="false" tIns="50800" lIns="50800" bIns="50800" rIns="50800"/>
+            <a:bodyPr lIns="50800" tIns="50800" rIns="50800" bIns="50800" rtlCol="0" anchor="ctr"/>
             <a:lstStyle/>
             <a:p>
               <a:pPr algn="ctr">
@@ -4530,7 +5499,7 @@
                 </a:lnSpc>
               </a:pPr>
               <a:r>
-                <a:rPr lang="en-US" b="true" sz="1501">
+                <a:rPr lang="en-US" sz="1501" b="1">
                   <a:solidFill>
                     <a:srgbClr val="000000"/>
                   </a:solidFill>
@@ -4547,12 +5516,12 @@
       </p:grpSp>
       <p:grpSp>
         <p:nvGrpSpPr>
-          <p:cNvPr name="Group 5" id="5"/>
+          <p:cNvPr id="5" name="Group 5"/>
           <p:cNvGrpSpPr/>
           <p:nvPr/>
         </p:nvGrpSpPr>
         <p:grpSpPr>
-          <a:xfrm rot="0">
+          <a:xfrm>
             <a:off x="2241578" y="3075076"/>
             <a:ext cx="3625024" cy="715816"/>
             <a:chOff x="0" y="0"/>
@@ -4561,12 +5530,12 @@
         </p:grpSpPr>
         <p:sp>
           <p:nvSpPr>
-            <p:cNvPr name="Freeform 6" id="6"/>
+            <p:cNvPr id="6" name="Freeform 6"/>
             <p:cNvSpPr/>
             <p:nvPr/>
           </p:nvSpPr>
           <p:spPr>
-            <a:xfrm flipH="false" flipV="false" rot="0">
+            <a:xfrm>
               <a:off x="0" y="0"/>
               <a:ext cx="954739" cy="188528"/>
             </a:xfrm>
@@ -4575,9 +5544,9 @@
               <a:gdLst/>
               <a:ahLst/>
               <a:cxnLst/>
-              <a:rect r="r" b="b" t="t" l="l"/>
+              <a:rect l="l" t="t" r="r" b="b"/>
               <a:pathLst>
-                <a:path h="188528" w="954739">
+                <a:path w="954739" h="188528">
                   <a:moveTo>
                     <a:pt x="0" y="0"/>
                   </a:moveTo>
@@ -4605,11 +5574,18 @@
               <a:miter/>
             </a:ln>
           </p:spPr>
+          <p:txBody>
+            <a:bodyPr/>
+            <a:lstStyle/>
+            <a:p>
+              <a:endParaRPr lang="es-AR"/>
+            </a:p>
+          </p:txBody>
         </p:sp>
         <p:sp>
           <p:nvSpPr>
-            <p:cNvPr name="TextBox 7" id="7"/>
-            <p:cNvSpPr txBox="true"/>
+            <p:cNvPr id="7" name="TextBox 7"/>
+            <p:cNvSpPr txBox="1"/>
             <p:nvPr/>
           </p:nvSpPr>
           <p:spPr>
@@ -4622,7 +5598,7 @@
             </a:prstGeom>
           </p:spPr>
           <p:txBody>
-            <a:bodyPr anchor="ctr" rtlCol="false" tIns="50800" lIns="50800" bIns="50800" rIns="50800"/>
+            <a:bodyPr lIns="50800" tIns="50800" rIns="50800" bIns="50800" rtlCol="0" anchor="ctr"/>
             <a:lstStyle/>
             <a:p>
               <a:pPr algn="ctr">
@@ -4631,7 +5607,7 @@
                 </a:lnSpc>
               </a:pPr>
               <a:r>
-                <a:rPr lang="en-US" b="true" sz="1501">
+                <a:rPr lang="en-US" sz="1501" b="1">
                   <a:solidFill>
                     <a:srgbClr val="000000"/>
                   </a:solidFill>
@@ -4648,12 +5624,12 @@
       </p:grpSp>
       <p:grpSp>
         <p:nvGrpSpPr>
-          <p:cNvPr name="Group 8" id="8"/>
+          <p:cNvPr id="8" name="Group 8"/>
           <p:cNvGrpSpPr/>
           <p:nvPr/>
         </p:nvGrpSpPr>
         <p:grpSpPr>
-          <a:xfrm rot="0">
+          <a:xfrm>
             <a:off x="2511040" y="5840208"/>
             <a:ext cx="3086100" cy="3086100"/>
             <a:chOff x="0" y="0"/>
@@ -4662,12 +5638,12 @@
         </p:grpSpPr>
         <p:sp>
           <p:nvSpPr>
-            <p:cNvPr name="Freeform 9" id="9"/>
+            <p:cNvPr id="9" name="Freeform 9"/>
             <p:cNvSpPr/>
             <p:nvPr/>
           </p:nvSpPr>
           <p:spPr>
-            <a:xfrm flipH="false" flipV="false" rot="0">
+            <a:xfrm>
               <a:off x="0" y="0"/>
               <a:ext cx="812800" cy="812800"/>
             </a:xfrm>
@@ -4676,9 +5652,9 @@
               <a:gdLst/>
               <a:ahLst/>
               <a:cxnLst/>
-              <a:rect r="r" b="b" t="t" l="l"/>
+              <a:rect l="l" t="t" r="r" b="b"/>
               <a:pathLst>
-                <a:path h="812800" w="812800">
+                <a:path w="812800" h="812800">
                   <a:moveTo>
                     <a:pt x="406400" y="0"/>
                   </a:moveTo>
@@ -4709,11 +5685,18 @@
               <a:miter/>
             </a:ln>
           </p:spPr>
+          <p:txBody>
+            <a:bodyPr/>
+            <a:lstStyle/>
+            <a:p>
+              <a:endParaRPr lang="es-AR"/>
+            </a:p>
+          </p:txBody>
         </p:sp>
         <p:sp>
           <p:nvSpPr>
-            <p:cNvPr name="TextBox 10" id="10"/>
-            <p:cNvSpPr txBox="true"/>
+            <p:cNvPr id="10" name="TextBox 10"/>
+            <p:cNvSpPr txBox="1"/>
             <p:nvPr/>
           </p:nvSpPr>
           <p:spPr>
@@ -4726,7 +5709,7 @@
             </a:prstGeom>
           </p:spPr>
           <p:txBody>
-            <a:bodyPr anchor="ctr" rtlCol="false" tIns="50800" lIns="50800" bIns="50800" rIns="50800"/>
+            <a:bodyPr lIns="50800" tIns="50800" rIns="50800" bIns="50800" rtlCol="0" anchor="ctr"/>
             <a:lstStyle/>
             <a:p>
               <a:pPr algn="ctr">
@@ -4735,7 +5718,7 @@
                 </a:lnSpc>
               </a:pPr>
               <a:r>
-                <a:rPr lang="en-US" b="true" sz="1501">
+                <a:rPr lang="en-US" sz="1501" b="1">
                   <a:solidFill>
                     <a:srgbClr val="000000"/>
                   </a:solidFill>
@@ -4752,12 +5735,12 @@
       </p:grpSp>
       <p:grpSp>
         <p:nvGrpSpPr>
-          <p:cNvPr name="Group 11" id="11"/>
+          <p:cNvPr id="11" name="Group 11"/>
           <p:cNvGrpSpPr/>
           <p:nvPr/>
         </p:nvGrpSpPr>
         <p:grpSpPr>
-          <a:xfrm rot="0">
+          <a:xfrm>
             <a:off x="13101517" y="978165"/>
             <a:ext cx="813918" cy="715816"/>
             <a:chOff x="0" y="0"/>
@@ -4766,12 +5749,12 @@
         </p:grpSpPr>
         <p:sp>
           <p:nvSpPr>
-            <p:cNvPr name="Freeform 12" id="12"/>
+            <p:cNvPr id="12" name="Freeform 12"/>
             <p:cNvSpPr/>
             <p:nvPr/>
           </p:nvSpPr>
           <p:spPr>
-            <a:xfrm flipH="false" flipV="false" rot="0">
+            <a:xfrm>
               <a:off x="0" y="0"/>
               <a:ext cx="214365" cy="188528"/>
             </a:xfrm>
@@ -4780,9 +5763,9 @@
               <a:gdLst/>
               <a:ahLst/>
               <a:cxnLst/>
-              <a:rect r="r" b="b" t="t" l="l"/>
+              <a:rect l="l" t="t" r="r" b="b"/>
               <a:pathLst>
-                <a:path h="188528" w="214365">
+                <a:path w="214365" h="188528">
                   <a:moveTo>
                     <a:pt x="0" y="0"/>
                   </a:moveTo>
@@ -4807,11 +5790,18 @@
               <a:miter/>
             </a:ln>
           </p:spPr>
+          <p:txBody>
+            <a:bodyPr/>
+            <a:lstStyle/>
+            <a:p>
+              <a:endParaRPr lang="es-AR"/>
+            </a:p>
+          </p:txBody>
         </p:sp>
         <p:sp>
           <p:nvSpPr>
-            <p:cNvPr name="TextBox 13" id="13"/>
-            <p:cNvSpPr txBox="true"/>
+            <p:cNvPr id="13" name="TextBox 13"/>
+            <p:cNvSpPr txBox="1"/>
             <p:nvPr/>
           </p:nvSpPr>
           <p:spPr>
@@ -4824,7 +5814,7 @@
             </a:prstGeom>
           </p:spPr>
           <p:txBody>
-            <a:bodyPr anchor="ctr" rtlCol="false" tIns="50800" lIns="50800" bIns="50800" rIns="50800"/>
+            <a:bodyPr lIns="50800" tIns="50800" rIns="50800" bIns="50800" rtlCol="0" anchor="ctr"/>
             <a:lstStyle/>
             <a:p>
               <a:pPr algn="ctr">
@@ -4850,12 +5840,12 @@
       </p:grpSp>
       <p:grpSp>
         <p:nvGrpSpPr>
-          <p:cNvPr name="Group 14" id="14"/>
+          <p:cNvPr id="14" name="Group 14"/>
           <p:cNvGrpSpPr/>
           <p:nvPr/>
         </p:nvGrpSpPr>
         <p:grpSpPr>
-          <a:xfrm rot="0">
+          <a:xfrm>
             <a:off x="8737041" y="978165"/>
             <a:ext cx="813918" cy="715816"/>
             <a:chOff x="0" y="0"/>
@@ -4864,12 +5854,12 @@
         </p:grpSpPr>
         <p:sp>
           <p:nvSpPr>
-            <p:cNvPr name="Freeform 15" id="15"/>
+            <p:cNvPr id="15" name="Freeform 15"/>
             <p:cNvSpPr/>
             <p:nvPr/>
           </p:nvSpPr>
           <p:spPr>
-            <a:xfrm flipH="false" flipV="false" rot="0">
+            <a:xfrm>
               <a:off x="0" y="0"/>
               <a:ext cx="214365" cy="188528"/>
             </a:xfrm>
@@ -4878,9 +5868,9 @@
               <a:gdLst/>
               <a:ahLst/>
               <a:cxnLst/>
-              <a:rect r="r" b="b" t="t" l="l"/>
+              <a:rect l="l" t="t" r="r" b="b"/>
               <a:pathLst>
-                <a:path h="188528" w="214365">
+                <a:path w="214365" h="188528">
                   <a:moveTo>
                     <a:pt x="0" y="0"/>
                   </a:moveTo>
@@ -4905,11 +5895,18 @@
               <a:miter/>
             </a:ln>
           </p:spPr>
+          <p:txBody>
+            <a:bodyPr/>
+            <a:lstStyle/>
+            <a:p>
+              <a:endParaRPr lang="es-AR"/>
+            </a:p>
+          </p:txBody>
         </p:sp>
         <p:sp>
           <p:nvSpPr>
-            <p:cNvPr name="TextBox 16" id="16"/>
-            <p:cNvSpPr txBox="true"/>
+            <p:cNvPr id="16" name="TextBox 16"/>
+            <p:cNvSpPr txBox="1"/>
             <p:nvPr/>
           </p:nvSpPr>
           <p:spPr>
@@ -4922,7 +5919,7 @@
             </a:prstGeom>
           </p:spPr>
           <p:txBody>
-            <a:bodyPr anchor="ctr" rtlCol="false" tIns="50800" lIns="50800" bIns="50800" rIns="50800"/>
+            <a:bodyPr lIns="50800" tIns="50800" rIns="50800" bIns="50800" rtlCol="0" anchor="ctr"/>
             <a:lstStyle/>
             <a:p>
               <a:pPr algn="ctr">
@@ -4948,12 +5945,12 @@
       </p:grpSp>
       <p:grpSp>
         <p:nvGrpSpPr>
-          <p:cNvPr name="Group 17" id="17"/>
+          <p:cNvPr id="17" name="Group 17"/>
           <p:cNvGrpSpPr/>
           <p:nvPr/>
         </p:nvGrpSpPr>
         <p:grpSpPr>
-          <a:xfrm rot="0">
+          <a:xfrm>
             <a:off x="11695964" y="2662958"/>
             <a:ext cx="3625024" cy="715816"/>
             <a:chOff x="0" y="0"/>
@@ -4962,12 +5959,12 @@
         </p:grpSpPr>
         <p:sp>
           <p:nvSpPr>
-            <p:cNvPr name="Freeform 18" id="18"/>
+            <p:cNvPr id="18" name="Freeform 18"/>
             <p:cNvSpPr/>
             <p:nvPr/>
           </p:nvSpPr>
           <p:spPr>
-            <a:xfrm flipH="false" flipV="false" rot="0">
+            <a:xfrm>
               <a:off x="0" y="0"/>
               <a:ext cx="954739" cy="188528"/>
             </a:xfrm>
@@ -4976,9 +5973,9 @@
               <a:gdLst/>
               <a:ahLst/>
               <a:cxnLst/>
-              <a:rect r="r" b="b" t="t" l="l"/>
+              <a:rect l="l" t="t" r="r" b="b"/>
               <a:pathLst>
-                <a:path h="188528" w="954739">
+                <a:path w="954739" h="188528">
                   <a:moveTo>
                     <a:pt x="0" y="0"/>
                   </a:moveTo>
@@ -5006,11 +6003,18 @@
               <a:miter/>
             </a:ln>
           </p:spPr>
+          <p:txBody>
+            <a:bodyPr/>
+            <a:lstStyle/>
+            <a:p>
+              <a:endParaRPr lang="es-AR"/>
+            </a:p>
+          </p:txBody>
         </p:sp>
         <p:sp>
           <p:nvSpPr>
-            <p:cNvPr name="TextBox 19" id="19"/>
-            <p:cNvSpPr txBox="true"/>
+            <p:cNvPr id="19" name="TextBox 19"/>
+            <p:cNvSpPr txBox="1"/>
             <p:nvPr/>
           </p:nvSpPr>
           <p:spPr>
@@ -5023,7 +6027,7 @@
             </a:prstGeom>
           </p:spPr>
           <p:txBody>
-            <a:bodyPr anchor="ctr" rtlCol="false" tIns="50800" lIns="50800" bIns="50800" rIns="50800"/>
+            <a:bodyPr lIns="50800" tIns="50800" rIns="50800" bIns="50800" rtlCol="0" anchor="ctr"/>
             <a:lstStyle/>
             <a:p>
               <a:pPr algn="ctr">
@@ -5032,7 +6036,7 @@
                 </a:lnSpc>
               </a:pPr>
               <a:r>
-                <a:rPr lang="en-US" b="true" sz="1501">
+                <a:rPr lang="en-US" sz="1501" b="1">
                   <a:solidFill>
                     <a:srgbClr val="000000"/>
                   </a:solidFill>
@@ -5049,12 +6053,12 @@
       </p:grpSp>
       <p:grpSp>
         <p:nvGrpSpPr>
-          <p:cNvPr name="Group 20" id="20"/>
+          <p:cNvPr id="20" name="Group 20"/>
           <p:cNvGrpSpPr/>
           <p:nvPr/>
         </p:nvGrpSpPr>
         <p:grpSpPr>
-          <a:xfrm rot="0">
+          <a:xfrm>
             <a:off x="9476493" y="5650723"/>
             <a:ext cx="3625024" cy="715816"/>
             <a:chOff x="0" y="0"/>
@@ -5063,12 +6067,12 @@
         </p:grpSpPr>
         <p:sp>
           <p:nvSpPr>
-            <p:cNvPr name="Freeform 21" id="21"/>
+            <p:cNvPr id="21" name="Freeform 21"/>
             <p:cNvSpPr/>
             <p:nvPr/>
           </p:nvSpPr>
           <p:spPr>
-            <a:xfrm flipH="false" flipV="false" rot="0">
+            <a:xfrm>
               <a:off x="0" y="0"/>
               <a:ext cx="954739" cy="188528"/>
             </a:xfrm>
@@ -5077,9 +6081,9 @@
               <a:gdLst/>
               <a:ahLst/>
               <a:cxnLst/>
-              <a:rect r="r" b="b" t="t" l="l"/>
+              <a:rect l="l" t="t" r="r" b="b"/>
               <a:pathLst>
-                <a:path h="188528" w="954739">
+                <a:path w="954739" h="188528">
                   <a:moveTo>
                     <a:pt x="0" y="0"/>
                   </a:moveTo>
@@ -5107,11 +6111,18 @@
               <a:miter/>
             </a:ln>
           </p:spPr>
+          <p:txBody>
+            <a:bodyPr/>
+            <a:lstStyle/>
+            <a:p>
+              <a:endParaRPr lang="es-AR"/>
+            </a:p>
+          </p:txBody>
         </p:sp>
         <p:sp>
           <p:nvSpPr>
-            <p:cNvPr name="TextBox 22" id="22"/>
-            <p:cNvSpPr txBox="true"/>
+            <p:cNvPr id="22" name="TextBox 22"/>
+            <p:cNvSpPr txBox="1"/>
             <p:nvPr/>
           </p:nvSpPr>
           <p:spPr>
@@ -5124,7 +6135,7 @@
             </a:prstGeom>
           </p:spPr>
           <p:txBody>
-            <a:bodyPr anchor="ctr" rtlCol="false" tIns="50800" lIns="50800" bIns="50800" rIns="50800"/>
+            <a:bodyPr lIns="50800" tIns="50800" rIns="50800" bIns="50800" rtlCol="0" anchor="ctr"/>
             <a:lstStyle/>
             <a:p>
               <a:pPr algn="ctr">
@@ -5133,7 +6144,7 @@
                 </a:lnSpc>
               </a:pPr>
               <a:r>
-                <a:rPr lang="en-US" b="true" sz="1501">
+                <a:rPr lang="en-US" sz="1501" b="1">
                   <a:solidFill>
                     <a:srgbClr val="000000"/>
                   </a:solidFill>
@@ -5150,12 +6161,12 @@
       </p:grpSp>
       <p:grpSp>
         <p:nvGrpSpPr>
-          <p:cNvPr name="Group 23" id="23"/>
+          <p:cNvPr id="23" name="Group 23"/>
           <p:cNvGrpSpPr/>
           <p:nvPr/>
         </p:nvGrpSpPr>
         <p:grpSpPr>
-          <a:xfrm rot="0">
+          <a:xfrm>
             <a:off x="8431229" y="8339654"/>
             <a:ext cx="5715551" cy="715816"/>
             <a:chOff x="0" y="0"/>
@@ -5164,12 +6175,12 @@
         </p:grpSpPr>
         <p:sp>
           <p:nvSpPr>
-            <p:cNvPr name="Freeform 24" id="24"/>
+            <p:cNvPr id="24" name="Freeform 24"/>
             <p:cNvSpPr/>
             <p:nvPr/>
           </p:nvSpPr>
           <p:spPr>
-            <a:xfrm flipH="false" flipV="false" rot="0">
+            <a:xfrm>
               <a:off x="0" y="0"/>
               <a:ext cx="1505330" cy="188528"/>
             </a:xfrm>
@@ -5178,9 +6189,9 @@
               <a:gdLst/>
               <a:ahLst/>
               <a:cxnLst/>
-              <a:rect r="r" b="b" t="t" l="l"/>
+              <a:rect l="l" t="t" r="r" b="b"/>
               <a:pathLst>
-                <a:path h="188528" w="1505330">
+                <a:path w="1505330" h="188528">
                   <a:moveTo>
                     <a:pt x="0" y="0"/>
                   </a:moveTo>
@@ -5208,11 +6219,18 @@
               <a:miter/>
             </a:ln>
           </p:spPr>
+          <p:txBody>
+            <a:bodyPr/>
+            <a:lstStyle/>
+            <a:p>
+              <a:endParaRPr lang="es-AR"/>
+            </a:p>
+          </p:txBody>
         </p:sp>
         <p:sp>
           <p:nvSpPr>
-            <p:cNvPr name="TextBox 25" id="25"/>
-            <p:cNvSpPr txBox="true"/>
+            <p:cNvPr id="25" name="TextBox 25"/>
+            <p:cNvSpPr txBox="1"/>
             <p:nvPr/>
           </p:nvSpPr>
           <p:spPr>
@@ -5225,7 +6243,7 @@
             </a:prstGeom>
           </p:spPr>
           <p:txBody>
-            <a:bodyPr anchor="ctr" rtlCol="false" tIns="50800" lIns="50800" bIns="50800" rIns="50800"/>
+            <a:bodyPr lIns="50800" tIns="50800" rIns="50800" bIns="50800" rtlCol="0" anchor="ctr"/>
             <a:lstStyle/>
             <a:p>
               <a:pPr algn="ctr">
@@ -5234,7 +6252,7 @@
                 </a:lnSpc>
               </a:pPr>
               <a:r>
-                <a:rPr lang="en-US" b="true" sz="1501">
+                <a:rPr lang="en-US" sz="1501" b="1">
                   <a:solidFill>
                     <a:srgbClr val="000000"/>
                   </a:solidFill>
@@ -5251,12 +6269,12 @@
       </p:grpSp>
       <p:grpSp>
         <p:nvGrpSpPr>
-          <p:cNvPr name="Group 26" id="26"/>
+          <p:cNvPr id="26" name="Group 26"/>
           <p:cNvGrpSpPr/>
           <p:nvPr/>
         </p:nvGrpSpPr>
         <p:grpSpPr>
-          <a:xfrm rot="0">
+          <a:xfrm>
             <a:off x="1992817" y="1692510"/>
             <a:ext cx="4122548" cy="715816"/>
             <a:chOff x="0" y="0"/>
@@ -5265,12 +6283,12 @@
         </p:grpSpPr>
         <p:sp>
           <p:nvSpPr>
-            <p:cNvPr name="Freeform 27" id="27"/>
+            <p:cNvPr id="27" name="Freeform 27"/>
             <p:cNvSpPr/>
             <p:nvPr/>
           </p:nvSpPr>
           <p:spPr>
-            <a:xfrm flipH="false" flipV="false" rot="0">
+            <a:xfrm>
               <a:off x="0" y="0"/>
               <a:ext cx="1085774" cy="188528"/>
             </a:xfrm>
@@ -5279,9 +6297,9 @@
               <a:gdLst/>
               <a:ahLst/>
               <a:cxnLst/>
-              <a:rect r="r" b="b" t="t" l="l"/>
+              <a:rect l="l" t="t" r="r" b="b"/>
               <a:pathLst>
-                <a:path h="188528" w="1085774">
+                <a:path w="1085774" h="188528">
                   <a:moveTo>
                     <a:pt x="0" y="0"/>
                   </a:moveTo>
@@ -5306,11 +6324,18 @@
               <a:miter/>
             </a:ln>
           </p:spPr>
+          <p:txBody>
+            <a:bodyPr/>
+            <a:lstStyle/>
+            <a:p>
+              <a:endParaRPr lang="es-AR"/>
+            </a:p>
+          </p:txBody>
         </p:sp>
         <p:sp>
           <p:nvSpPr>
-            <p:cNvPr name="TextBox 28" id="28"/>
-            <p:cNvSpPr txBox="true"/>
+            <p:cNvPr id="28" name="TextBox 28"/>
+            <p:cNvSpPr txBox="1"/>
             <p:nvPr/>
           </p:nvSpPr>
           <p:spPr>
@@ -5323,7 +6348,7 @@
             </a:prstGeom>
           </p:spPr>
           <p:txBody>
-            <a:bodyPr anchor="ctr" rtlCol="false" tIns="50800" lIns="50800" bIns="50800" rIns="50800"/>
+            <a:bodyPr lIns="50800" tIns="50800" rIns="50800" bIns="50800" rtlCol="0" anchor="ctr"/>
             <a:lstStyle/>
             <a:p>
               <a:pPr algn="ctr">
@@ -5349,12 +6374,12 @@
       </p:grpSp>
       <p:grpSp>
         <p:nvGrpSpPr>
-          <p:cNvPr name="Group 29" id="29"/>
+          <p:cNvPr id="29" name="Group 29"/>
           <p:cNvGrpSpPr/>
           <p:nvPr/>
         </p:nvGrpSpPr>
         <p:grpSpPr>
-          <a:xfrm rot="0">
+          <a:xfrm>
             <a:off x="2725324" y="4457642"/>
             <a:ext cx="2657532" cy="715816"/>
             <a:chOff x="0" y="0"/>
@@ -5363,12 +6388,12 @@
         </p:grpSpPr>
         <p:sp>
           <p:nvSpPr>
-            <p:cNvPr name="Freeform 30" id="30"/>
+            <p:cNvPr id="30" name="Freeform 30"/>
             <p:cNvSpPr/>
             <p:nvPr/>
           </p:nvSpPr>
           <p:spPr>
-            <a:xfrm flipH="false" flipV="false" rot="0">
+            <a:xfrm>
               <a:off x="0" y="0"/>
               <a:ext cx="699926" cy="188528"/>
             </a:xfrm>
@@ -5377,9 +6402,9 @@
               <a:gdLst/>
               <a:ahLst/>
               <a:cxnLst/>
-              <a:rect r="r" b="b" t="t" l="l"/>
+              <a:rect l="l" t="t" r="r" b="b"/>
               <a:pathLst>
-                <a:path h="188528" w="699926">
+                <a:path w="699926" h="188528">
                   <a:moveTo>
                     <a:pt x="0" y="0"/>
                   </a:moveTo>
@@ -5404,11 +6429,18 @@
               <a:miter/>
             </a:ln>
           </p:spPr>
+          <p:txBody>
+            <a:bodyPr/>
+            <a:lstStyle/>
+            <a:p>
+              <a:endParaRPr lang="es-AR"/>
+            </a:p>
+          </p:txBody>
         </p:sp>
         <p:sp>
           <p:nvSpPr>
-            <p:cNvPr name="TextBox 31" id="31"/>
-            <p:cNvSpPr txBox="true"/>
+            <p:cNvPr id="31" name="TextBox 31"/>
+            <p:cNvSpPr txBox="1"/>
             <p:nvPr/>
           </p:nvSpPr>
           <p:spPr>
@@ -5421,7 +6453,7 @@
             </a:prstGeom>
           </p:spPr>
           <p:txBody>
-            <a:bodyPr anchor="ctr" rtlCol="false" tIns="50800" lIns="50800" bIns="50800" rIns="50800"/>
+            <a:bodyPr lIns="50800" tIns="50800" rIns="50800" bIns="50800" rtlCol="0" anchor="ctr"/>
             <a:lstStyle/>
             <a:p>
               <a:pPr algn="ctr">
@@ -5447,12 +6479,12 @@
       </p:grpSp>
       <p:grpSp>
         <p:nvGrpSpPr>
-          <p:cNvPr name="Group 32" id="32"/>
+          <p:cNvPr id="32" name="Group 32"/>
           <p:cNvGrpSpPr/>
           <p:nvPr/>
         </p:nvGrpSpPr>
         <p:grpSpPr>
-          <a:xfrm rot="0">
+          <a:xfrm>
             <a:off x="7738025" y="7147588"/>
             <a:ext cx="7101961" cy="715816"/>
             <a:chOff x="0" y="0"/>
@@ -5461,12 +6493,12 @@
         </p:grpSpPr>
         <p:sp>
           <p:nvSpPr>
-            <p:cNvPr name="Freeform 33" id="33"/>
+            <p:cNvPr id="33" name="Freeform 33"/>
             <p:cNvSpPr/>
             <p:nvPr/>
           </p:nvSpPr>
           <p:spPr>
-            <a:xfrm flipH="false" flipV="false" rot="0">
+            <a:xfrm>
               <a:off x="0" y="0"/>
               <a:ext cx="1870475" cy="188528"/>
             </a:xfrm>
@@ -5475,9 +6507,9 @@
               <a:gdLst/>
               <a:ahLst/>
               <a:cxnLst/>
-              <a:rect r="r" b="b" t="t" l="l"/>
+              <a:rect l="l" t="t" r="r" b="b"/>
               <a:pathLst>
-                <a:path h="188528" w="1870475">
+                <a:path w="1870475" h="188528">
                   <a:moveTo>
                     <a:pt x="0" y="0"/>
                   </a:moveTo>
@@ -5502,11 +6534,18 @@
               <a:miter/>
             </a:ln>
           </p:spPr>
+          <p:txBody>
+            <a:bodyPr/>
+            <a:lstStyle/>
+            <a:p>
+              <a:endParaRPr lang="es-AR"/>
+            </a:p>
+          </p:txBody>
         </p:sp>
         <p:sp>
           <p:nvSpPr>
-            <p:cNvPr name="TextBox 34" id="34"/>
-            <p:cNvSpPr txBox="true"/>
+            <p:cNvPr id="34" name="TextBox 34"/>
+            <p:cNvSpPr txBox="1"/>
             <p:nvPr/>
           </p:nvSpPr>
           <p:spPr>
@@ -5519,7 +6558,7 @@
             </a:prstGeom>
           </p:spPr>
           <p:txBody>
-            <a:bodyPr anchor="ctr" rtlCol="false" tIns="50800" lIns="50800" bIns="50800" rIns="50800"/>
+            <a:bodyPr lIns="50800" tIns="50800" rIns="50800" bIns="50800" rtlCol="0" anchor="ctr"/>
             <a:lstStyle/>
             <a:p>
               <a:pPr algn="ctr">
@@ -5528,7 +6567,7 @@
                 </a:lnSpc>
               </a:pPr>
               <a:r>
-                <a:rPr lang="en-US" sz="1501">
+                <a:rPr lang="en-US" sz="1501" dirty="0">
                   <a:solidFill>
                     <a:srgbClr val="000000"/>
                   </a:solidFill>
@@ -5537,7 +6576,7 @@
                   <a:cs typeface="Montserrat"/>
                   <a:sym typeface="Montserrat"/>
                 </a:rPr>
-                <a:t>MUESTRA CARPETAS A SALIDAS Y REGISTRA EN BASE DE DATOS</a:t>
+                <a:t>MUEVE CARPETAS A SALIDAS Y REGISTRA EN BASE DE DATOS</a:t>
               </a:r>
             </a:p>
           </p:txBody>
@@ -5545,12 +6584,12 @@
       </p:grpSp>
       <p:grpSp>
         <p:nvGrpSpPr>
-          <p:cNvPr name="Group 35" id="35"/>
+          <p:cNvPr id="35" name="Group 35"/>
           <p:cNvGrpSpPr/>
           <p:nvPr/>
         </p:nvGrpSpPr>
         <p:grpSpPr>
-          <a:xfrm rot="0">
+          <a:xfrm>
             <a:off x="10882046" y="4156840"/>
             <a:ext cx="5864654" cy="715816"/>
             <a:chOff x="0" y="0"/>
@@ -5559,12 +6598,12 @@
         </p:grpSpPr>
         <p:sp>
           <p:nvSpPr>
-            <p:cNvPr name="Freeform 36" id="36"/>
+            <p:cNvPr id="36" name="Freeform 36"/>
             <p:cNvSpPr/>
             <p:nvPr/>
           </p:nvSpPr>
           <p:spPr>
-            <a:xfrm flipH="false" flipV="false" rot="0">
+            <a:xfrm>
               <a:off x="0" y="0"/>
               <a:ext cx="1544600" cy="188528"/>
             </a:xfrm>
@@ -5573,9 +6612,9 @@
               <a:gdLst/>
               <a:ahLst/>
               <a:cxnLst/>
-              <a:rect r="r" b="b" t="t" l="l"/>
+              <a:rect l="l" t="t" r="r" b="b"/>
               <a:pathLst>
-                <a:path h="188528" w="1544600">
+                <a:path w="1544600" h="188528">
                   <a:moveTo>
                     <a:pt x="0" y="0"/>
                   </a:moveTo>
@@ -5600,11 +6639,18 @@
               <a:miter/>
             </a:ln>
           </p:spPr>
+          <p:txBody>
+            <a:bodyPr/>
+            <a:lstStyle/>
+            <a:p>
+              <a:endParaRPr lang="es-AR"/>
+            </a:p>
+          </p:txBody>
         </p:sp>
         <p:sp>
           <p:nvSpPr>
-            <p:cNvPr name="TextBox 37" id="37"/>
-            <p:cNvSpPr txBox="true"/>
+            <p:cNvPr id="37" name="TextBox 37"/>
+            <p:cNvSpPr txBox="1"/>
             <p:nvPr/>
           </p:nvSpPr>
           <p:spPr>
@@ -5617,7 +6663,7 @@
             </a:prstGeom>
           </p:spPr>
           <p:txBody>
-            <a:bodyPr anchor="ctr" rtlCol="false" tIns="50800" lIns="50800" bIns="50800" rIns="50800"/>
+            <a:bodyPr lIns="50800" tIns="50800" rIns="50800" bIns="50800" rtlCol="0" anchor="ctr"/>
             <a:lstStyle/>
             <a:p>
               <a:pPr algn="ctr">
@@ -5643,79 +6689,100 @@
       </p:grpSp>
       <p:sp>
         <p:nvSpPr>
-          <p:cNvPr name="AutoShape 38" id="38"/>
+          <p:cNvPr id="38" name="AutoShape 38"/>
           <p:cNvSpPr/>
           <p:nvPr/>
         </p:nvSpPr>
         <p:spPr>
-          <a:xfrm>
-            <a:off x="3991755" y="978165"/>
-            <a:ext cx="62335" cy="714346"/>
+          <a:xfrm flipH="1">
+            <a:off x="4054069" y="1022458"/>
+            <a:ext cx="3" cy="670051"/>
           </a:xfrm>
           <a:prstGeom prst="line">
             <a:avLst/>
           </a:prstGeom>
-          <a:ln cap="flat" w="38100">
+          <a:ln w="38100" cap="flat">
             <a:solidFill>
               <a:srgbClr val="000000"/>
             </a:solidFill>
             <a:prstDash val="solid"/>
-            <a:headEnd type="none" len="sm" w="sm"/>
-            <a:tailEnd type="none" len="sm" w="sm"/>
+            <a:headEnd type="none" w="sm" len="sm"/>
+            <a:tailEnd type="none" w="sm" len="sm"/>
           </a:ln>
         </p:spPr>
-      </p:sp>
-      <p:sp>
-        <p:nvSpPr>
-          <p:cNvPr name="AutoShape 39" id="39"/>
+        <p:txBody>
+          <a:bodyPr/>
+          <a:lstStyle/>
+          <a:p>
+            <a:endParaRPr lang="es-AR"/>
+          </a:p>
+        </p:txBody>
+      </p:sp>
+      <p:sp>
+        <p:nvSpPr>
+          <p:cNvPr id="39" name="AutoShape 39"/>
           <p:cNvSpPr/>
           <p:nvPr/>
         </p:nvSpPr>
         <p:spPr>
-          <a:xfrm flipH="true">
-            <a:off x="3985730" y="2408326"/>
-            <a:ext cx="68360" cy="567854"/>
+          <a:xfrm>
+            <a:off x="4054077" y="2408326"/>
+            <a:ext cx="0" cy="666749"/>
           </a:xfrm>
           <a:prstGeom prst="line">
             <a:avLst/>
           </a:prstGeom>
-          <a:ln cap="flat" w="38100">
+          <a:ln w="38100" cap="flat">
             <a:solidFill>
               <a:srgbClr val="000000"/>
             </a:solidFill>
             <a:prstDash val="solid"/>
-            <a:headEnd type="none" len="sm" w="sm"/>
-            <a:tailEnd type="none" len="sm" w="sm"/>
+            <a:headEnd type="none" w="sm" len="sm"/>
+            <a:tailEnd type="none" w="sm" len="sm"/>
           </a:ln>
         </p:spPr>
-      </p:sp>
-      <p:sp>
-        <p:nvSpPr>
-          <p:cNvPr name="AutoShape 40" id="40"/>
+        <p:txBody>
+          <a:bodyPr/>
+          <a:lstStyle/>
+          <a:p>
+            <a:endParaRPr lang="es-AR"/>
+          </a:p>
+        </p:txBody>
+      </p:sp>
+      <p:sp>
+        <p:nvSpPr>
+          <p:cNvPr id="40" name="AutoShape 40"/>
           <p:cNvSpPr/>
           <p:nvPr/>
         </p:nvSpPr>
         <p:spPr>
           <a:xfrm>
-            <a:off x="4054090" y="3790892"/>
-            <a:ext cx="60874" cy="666750"/>
+            <a:off x="4054077" y="3790892"/>
+            <a:ext cx="2" cy="666750"/>
           </a:xfrm>
           <a:prstGeom prst="line">
             <a:avLst/>
           </a:prstGeom>
-          <a:ln cap="flat" w="38100">
+          <a:ln w="38100" cap="flat">
             <a:solidFill>
               <a:srgbClr val="000000"/>
             </a:solidFill>
             <a:prstDash val="solid"/>
-            <a:headEnd type="none" len="sm" w="sm"/>
-            <a:tailEnd type="none" len="sm" w="sm"/>
+            <a:headEnd type="none" w="sm" len="sm"/>
+            <a:tailEnd type="none" w="sm" len="sm"/>
           </a:ln>
         </p:spPr>
-      </p:sp>
-      <p:sp>
-        <p:nvSpPr>
-          <p:cNvPr name="AutoShape 41" id="41"/>
+        <p:txBody>
+          <a:bodyPr/>
+          <a:lstStyle/>
+          <a:p>
+            <a:endParaRPr lang="es-AR"/>
+          </a:p>
+        </p:txBody>
+      </p:sp>
+      <p:sp>
+        <p:nvSpPr>
+          <p:cNvPr id="41" name="AutoShape 41"/>
           <p:cNvSpPr/>
           <p:nvPr/>
         </p:nvSpPr>
@@ -5727,259 +6794,336 @@
           <a:prstGeom prst="line">
             <a:avLst/>
           </a:prstGeom>
-          <a:ln cap="flat" w="38100">
+          <a:ln w="38100" cap="flat">
             <a:solidFill>
               <a:srgbClr val="000000"/>
             </a:solidFill>
             <a:prstDash val="solid"/>
-            <a:headEnd type="none" len="sm" w="sm"/>
-            <a:tailEnd type="none" len="sm" w="sm"/>
+            <a:headEnd type="none" w="sm" len="sm"/>
+            <a:tailEnd type="none" w="sm" len="sm"/>
           </a:ln>
         </p:spPr>
-      </p:sp>
-      <p:sp>
-        <p:nvSpPr>
-          <p:cNvPr name="AutoShape 42" id="42"/>
+        <p:txBody>
+          <a:bodyPr/>
+          <a:lstStyle/>
+          <a:p>
+            <a:endParaRPr lang="es-AR"/>
+          </a:p>
+        </p:txBody>
+      </p:sp>
+      <p:sp>
+        <p:nvSpPr>
+          <p:cNvPr id="42" name="AutoShape 42"/>
           <p:cNvSpPr/>
           <p:nvPr/>
         </p:nvSpPr>
         <p:spPr>
-          <a:xfrm flipH="true">
-            <a:off x="4002248" y="5173458"/>
-            <a:ext cx="51842" cy="615635"/>
+          <a:xfrm>
+            <a:off x="4054081" y="5173457"/>
+            <a:ext cx="2" cy="666751"/>
           </a:xfrm>
           <a:prstGeom prst="line">
             <a:avLst/>
           </a:prstGeom>
-          <a:ln cap="flat" w="38100">
+          <a:ln w="38100" cap="flat">
             <a:solidFill>
               <a:srgbClr val="000000"/>
             </a:solidFill>
             <a:prstDash val="solid"/>
-            <a:headEnd type="none" len="sm" w="sm"/>
-            <a:tailEnd type="none" len="sm" w="sm"/>
+            <a:headEnd type="none" w="sm" len="sm"/>
+            <a:tailEnd type="none" w="sm" len="sm"/>
           </a:ln>
         </p:spPr>
-      </p:sp>
-      <p:sp>
-        <p:nvSpPr>
-          <p:cNvPr name="AutoShape 43" id="43"/>
+        <p:txBody>
+          <a:bodyPr/>
+          <a:lstStyle/>
+          <a:p>
+            <a:endParaRPr lang="es-AR"/>
+          </a:p>
+        </p:txBody>
+      </p:sp>
+      <p:sp>
+        <p:nvSpPr>
+          <p:cNvPr id="43" name="AutoShape 43"/>
           <p:cNvSpPr/>
           <p:nvPr/>
         </p:nvSpPr>
         <p:spPr>
-          <a:xfrm flipH="true">
+          <a:xfrm flipH="1">
             <a:off x="7027166" y="667853"/>
             <a:ext cx="0" cy="7195551"/>
           </a:xfrm>
           <a:prstGeom prst="line">
             <a:avLst/>
           </a:prstGeom>
-          <a:ln cap="flat" w="38100">
+          <a:ln w="38100" cap="flat">
             <a:solidFill>
               <a:srgbClr val="000000"/>
             </a:solidFill>
             <a:prstDash val="solid"/>
-            <a:headEnd type="none" len="sm" w="sm"/>
-            <a:tailEnd type="none" len="sm" w="sm"/>
+            <a:headEnd type="none" w="sm" len="sm"/>
+            <a:tailEnd type="none" w="sm" len="sm"/>
           </a:ln>
         </p:spPr>
-      </p:sp>
-      <p:sp>
-        <p:nvSpPr>
-          <p:cNvPr name="AutoShape 44" id="44"/>
+        <p:txBody>
+          <a:bodyPr/>
+          <a:lstStyle/>
+          <a:p>
+            <a:endParaRPr lang="es-AR"/>
+          </a:p>
+        </p:txBody>
+      </p:sp>
+      <p:sp>
+        <p:nvSpPr>
+          <p:cNvPr id="44" name="AutoShape 44"/>
           <p:cNvSpPr/>
           <p:nvPr/>
         </p:nvSpPr>
         <p:spPr>
-          <a:xfrm flipH="true">
+          <a:xfrm flipH="1">
             <a:off x="6560441" y="309945"/>
             <a:ext cx="6964496" cy="18857"/>
           </a:xfrm>
           <a:prstGeom prst="line">
             <a:avLst/>
           </a:prstGeom>
-          <a:ln cap="flat" w="38100">
+          <a:ln w="38100" cap="flat">
             <a:solidFill>
               <a:srgbClr val="000000"/>
             </a:solidFill>
             <a:prstDash val="solid"/>
-            <a:headEnd type="none" len="sm" w="sm"/>
-            <a:tailEnd type="none" len="sm" w="sm"/>
+            <a:headEnd type="none" w="sm" len="sm"/>
+            <a:tailEnd type="none" w="sm" len="sm"/>
           </a:ln>
         </p:spPr>
-      </p:sp>
-      <p:sp>
-        <p:nvSpPr>
-          <p:cNvPr name="AutoShape 45" id="45"/>
+        <p:txBody>
+          <a:bodyPr/>
+          <a:lstStyle/>
+          <a:p>
+            <a:endParaRPr lang="es-AR"/>
+          </a:p>
+        </p:txBody>
+      </p:sp>
+      <p:sp>
+        <p:nvSpPr>
+          <p:cNvPr id="45" name="AutoShape 45"/>
           <p:cNvSpPr/>
           <p:nvPr/>
         </p:nvSpPr>
         <p:spPr>
-          <a:xfrm flipH="true">
+          <a:xfrm flipH="1">
             <a:off x="7027166" y="683093"/>
             <a:ext cx="2132132" cy="3810"/>
           </a:xfrm>
           <a:prstGeom prst="line">
             <a:avLst/>
           </a:prstGeom>
-          <a:ln cap="flat" w="38100">
+          <a:ln w="38100" cap="flat">
             <a:solidFill>
               <a:srgbClr val="000000"/>
             </a:solidFill>
             <a:prstDash val="solid"/>
-            <a:headEnd type="none" len="sm" w="sm"/>
-            <a:tailEnd type="none" len="sm" w="sm"/>
+            <a:headEnd type="none" w="sm" len="sm"/>
+            <a:tailEnd type="none" w="sm" len="sm"/>
           </a:ln>
         </p:spPr>
-      </p:sp>
-      <p:sp>
-        <p:nvSpPr>
-          <p:cNvPr name="AutoShape 46" id="46"/>
+        <p:txBody>
+          <a:bodyPr/>
+          <a:lstStyle/>
+          <a:p>
+            <a:endParaRPr lang="es-AR"/>
+          </a:p>
+        </p:txBody>
+      </p:sp>
+      <p:sp>
+        <p:nvSpPr>
+          <p:cNvPr id="46" name="AutoShape 46"/>
           <p:cNvSpPr/>
           <p:nvPr/>
         </p:nvSpPr>
         <p:spPr>
-          <a:xfrm flipH="true" flipV="true">
+          <a:xfrm flipH="1" flipV="1">
             <a:off x="5031201" y="7882454"/>
             <a:ext cx="1995965" cy="0"/>
           </a:xfrm>
           <a:prstGeom prst="line">
             <a:avLst/>
           </a:prstGeom>
-          <a:ln cap="flat" w="38100">
+          <a:ln w="38100" cap="flat">
             <a:solidFill>
               <a:srgbClr val="000000"/>
             </a:solidFill>
             <a:prstDash val="solid"/>
-            <a:headEnd type="none" len="sm" w="sm"/>
-            <a:tailEnd type="none" len="sm" w="sm"/>
+            <a:headEnd type="none" w="sm" len="sm"/>
+            <a:tailEnd type="none" w="sm" len="sm"/>
           </a:ln>
         </p:spPr>
-      </p:sp>
-      <p:sp>
-        <p:nvSpPr>
-          <p:cNvPr name="AutoShape 47" id="47"/>
+        <p:txBody>
+          <a:bodyPr/>
+          <a:lstStyle/>
+          <a:p>
+            <a:endParaRPr lang="es-AR"/>
+          </a:p>
+        </p:txBody>
+      </p:sp>
+      <p:sp>
+        <p:nvSpPr>
+          <p:cNvPr id="47" name="AutoShape 47"/>
           <p:cNvSpPr/>
           <p:nvPr/>
         </p:nvSpPr>
         <p:spPr>
-          <a:xfrm flipH="true">
+          <a:xfrm flipH="1">
             <a:off x="5382856" y="7147588"/>
             <a:ext cx="1177584" cy="19050"/>
           </a:xfrm>
           <a:prstGeom prst="line">
             <a:avLst/>
           </a:prstGeom>
-          <a:ln cap="flat" w="38100">
+          <a:ln w="38100" cap="flat">
             <a:solidFill>
               <a:srgbClr val="000000"/>
             </a:solidFill>
             <a:prstDash val="solid"/>
-            <a:headEnd type="none" len="sm" w="sm"/>
-            <a:tailEnd type="none" len="sm" w="sm"/>
+            <a:headEnd type="none" w="sm" len="sm"/>
+            <a:tailEnd type="none" w="sm" len="sm"/>
           </a:ln>
         </p:spPr>
-      </p:sp>
-      <p:sp>
-        <p:nvSpPr>
-          <p:cNvPr name="AutoShape 48" id="48"/>
+        <p:txBody>
+          <a:bodyPr/>
+          <a:lstStyle/>
+          <a:p>
+            <a:endParaRPr lang="es-AR"/>
+          </a:p>
+        </p:txBody>
+      </p:sp>
+      <p:sp>
+        <p:nvSpPr>
+          <p:cNvPr id="48" name="AutoShape 48"/>
           <p:cNvSpPr/>
           <p:nvPr/>
         </p:nvSpPr>
         <p:spPr>
           <a:xfrm>
-            <a:off x="9144000" y="667853"/>
-            <a:ext cx="80531" cy="357908"/>
+            <a:off x="9159295" y="667853"/>
+            <a:ext cx="1" cy="306502"/>
           </a:xfrm>
           <a:prstGeom prst="line">
             <a:avLst/>
           </a:prstGeom>
-          <a:ln cap="flat" w="38100">
+          <a:ln w="38100" cap="flat">
             <a:solidFill>
               <a:srgbClr val="000000"/>
             </a:solidFill>
             <a:prstDash val="solid"/>
-            <a:headEnd type="none" len="sm" w="sm"/>
-            <a:tailEnd type="none" len="sm" w="sm"/>
+            <a:headEnd type="none" w="sm" len="sm"/>
+            <a:tailEnd type="none" w="sm" len="sm"/>
           </a:ln>
         </p:spPr>
-      </p:sp>
-      <p:sp>
-        <p:nvSpPr>
-          <p:cNvPr name="AutoShape 49" id="49"/>
+        <p:txBody>
+          <a:bodyPr/>
+          <a:lstStyle/>
+          <a:p>
+            <a:endParaRPr lang="es-AR"/>
+          </a:p>
+        </p:txBody>
+      </p:sp>
+      <p:sp>
+        <p:nvSpPr>
+          <p:cNvPr id="49" name="AutoShape 49"/>
           <p:cNvSpPr/>
           <p:nvPr/>
         </p:nvSpPr>
         <p:spPr>
-          <a:xfrm>
-            <a:off x="13508476" y="309945"/>
-            <a:ext cx="0" cy="668220"/>
+          <a:xfrm flipH="1">
+            <a:off x="13508475" y="309945"/>
+            <a:ext cx="1" cy="664397"/>
           </a:xfrm>
           <a:prstGeom prst="line">
             <a:avLst/>
           </a:prstGeom>
-          <a:ln cap="flat" w="38100">
+          <a:ln w="38100" cap="flat">
             <a:solidFill>
               <a:srgbClr val="000000"/>
             </a:solidFill>
             <a:prstDash val="solid"/>
-            <a:headEnd type="none" len="sm" w="sm"/>
-            <a:tailEnd type="none" len="sm" w="sm"/>
+            <a:headEnd type="none" w="sm" len="sm"/>
+            <a:tailEnd type="none" w="sm" len="sm"/>
           </a:ln>
         </p:spPr>
-      </p:sp>
-      <p:sp>
-        <p:nvSpPr>
-          <p:cNvPr name="AutoShape 50" id="50"/>
+        <p:txBody>
+          <a:bodyPr/>
+          <a:lstStyle/>
+          <a:p>
+            <a:endParaRPr lang="es-AR"/>
+          </a:p>
+        </p:txBody>
+      </p:sp>
+      <p:sp>
+        <p:nvSpPr>
+          <p:cNvPr id="50" name="AutoShape 50"/>
           <p:cNvSpPr/>
           <p:nvPr/>
         </p:nvSpPr>
         <p:spPr>
           <a:xfrm>
-            <a:off x="13508476" y="1693980"/>
-            <a:ext cx="79905" cy="1013351"/>
+            <a:off x="13523772" y="1692509"/>
+            <a:ext cx="16391" cy="970436"/>
           </a:xfrm>
           <a:prstGeom prst="line">
             <a:avLst/>
           </a:prstGeom>
-          <a:ln cap="flat" w="38100">
+          <a:ln w="38100" cap="flat">
             <a:solidFill>
               <a:srgbClr val="000000"/>
             </a:solidFill>
             <a:prstDash val="solid"/>
-            <a:headEnd type="none" len="sm" w="sm"/>
-            <a:tailEnd type="none" len="sm" w="sm"/>
+            <a:headEnd type="none" w="sm" len="sm"/>
+            <a:tailEnd type="none" w="sm" len="sm"/>
           </a:ln>
         </p:spPr>
-      </p:sp>
-      <p:sp>
-        <p:nvSpPr>
-          <p:cNvPr name="AutoShape 51" id="51"/>
+        <p:txBody>
+          <a:bodyPr/>
+          <a:lstStyle/>
+          <a:p>
+            <a:endParaRPr lang="es-AR"/>
+          </a:p>
+        </p:txBody>
+      </p:sp>
+      <p:sp>
+        <p:nvSpPr>
+          <p:cNvPr id="51" name="AutoShape 51"/>
           <p:cNvSpPr/>
           <p:nvPr/>
         </p:nvSpPr>
         <p:spPr>
           <a:xfrm>
-            <a:off x="13508476" y="3378774"/>
-            <a:ext cx="0" cy="659010"/>
+            <a:off x="13523772" y="3378773"/>
+            <a:ext cx="0" cy="778065"/>
           </a:xfrm>
           <a:prstGeom prst="line">
             <a:avLst/>
           </a:prstGeom>
-          <a:ln cap="flat" w="38100">
+          <a:ln w="38100" cap="flat">
             <a:solidFill>
               <a:srgbClr val="000000"/>
             </a:solidFill>
             <a:prstDash val="solid"/>
-            <a:headEnd type="none" len="sm" w="sm"/>
-            <a:tailEnd type="none" len="sm" w="sm"/>
+            <a:headEnd type="none" w="sm" len="sm"/>
+            <a:tailEnd type="none" w="sm" len="sm"/>
           </a:ln>
         </p:spPr>
-      </p:sp>
-      <p:sp>
-        <p:nvSpPr>
-          <p:cNvPr name="AutoShape 52" id="52"/>
+        <p:txBody>
+          <a:bodyPr/>
+          <a:lstStyle/>
+          <a:p>
+            <a:endParaRPr lang="es-AR"/>
+          </a:p>
+        </p:txBody>
+      </p:sp>
+      <p:sp>
+        <p:nvSpPr>
+          <p:cNvPr id="52" name="AutoShape 52"/>
           <p:cNvSpPr/>
           <p:nvPr/>
         </p:nvSpPr>
@@ -5991,19 +7135,26 @@
           <a:prstGeom prst="line">
             <a:avLst/>
           </a:prstGeom>
-          <a:ln cap="flat" w="38100">
+          <a:ln w="38100" cap="flat">
             <a:solidFill>
               <a:srgbClr val="000000"/>
             </a:solidFill>
             <a:prstDash val="solid"/>
-            <a:headEnd type="none" len="sm" w="sm"/>
-            <a:tailEnd type="none" len="sm" w="sm"/>
+            <a:headEnd type="none" w="sm" len="sm"/>
+            <a:tailEnd type="none" w="sm" len="sm"/>
           </a:ln>
         </p:spPr>
-      </p:sp>
-      <p:sp>
-        <p:nvSpPr>
-          <p:cNvPr name="AutoShape 53" id="53"/>
+        <p:txBody>
+          <a:bodyPr/>
+          <a:lstStyle/>
+          <a:p>
+            <a:endParaRPr lang="es-AR"/>
+          </a:p>
+        </p:txBody>
+      </p:sp>
+      <p:sp>
+        <p:nvSpPr>
+          <p:cNvPr id="53" name="AutoShape 53"/>
           <p:cNvSpPr/>
           <p:nvPr/>
         </p:nvSpPr>
@@ -6015,139 +7166,181 @@
           <a:prstGeom prst="line">
             <a:avLst/>
           </a:prstGeom>
-          <a:ln cap="flat" w="38100">
+          <a:ln w="38100" cap="flat">
             <a:solidFill>
               <a:srgbClr val="000000"/>
             </a:solidFill>
             <a:prstDash val="solid"/>
-            <a:headEnd type="none" len="sm" w="sm"/>
-            <a:tailEnd type="none" len="sm" w="sm"/>
+            <a:headEnd type="none" w="sm" len="sm"/>
+            <a:tailEnd type="none" w="sm" len="sm"/>
           </a:ln>
         </p:spPr>
-      </p:sp>
-      <p:sp>
-        <p:nvSpPr>
-          <p:cNvPr name="AutoShape 54" id="54"/>
+        <p:txBody>
+          <a:bodyPr/>
+          <a:lstStyle/>
+          <a:p>
+            <a:endParaRPr lang="es-AR"/>
+          </a:p>
+        </p:txBody>
+      </p:sp>
+      <p:sp>
+        <p:nvSpPr>
+          <p:cNvPr id="54" name="AutoShape 54"/>
           <p:cNvSpPr/>
           <p:nvPr/>
         </p:nvSpPr>
         <p:spPr>
-          <a:xfrm>
-            <a:off x="11437545" y="5173458"/>
-            <a:ext cx="2070931" cy="0"/>
+          <a:xfrm flipV="1">
+            <a:off x="11437545" y="5172443"/>
+            <a:ext cx="2102618" cy="1015"/>
           </a:xfrm>
           <a:prstGeom prst="line">
             <a:avLst/>
           </a:prstGeom>
-          <a:ln cap="flat" w="38100">
+          <a:ln w="38100" cap="flat">
             <a:solidFill>
               <a:srgbClr val="000000"/>
             </a:solidFill>
             <a:prstDash val="solid"/>
-            <a:headEnd type="none" len="sm" w="sm"/>
-            <a:tailEnd type="none" len="sm" w="sm"/>
+            <a:headEnd type="none" w="sm" len="sm"/>
+            <a:tailEnd type="none" w="sm" len="sm"/>
           </a:ln>
         </p:spPr>
-      </p:sp>
-      <p:sp>
-        <p:nvSpPr>
-          <p:cNvPr name="AutoShape 55" id="55"/>
+        <p:txBody>
+          <a:bodyPr/>
+          <a:lstStyle/>
+          <a:p>
+            <a:endParaRPr lang="es-AR"/>
+          </a:p>
+        </p:txBody>
+      </p:sp>
+      <p:sp>
+        <p:nvSpPr>
+          <p:cNvPr id="55" name="AutoShape 55"/>
           <p:cNvSpPr/>
           <p:nvPr/>
         </p:nvSpPr>
         <p:spPr>
-          <a:xfrm>
-            <a:off x="13508476" y="4872656"/>
-            <a:ext cx="16461" cy="300802"/>
+          <a:xfrm flipH="1">
+            <a:off x="13540198" y="4872656"/>
+            <a:ext cx="35" cy="300788"/>
           </a:xfrm>
           <a:prstGeom prst="line">
             <a:avLst/>
           </a:prstGeom>
-          <a:ln cap="flat" w="38100">
+          <a:ln w="38100" cap="flat">
             <a:solidFill>
               <a:srgbClr val="000000"/>
             </a:solidFill>
             <a:prstDash val="solid"/>
-            <a:headEnd type="none" len="sm" w="sm"/>
-            <a:tailEnd type="none" len="sm" w="sm"/>
+            <a:headEnd type="none" w="sm" len="sm"/>
+            <a:tailEnd type="none" w="sm" len="sm"/>
           </a:ln>
         </p:spPr>
-      </p:sp>
-      <p:sp>
-        <p:nvSpPr>
-          <p:cNvPr name="AutoShape 56" id="56"/>
+        <p:txBody>
+          <a:bodyPr/>
+          <a:lstStyle/>
+          <a:p>
+            <a:endParaRPr lang="es-AR"/>
+          </a:p>
+        </p:txBody>
+      </p:sp>
+      <p:sp>
+        <p:nvSpPr>
+          <p:cNvPr id="56" name="AutoShape 56"/>
           <p:cNvSpPr/>
           <p:nvPr/>
         </p:nvSpPr>
         <p:spPr>
           <a:xfrm>
-            <a:off x="11437545" y="5173458"/>
-            <a:ext cx="0" cy="477265"/>
+            <a:off x="11451658" y="5173457"/>
+            <a:ext cx="3" cy="476252"/>
           </a:xfrm>
           <a:prstGeom prst="line">
             <a:avLst/>
           </a:prstGeom>
-          <a:ln cap="flat" w="38100">
+          <a:ln w="38100" cap="flat">
             <a:solidFill>
               <a:srgbClr val="000000"/>
             </a:solidFill>
             <a:prstDash val="solid"/>
-            <a:headEnd type="none" len="sm" w="sm"/>
-            <a:tailEnd type="none" len="sm" w="sm"/>
+            <a:headEnd type="none" w="sm" len="sm"/>
+            <a:tailEnd type="none" w="sm" len="sm"/>
           </a:ln>
         </p:spPr>
-      </p:sp>
-      <p:sp>
-        <p:nvSpPr>
-          <p:cNvPr name="AutoShape 57" id="57"/>
+        <p:txBody>
+          <a:bodyPr/>
+          <a:lstStyle/>
+          <a:p>
+            <a:endParaRPr lang="es-AR"/>
+          </a:p>
+        </p:txBody>
+      </p:sp>
+      <p:sp>
+        <p:nvSpPr>
+          <p:cNvPr id="57" name="AutoShape 57"/>
           <p:cNvSpPr/>
           <p:nvPr/>
         </p:nvSpPr>
         <p:spPr>
-          <a:xfrm flipH="true">
-            <a:off x="11267452" y="5143500"/>
-            <a:ext cx="21553" cy="557304"/>
+          <a:xfrm flipH="1">
+            <a:off x="11267442" y="5173457"/>
+            <a:ext cx="4" cy="476252"/>
           </a:xfrm>
           <a:prstGeom prst="line">
             <a:avLst/>
           </a:prstGeom>
-          <a:ln cap="flat" w="38100">
+          <a:ln w="38100" cap="flat">
             <a:solidFill>
               <a:srgbClr val="000000"/>
             </a:solidFill>
             <a:prstDash val="solid"/>
-            <a:headEnd type="none" len="sm" w="sm"/>
-            <a:tailEnd type="none" len="sm" w="sm"/>
+            <a:headEnd type="none" w="sm" len="sm"/>
+            <a:tailEnd type="none" w="sm" len="sm"/>
           </a:ln>
         </p:spPr>
-      </p:sp>
-      <p:sp>
-        <p:nvSpPr>
-          <p:cNvPr name="AutoShape 58" id="58"/>
+        <p:txBody>
+          <a:bodyPr/>
+          <a:lstStyle/>
+          <a:p>
+            <a:endParaRPr lang="es-AR"/>
+          </a:p>
+        </p:txBody>
+      </p:sp>
+      <p:sp>
+        <p:nvSpPr>
+          <p:cNvPr id="58" name="AutoShape 58"/>
           <p:cNvSpPr/>
           <p:nvPr/>
         </p:nvSpPr>
         <p:spPr>
-          <a:xfrm flipH="true">
-            <a:off x="11068931" y="6366538"/>
-            <a:ext cx="220074" cy="821328"/>
+          <a:xfrm flipH="1">
+            <a:off x="11289003" y="6366538"/>
+            <a:ext cx="1" cy="778068"/>
           </a:xfrm>
           <a:prstGeom prst="line">
             <a:avLst/>
           </a:prstGeom>
-          <a:ln cap="flat" w="38100">
+          <a:ln w="38100" cap="flat">
             <a:solidFill>
               <a:srgbClr val="000000"/>
             </a:solidFill>
             <a:prstDash val="solid"/>
-            <a:headEnd type="none" len="sm" w="sm"/>
-            <a:tailEnd type="none" len="sm" w="sm"/>
+            <a:headEnd type="none" w="sm" len="sm"/>
+            <a:tailEnd type="none" w="sm" len="sm"/>
           </a:ln>
         </p:spPr>
-      </p:sp>
-      <p:sp>
-        <p:nvSpPr>
-          <p:cNvPr name="AutoShape 59" id="59"/>
+        <p:txBody>
+          <a:bodyPr/>
+          <a:lstStyle/>
+          <a:p>
+            <a:endParaRPr lang="es-AR"/>
+          </a:p>
+        </p:txBody>
+      </p:sp>
+      <p:sp>
+        <p:nvSpPr>
+          <p:cNvPr id="59" name="AutoShape 59"/>
           <p:cNvSpPr/>
           <p:nvPr/>
         </p:nvSpPr>
@@ -6159,15 +7352,22 @@
           <a:prstGeom prst="line">
             <a:avLst/>
           </a:prstGeom>
-          <a:ln cap="flat" w="38100">
+          <a:ln w="38100" cap="flat">
             <a:solidFill>
               <a:srgbClr val="000000"/>
             </a:solidFill>
             <a:prstDash val="solid"/>
-            <a:headEnd type="none" len="sm" w="sm"/>
-            <a:tailEnd type="none" len="sm" w="sm"/>
+            <a:headEnd type="none" w="sm" len="sm"/>
+            <a:tailEnd type="none" w="sm" len="sm"/>
           </a:ln>
         </p:spPr>
+        <p:txBody>
+          <a:bodyPr/>
+          <a:lstStyle/>
+          <a:p>
+            <a:endParaRPr lang="es-AR"/>
+          </a:p>
+        </p:txBody>
       </p:sp>
     </p:spTree>
   </p:cSld>
@@ -6178,13 +7378,14 @@
 </file>
 
 <file path=ppt/slides/slide5.xml><?xml version="1.0" encoding="utf-8"?>
-<p:sld xmlns:p="http://schemas.openxmlformats.org/presentationml/2006/main" xmlns:a="http://schemas.openxmlformats.org/drawingml/2006/main">
+<p:sld xmlns:a="http://schemas.openxmlformats.org/drawingml/2006/main" xmlns:r="http://schemas.openxmlformats.org/officeDocument/2006/relationships" xmlns:p="http://schemas.openxmlformats.org/presentationml/2006/main">
   <p:cSld>
     <p:bg>
       <p:bgPr>
         <a:solidFill>
           <a:srgbClr val="FAFAFA"/>
         </a:solidFill>
+        <a:effectLst/>
       </p:bgPr>
     </p:bg>
     <p:spTree>
@@ -6203,12 +7404,12 @@
       </p:grpSpPr>
       <p:sp>
         <p:nvSpPr>
-          <p:cNvPr name="TextBox 2" id="2"/>
-          <p:cNvSpPr txBox="true"/>
+          <p:cNvPr id="2" name="TextBox 2"/>
+          <p:cNvSpPr txBox="1"/>
           <p:nvPr/>
         </p:nvSpPr>
         <p:spPr>
-          <a:xfrm rot="0">
+          <a:xfrm>
             <a:off x="275489" y="438789"/>
             <a:ext cx="16983811" cy="1275073"/>
           </a:xfrm>
@@ -6217,7 +7418,7 @@
           </a:prstGeom>
         </p:spPr>
         <p:txBody>
-          <a:bodyPr anchor="t" rtlCol="false" tIns="0" lIns="0" bIns="0" rIns="0">
+          <a:bodyPr lIns="0" tIns="0" rIns="0" bIns="0" rtlCol="0" anchor="t">
             <a:spAutoFit/>
           </a:bodyPr>
           <a:lstStyle/>
@@ -6231,7 +7432,7 @@
               </a:spcBef>
             </a:pPr>
             <a:r>
-              <a:rPr lang="en-US" b="true" sz="4914" u="sng">
+              <a:rPr lang="en-US" sz="4914" b="1" u="sng">
                 <a:solidFill>
                   <a:srgbClr val="DECFAF"/>
                 </a:solidFill>
@@ -6240,31 +7441,19 @@
                 <a:cs typeface="Montserrat Ultra-Bold"/>
                 <a:sym typeface="Montserrat Ultra-Bold"/>
               </a:rPr>
-              <a:t>Beneficios</a:t>
-            </a:r>
-            <a:r>
-              <a:rPr lang="en-US" b="true" sz="4914" u="sng">
-                <a:solidFill>
-                  <a:srgbClr val="DECFAF"/>
-                </a:solidFill>
-                <a:latin typeface="Montserrat Ultra-Bold"/>
-                <a:ea typeface="Montserrat Ultra-Bold"/>
-                <a:cs typeface="Montserrat Ultra-Bold"/>
-                <a:sym typeface="Montserrat Ultra-Bold"/>
-              </a:rPr>
-              <a:t> de la Aplicación (El Retorno de Inversión)</a:t>
-            </a:r>
-          </a:p>
-        </p:txBody>
-      </p:sp>
-      <p:sp>
-        <p:nvSpPr>
-          <p:cNvPr name="TextBox 3" id="3"/>
-          <p:cNvSpPr txBox="true"/>
+              <a:t>Beneficios de la Aplicación (El Retorno de Inversión)</a:t>
+            </a:r>
+          </a:p>
+        </p:txBody>
+      </p:sp>
+      <p:sp>
+        <p:nvSpPr>
+          <p:cNvPr id="3" name="TextBox 3"/>
+          <p:cNvSpPr txBox="1"/>
           <p:nvPr/>
         </p:nvSpPr>
         <p:spPr>
-          <a:xfrm rot="0">
+          <a:xfrm>
             <a:off x="656388" y="2316159"/>
             <a:ext cx="4443561" cy="761455"/>
           </a:xfrm>
@@ -6273,7 +7462,7 @@
           </a:prstGeom>
         </p:spPr>
         <p:txBody>
-          <a:bodyPr anchor="t" rtlCol="false" tIns="0" lIns="0" bIns="0" rIns="0">
+          <a:bodyPr lIns="0" tIns="0" rIns="0" bIns="0" rtlCol="0" anchor="t">
             <a:spAutoFit/>
           </a:bodyPr>
           <a:lstStyle/>
@@ -6287,7 +7476,7 @@
               </a:spcBef>
             </a:pPr>
             <a:r>
-              <a:rPr lang="en-US" b="true" sz="2978">
+              <a:rPr lang="en-US" sz="2978" b="1">
                 <a:solidFill>
                   <a:srgbClr val="000000"/>
                 </a:solidFill>
@@ -6296,31 +7485,19 @@
                 <a:cs typeface="Montserrat Ultra-Bold"/>
                 <a:sym typeface="Montserrat Ultra-Bold"/>
               </a:rPr>
-              <a:t>Ahorro </a:t>
-            </a:r>
-            <a:r>
-              <a:rPr lang="en-US" b="true" sz="2978">
-                <a:solidFill>
-                  <a:srgbClr val="000000"/>
-                </a:solidFill>
-                <a:latin typeface="Montserrat Ultra-Bold"/>
-                <a:ea typeface="Montserrat Ultra-Bold"/>
-                <a:cs typeface="Montserrat Ultra-Bold"/>
-                <a:sym typeface="Montserrat Ultra-Bold"/>
-              </a:rPr>
-              <a:t>de Tiempo (95%):</a:t>
-            </a:r>
-          </a:p>
-        </p:txBody>
-      </p:sp>
-      <p:sp>
-        <p:nvSpPr>
-          <p:cNvPr name="TextBox 4" id="4"/>
-          <p:cNvSpPr txBox="true"/>
+              <a:t>Ahorro de Tiempo (95%):</a:t>
+            </a:r>
+          </a:p>
+        </p:txBody>
+      </p:sp>
+      <p:sp>
+        <p:nvSpPr>
+          <p:cNvPr id="4" name="TextBox 4"/>
+          <p:cNvSpPr txBox="1"/>
           <p:nvPr/>
         </p:nvSpPr>
         <p:spPr>
-          <a:xfrm rot="0">
+          <a:xfrm>
             <a:off x="5763136" y="2316159"/>
             <a:ext cx="11868476" cy="761455"/>
           </a:xfrm>
@@ -6329,7 +7506,7 @@
           </a:prstGeom>
         </p:spPr>
         <p:txBody>
-          <a:bodyPr anchor="t" rtlCol="false" tIns="0" lIns="0" bIns="0" rIns="0">
+          <a:bodyPr lIns="0" tIns="0" rIns="0" bIns="0" rtlCol="0" anchor="t">
             <a:spAutoFit/>
           </a:bodyPr>
           <a:lstStyle/>
@@ -6352,31 +7529,19 @@
                 <a:cs typeface="Montserrat"/>
                 <a:sym typeface="Montserrat"/>
               </a:rPr>
-              <a:t>L</a:t>
-            </a:r>
-            <a:r>
-              <a:rPr lang="en-US" sz="2978">
-                <a:solidFill>
-                  <a:srgbClr val="000000"/>
-                </a:solidFill>
-                <a:latin typeface="Montserrat"/>
-                <a:ea typeface="Montserrat"/>
-                <a:cs typeface="Montserrat"/>
-                <a:sym typeface="Montserrat"/>
-              </a:rPr>
-              <a:t>as búsquedas de hojas de reparto pasan de tomar minutos (o días) a resolverse en 1 segundo.</a:t>
-            </a:r>
-          </a:p>
-        </p:txBody>
-      </p:sp>
-      <p:sp>
-        <p:nvSpPr>
-          <p:cNvPr name="TextBox 5" id="5"/>
-          <p:cNvSpPr txBox="true"/>
+              <a:t>Las búsquedas de hojas de reparto pasan de tomar minutos (o días) a resolverse en 1 segundo.</a:t>
+            </a:r>
+          </a:p>
+        </p:txBody>
+      </p:sp>
+      <p:sp>
+        <p:nvSpPr>
+          <p:cNvPr id="5" name="TextBox 5"/>
+          <p:cNvSpPr txBox="1"/>
           <p:nvPr/>
         </p:nvSpPr>
         <p:spPr>
-          <a:xfrm rot="0">
+          <a:xfrm>
             <a:off x="656388" y="5743575"/>
             <a:ext cx="4443561" cy="761455"/>
           </a:xfrm>
@@ -6385,7 +7550,7 @@
           </a:prstGeom>
         </p:spPr>
         <p:txBody>
-          <a:bodyPr anchor="t" rtlCol="false" tIns="0" lIns="0" bIns="0" rIns="0">
+          <a:bodyPr lIns="0" tIns="0" rIns="0" bIns="0" rtlCol="0" anchor="t">
             <a:spAutoFit/>
           </a:bodyPr>
           <a:lstStyle/>
@@ -6399,7 +7564,7 @@
               </a:spcBef>
             </a:pPr>
             <a:r>
-              <a:rPr lang="en-US" b="true" sz="2978">
+              <a:rPr lang="en-US" sz="2978" b="1">
                 <a:solidFill>
                   <a:srgbClr val="000000"/>
                 </a:solidFill>
@@ -6408,31 +7573,19 @@
                 <a:cs typeface="Montserrat Ultra-Bold"/>
                 <a:sym typeface="Montserrat Ultra-Bold"/>
               </a:rPr>
-              <a:t>Control </a:t>
-            </a:r>
-            <a:r>
-              <a:rPr lang="en-US" b="true" sz="2978">
-                <a:solidFill>
-                  <a:srgbClr val="000000"/>
-                </a:solidFill>
-                <a:latin typeface="Montserrat Ultra-Bold"/>
-                <a:ea typeface="Montserrat Ultra-Bold"/>
-                <a:cs typeface="Montserrat Ultra-Bold"/>
-                <a:sym typeface="Montserrat Ultra-Bold"/>
-              </a:rPr>
-              <a:t>de Inconsistencias:</a:t>
-            </a:r>
-          </a:p>
-        </p:txBody>
-      </p:sp>
-      <p:sp>
-        <p:nvSpPr>
-          <p:cNvPr name="TextBox 6" id="6"/>
-          <p:cNvSpPr txBox="true"/>
+              <a:t>Control de Inconsistencias:</a:t>
+            </a:r>
+          </a:p>
+        </p:txBody>
+      </p:sp>
+      <p:sp>
+        <p:nvSpPr>
+          <p:cNvPr id="6" name="TextBox 6"/>
+          <p:cNvSpPr txBox="1"/>
           <p:nvPr/>
         </p:nvSpPr>
         <p:spPr>
-          <a:xfrm rot="0">
+          <a:xfrm>
             <a:off x="5763136" y="5743575"/>
             <a:ext cx="11868476" cy="1132930"/>
           </a:xfrm>
@@ -6441,7 +7594,7 @@
           </a:prstGeom>
         </p:spPr>
         <p:txBody>
-          <a:bodyPr anchor="t" rtlCol="false" tIns="0" lIns="0" bIns="0" rIns="0">
+          <a:bodyPr lIns="0" tIns="0" rIns="0" bIns="0" rtlCol="0" anchor="t">
             <a:spAutoFit/>
           </a:bodyPr>
           <a:lstStyle/>
@@ -6464,31 +7617,19 @@
                 <a:cs typeface="Montserrat"/>
                 <a:sym typeface="Montserrat"/>
               </a:rPr>
-              <a:t>L</a:t>
-            </a:r>
-            <a:r>
-              <a:rPr lang="en-US" sz="2978">
-                <a:solidFill>
-                  <a:srgbClr val="000000"/>
-                </a:solidFill>
-                <a:latin typeface="Montserrat"/>
-                <a:ea typeface="Montserrat"/>
-                <a:cs typeface="Montserrat"/>
-                <a:sym typeface="Montserrat"/>
-              </a:rPr>
-              <a:t>as hojas de reparto mal impresas o ilegibles van a "Revisión", alertando de inmediato a la administración sobre fallas en la digitalización.</a:t>
-            </a:r>
-          </a:p>
-        </p:txBody>
-      </p:sp>
-      <p:sp>
-        <p:nvSpPr>
-          <p:cNvPr name="TextBox 7" id="7"/>
-          <p:cNvSpPr txBox="true"/>
+              <a:t>Las hojas de reparto mal impresas o ilegibles van a "Revisión", alertando de inmediato a la administración sobre fallas en la digitalización.</a:t>
+            </a:r>
+          </a:p>
+        </p:txBody>
+      </p:sp>
+      <p:sp>
+        <p:nvSpPr>
+          <p:cNvPr id="7" name="TextBox 7"/>
+          <p:cNvSpPr txBox="1"/>
           <p:nvPr/>
         </p:nvSpPr>
         <p:spPr>
-          <a:xfrm rot="0">
+          <a:xfrm>
             <a:off x="656388" y="4010570"/>
             <a:ext cx="4443561" cy="761455"/>
           </a:xfrm>
@@ -6497,7 +7638,7 @@
           </a:prstGeom>
         </p:spPr>
         <p:txBody>
-          <a:bodyPr anchor="t" rtlCol="false" tIns="0" lIns="0" bIns="0" rIns="0">
+          <a:bodyPr lIns="0" tIns="0" rIns="0" bIns="0" rtlCol="0" anchor="t">
             <a:spAutoFit/>
           </a:bodyPr>
           <a:lstStyle/>
@@ -6511,7 +7652,7 @@
               </a:spcBef>
             </a:pPr>
             <a:r>
-              <a:rPr lang="en-US" b="true" sz="2978">
+              <a:rPr lang="en-US" sz="2978" b="1">
                 <a:solidFill>
                   <a:srgbClr val="000000"/>
                 </a:solidFill>
@@ -6520,31 +7661,19 @@
                 <a:cs typeface="Montserrat Ultra-Bold"/>
                 <a:sym typeface="Montserrat Ultra-Bold"/>
               </a:rPr>
-              <a:t>Seg</a:t>
-            </a:r>
-            <a:r>
-              <a:rPr lang="en-US" b="true" sz="2978">
-                <a:solidFill>
-                  <a:srgbClr val="000000"/>
-                </a:solidFill>
-                <a:latin typeface="Montserrat Ultra-Bold"/>
-                <a:ea typeface="Montserrat Ultra-Bold"/>
-                <a:cs typeface="Montserrat Ultra-Bold"/>
-                <a:sym typeface="Montserrat Ultra-Bold"/>
-              </a:rPr>
-              <a:t>uridad y Auditoría:</a:t>
-            </a:r>
-          </a:p>
-        </p:txBody>
-      </p:sp>
-      <p:sp>
-        <p:nvSpPr>
-          <p:cNvPr name="TextBox 8" id="8"/>
-          <p:cNvSpPr txBox="true"/>
+              <a:t>Seguridad y Auditoría:</a:t>
+            </a:r>
+          </a:p>
+        </p:txBody>
+      </p:sp>
+      <p:sp>
+        <p:nvSpPr>
+          <p:cNvPr id="8" name="TextBox 8"/>
+          <p:cNvSpPr txBox="1"/>
           <p:nvPr/>
         </p:nvSpPr>
         <p:spPr>
-          <a:xfrm rot="0">
+          <a:xfrm>
             <a:off x="5763136" y="4010570"/>
             <a:ext cx="11868476" cy="761455"/>
           </a:xfrm>
@@ -6553,7 +7682,7 @@
           </a:prstGeom>
         </p:spPr>
         <p:txBody>
-          <a:bodyPr anchor="t" rtlCol="false" tIns="0" lIns="0" bIns="0" rIns="0">
+          <a:bodyPr lIns="0" tIns="0" rIns="0" bIns="0" rtlCol="0" anchor="t">
             <a:spAutoFit/>
           </a:bodyPr>
           <a:lstStyle/>
@@ -6576,31 +7705,19 @@
                 <a:cs typeface="Montserrat"/>
                 <a:sym typeface="Montserrat"/>
               </a:rPr>
-              <a:t>L</a:t>
-            </a:r>
-            <a:r>
-              <a:rPr lang="en-US" sz="2978">
-                <a:solidFill>
-                  <a:srgbClr val="000000"/>
-                </a:solidFill>
-                <a:latin typeface="Montserrat"/>
-                <a:ea typeface="Montserrat"/>
-                <a:cs typeface="Montserrat"/>
-                <a:sym typeface="Montserrat"/>
-              </a:rPr>
-              <a:t>os documentos quedan registrados en una base de datos segura. Cero riesgo de pérdidas.</a:t>
-            </a:r>
-          </a:p>
-        </p:txBody>
-      </p:sp>
-      <p:sp>
-        <p:nvSpPr>
-          <p:cNvPr name="TextBox 9" id="9"/>
-          <p:cNvSpPr txBox="true"/>
+              <a:t>Los documentos quedan registrados en una base de datos segura. Cero riesgo de pérdidas.</a:t>
+            </a:r>
+          </a:p>
+        </p:txBody>
+      </p:sp>
+      <p:sp>
+        <p:nvSpPr>
+          <p:cNvPr id="9" name="TextBox 9"/>
+          <p:cNvSpPr txBox="1"/>
           <p:nvPr/>
         </p:nvSpPr>
         <p:spPr>
-          <a:xfrm rot="0">
+          <a:xfrm>
             <a:off x="656388" y="7476580"/>
             <a:ext cx="4443561" cy="389980"/>
           </a:xfrm>
@@ -6609,7 +7726,7 @@
           </a:prstGeom>
         </p:spPr>
         <p:txBody>
-          <a:bodyPr anchor="t" rtlCol="false" tIns="0" lIns="0" bIns="0" rIns="0">
+          <a:bodyPr lIns="0" tIns="0" rIns="0" bIns="0" rtlCol="0" anchor="t">
             <a:spAutoFit/>
           </a:bodyPr>
           <a:lstStyle/>
@@ -6623,7 +7740,7 @@
               </a:spcBef>
             </a:pPr>
             <a:r>
-              <a:rPr lang="en-US" b="true" sz="2978">
+              <a:rPr lang="en-US" sz="2978" b="1">
                 <a:solidFill>
                   <a:srgbClr val="000000"/>
                 </a:solidFill>
@@ -6632,31 +7749,19 @@
                 <a:cs typeface="Montserrat Ultra-Bold"/>
                 <a:sym typeface="Montserrat Ultra-Bold"/>
               </a:rPr>
-              <a:t>Fác</a:t>
-            </a:r>
-            <a:r>
-              <a:rPr lang="en-US" b="true" sz="2978">
-                <a:solidFill>
-                  <a:srgbClr val="000000"/>
-                </a:solidFill>
-                <a:latin typeface="Montserrat Ultra-Bold"/>
-                <a:ea typeface="Montserrat Ultra-Bold"/>
-                <a:cs typeface="Montserrat Ultra-Bold"/>
-                <a:sym typeface="Montserrat Ultra-Bold"/>
-              </a:rPr>
-              <a:t>il Adaptación:</a:t>
-            </a:r>
-          </a:p>
-        </p:txBody>
-      </p:sp>
-      <p:sp>
-        <p:nvSpPr>
-          <p:cNvPr name="TextBox 10" id="10"/>
-          <p:cNvSpPr txBox="true"/>
+              <a:t>Fácil Adaptación:</a:t>
+            </a:r>
+          </a:p>
+        </p:txBody>
+      </p:sp>
+      <p:sp>
+        <p:nvSpPr>
+          <p:cNvPr id="10" name="TextBox 10"/>
+          <p:cNvSpPr txBox="1"/>
           <p:nvPr/>
         </p:nvSpPr>
         <p:spPr>
-          <a:xfrm rot="0">
+          <a:xfrm>
             <a:off x="5763136" y="7476580"/>
             <a:ext cx="11868476" cy="761455"/>
           </a:xfrm>
@@ -6665,7 +7770,7 @@
           </a:prstGeom>
         </p:spPr>
         <p:txBody>
-          <a:bodyPr anchor="t" rtlCol="false" tIns="0" lIns="0" bIns="0" rIns="0">
+          <a:bodyPr lIns="0" tIns="0" rIns="0" bIns="0" rtlCol="0" anchor="t">
             <a:spAutoFit/>
           </a:bodyPr>
           <a:lstStyle/>
